--- a/Ch06_Fourteenth_Century.pptx
+++ b/Ch06_Fourteenth_Century.pptx
@@ -2186,7 +2186,7 @@
               <a:buNone/>
             </a:pPr>
             <a:r>
-              <a:rPr lang="en-US" sz="1100" spc="300" kern="0" dirty="0">
+              <a:rPr lang="en-US" sz="1400" spc="300" kern="0" dirty="0">
                 <a:solidFill>
                   <a:srgbClr val="E8D8A8"/>
                 </a:solidFill>
@@ -2196,7 +2196,7 @@
               </a:rPr>
               <a:t>A HISTORY OF WESTERN MUSIC · TENTH EDITION</a:t>
             </a:r>
-            <a:endParaRPr lang="en-US" sz="1100" dirty="0"/>
+            <a:endParaRPr lang="en-US" sz="1400" dirty="0"/>
           </a:p>
         </p:txBody>
       </p:sp>
@@ -2340,7 +2340,7 @@
               <a:buNone/>
             </a:pPr>
             <a:r>
-              <a:rPr lang="en-US" sz="1300" i="1" dirty="0">
+              <a:rPr lang="en-US" sz="1400" i="1" dirty="0">
                 <a:solidFill>
                   <a:srgbClr val="E8D8A8"/>
                 </a:solidFill>
@@ -2350,7 +2350,7 @@
               </a:rPr>
               <a:t>Ars Nova · Machaut · Ars Subtilior · Trecento · Landini</a:t>
             </a:r>
-            <a:endParaRPr lang="en-US" sz="1300" dirty="0"/>
+            <a:endParaRPr lang="en-US" sz="1400" dirty="0"/>
           </a:p>
         </p:txBody>
       </p:sp>
@@ -2372,14 +2372,14 @@
           <a:ln/>
         </p:spPr>
         <p:txBody>
-          <a:bodyPr wrap="square" rtlCol="0" anchor="ctr"/>
+          <a:bodyPr wrap="square" rtlCol="0" anchor="t"/>
           <a:lstStyle/>
           <a:p>
             <a:pPr algn="ctr" indent="0" marL="0">
               <a:buNone/>
             </a:pPr>
             <a:r>
-              <a:rPr lang="en-US" sz="1100" dirty="0">
+              <a:rPr lang="en-US" sz="1400" dirty="0">
                 <a:solidFill>
                   <a:srgbClr val="C8A020"/>
                 </a:solidFill>
@@ -2389,7 +2389,7 @@
               </a:rPr>
               <a:t>Textbook pp. 106–133</a:t>
             </a:r>
-            <a:endParaRPr lang="en-US" sz="1100" dirty="0"/>
+            <a:endParaRPr lang="en-US" sz="1400" dirty="0"/>
           </a:p>
         </p:txBody>
       </p:sp>
@@ -2522,14 +2522,14 @@
           <a:ln/>
         </p:spPr>
         <p:txBody>
-          <a:bodyPr wrap="square" rtlCol="0" anchor="ctr"/>
-          <a:lstStyle/>
-          <a:p>
-            <a:pPr indent="0" marL="0">
-              <a:buNone/>
-            </a:pPr>
-            <a:r>
-              <a:rPr lang="en-US" sz="1200" dirty="0">
+          <a:bodyPr wrap="square" rtlCol="0" anchor="t"/>
+          <a:lstStyle/>
+          <a:p>
+            <a:pPr indent="0" marL="0">
+              <a:buNone/>
+            </a:pPr>
+            <a:r>
+              <a:rPr lang="en-US" sz="1400" dirty="0">
                 <a:solidFill>
                   <a:srgbClr val="5C3A28"/>
                 </a:solidFill>
@@ -2539,7 +2539,7 @@
               </a:rPr>
               <a:t>The Foremost Italian Musician of the Trecento</a:t>
             </a:r>
-            <a:endParaRPr lang="en-US" sz="1200" dirty="0"/>
+            <a:endParaRPr lang="en-US" sz="1400" dirty="0"/>
           </a:p>
         </p:txBody>
       </p:sp>
@@ -2572,7 +2572,7 @@
         <p:spPr>
           <a:xfrm>
             <a:off x="274320" y="1097280"/>
-            <a:ext cx="4206240" cy="3657600"/>
+            <a:ext cx="4206240" cy="3794760"/>
           </a:xfrm>
           <a:prstGeom prst="rect">
             <a:avLst/>
@@ -2608,7 +2608,7 @@
               <a:buNone/>
             </a:pPr>
             <a:r>
-              <a:rPr lang="en-US" sz="1300" b="1" dirty="0">
+              <a:rPr lang="en-US" sz="1400" b="1" dirty="0">
                 <a:solidFill>
                   <a:srgbClr val="C8A020"/>
                 </a:solidFill>
@@ -2616,9 +2616,9 @@
                 <a:ea typeface="Georgia" pitchFamily="34" charset="-122"/>
                 <a:cs typeface="Georgia" pitchFamily="34" charset="-120"/>
               </a:rPr>
-              <a:t>📖 生平</a:t>
-            </a:r>
-            <a:endParaRPr lang="en-US" sz="1300" dirty="0"/>
+              <a:t>■ 生平</a:t>
+            </a:r>
+            <a:endParaRPr lang="en-US" sz="1400" dirty="0"/>
           </a:p>
         </p:txBody>
       </p:sp>
@@ -2651,23 +2651,23 @@
         <p:spPr>
           <a:xfrm>
             <a:off x="457200" y="1627632"/>
-            <a:ext cx="3840480" cy="3108960"/>
-          </a:xfrm>
-          <a:prstGeom prst="rect">
-            <a:avLst/>
-          </a:prstGeom>
-          <a:noFill/>
-          <a:ln/>
-        </p:spPr>
-        <p:txBody>
-          <a:bodyPr wrap="square" rtlCol="0" anchor="ctr"/>
-          <a:lstStyle/>
-          <a:p>
-            <a:pPr indent="0" marL="0">
-              <a:buNone/>
-            </a:pPr>
-            <a:r>
-              <a:rPr lang="en-US" sz="900" dirty="0">
+            <a:ext cx="3840480" cy="3291840"/>
+          </a:xfrm>
+          <a:prstGeom prst="rect">
+            <a:avLst/>
+          </a:prstGeom>
+          <a:noFill/>
+          <a:ln/>
+        </p:spPr>
+        <p:txBody>
+          <a:bodyPr wrap="square" rtlCol="0" anchor="t"/>
+          <a:lstStyle/>
+          <a:p>
+            <a:pPr indent="0" marL="0">
+              <a:buNone/>
+            </a:pPr>
+            <a:r>
+              <a:rPr lang="en-US" sz="1400" dirty="0">
                 <a:solidFill>
                   <a:srgbClr val="FBF5E6"/>
                 </a:solidFill>
@@ -2677,14 +2677,14 @@
               </a:rPr>
               <a:t>• 出生於佛羅倫斯（或鄰近 Fiesole）</a:t>
             </a:r>
-            <a:endParaRPr lang="en-US" sz="900" dirty="0"/>
-          </a:p>
-          <a:p>
-            <a:pPr indent="0" marL="0">
-              <a:buNone/>
-            </a:pPr>
-            <a:r>
-              <a:rPr lang="en-US" sz="900" dirty="0">
+            <a:endParaRPr lang="en-US" sz="1400" dirty="0"/>
+          </a:p>
+          <a:p>
+            <a:pPr indent="0" marL="0">
+              <a:buNone/>
+            </a:pPr>
+            <a:r>
+              <a:rPr lang="en-US" sz="1400" dirty="0">
                 <a:solidFill>
                   <a:srgbClr val="FBF5E6"/>
                 </a:solidFill>
@@ -2694,14 +2694,14 @@
               </a:rPr>
               <a:t>• 畫家之子 · 幼年染天花失明</a:t>
             </a:r>
-            <a:endParaRPr lang="en-US" sz="900" dirty="0"/>
-          </a:p>
-          <a:p>
-            <a:pPr indent="0" marL="0">
-              <a:buNone/>
-            </a:pPr>
-            <a:r>
-              <a:rPr lang="en-US" sz="900" dirty="0">
+            <a:endParaRPr lang="en-US" sz="1400" dirty="0"/>
+          </a:p>
+          <a:p>
+            <a:pPr indent="0" marL="0">
+              <a:buNone/>
+            </a:pPr>
+            <a:r>
+              <a:rPr lang="en-US" sz="1400" dirty="0">
                 <a:solidFill>
                   <a:srgbClr val="FBF5E6"/>
                 </a:solidFill>
@@ -2711,14 +2711,14 @@
               </a:rPr>
               <a:t>• 轉向音樂——成為卓越的演奏家、作曲家、詩人</a:t>
             </a:r>
-            <a:endParaRPr lang="en-US" sz="900" dirty="0"/>
-          </a:p>
-          <a:p>
-            <a:pPr indent="0" marL="0">
-              <a:buNone/>
-            </a:pPr>
-            <a:r>
-              <a:rPr lang="en-US" sz="900" dirty="0">
+            <a:endParaRPr lang="en-US" sz="1400" dirty="0"/>
+          </a:p>
+          <a:p>
+            <a:pPr indent="0" marL="0">
+              <a:buNone/>
+            </a:pPr>
+            <a:r>
+              <a:rPr lang="en-US" sz="1400" dirty="0">
                 <a:solidFill>
                   <a:srgbClr val="FBF5E6"/>
                 </a:solidFill>
@@ -2728,14 +2728,14 @@
               </a:rPr>
               <a:t>• 擅長多種樂器，尤以 organetto</a:t>
             </a:r>
-            <a:endParaRPr lang="en-US" sz="900" dirty="0"/>
-          </a:p>
-          <a:p>
-            <a:pPr indent="0" marL="0">
-              <a:buNone/>
-            </a:pPr>
-            <a:r>
-              <a:rPr lang="en-US" sz="900" dirty="0">
+            <a:endParaRPr lang="en-US" sz="1400" dirty="0"/>
+          </a:p>
+          <a:p>
+            <a:pPr indent="0" marL="0">
+              <a:buNone/>
+            </a:pPr>
+            <a:r>
+              <a:rPr lang="en-US" sz="1400" dirty="0">
                 <a:solidFill>
                   <a:srgbClr val="FBF5E6"/>
                 </a:solidFill>
@@ -2745,14 +2745,14 @@
               </a:rPr>
               <a:t>  （小型可攜式管風琴）聞名</a:t>
             </a:r>
-            <a:endParaRPr lang="en-US" sz="900" dirty="0"/>
-          </a:p>
-          <a:p>
-            <a:pPr indent="0" marL="0">
-              <a:buNone/>
-            </a:pPr>
-            <a:r>
-              <a:rPr lang="en-US" sz="900" dirty="0">
+            <a:endParaRPr lang="en-US" sz="1400" dirty="0"/>
+          </a:p>
+          <a:p>
+            <a:pPr indent="0" marL="0">
+              <a:buNone/>
+            </a:pPr>
+            <a:r>
+              <a:rPr lang="en-US" sz="1400" dirty="0">
                 <a:solidFill>
                   <a:srgbClr val="FBF5E6"/>
                 </a:solidFill>
@@ -2762,14 +2762,14 @@
               </a:rPr>
               <a:t>• 1361–65 任 Santa Trinità 管風琴師</a:t>
             </a:r>
-            <a:endParaRPr lang="en-US" sz="900" dirty="0"/>
-          </a:p>
-          <a:p>
-            <a:pPr indent="0" marL="0">
-              <a:buNone/>
-            </a:pPr>
-            <a:r>
-              <a:rPr lang="en-US" sz="900" dirty="0">
+            <a:endParaRPr lang="en-US" sz="1400" dirty="0"/>
+          </a:p>
+          <a:p>
+            <a:pPr indent="0" marL="0">
+              <a:buNone/>
+            </a:pPr>
+            <a:r>
+              <a:rPr lang="en-US" sz="1400" dirty="0">
                 <a:solidFill>
                   <a:srgbClr val="FBF5E6"/>
                 </a:solidFill>
@@ -2779,20 +2779,20 @@
               </a:rPr>
               <a:t>• 1365–97 任 San Lorenzo 教堂 chaplain</a:t>
             </a:r>
-            <a:endParaRPr lang="en-US" sz="900" dirty="0"/>
-          </a:p>
-          <a:p>
-            <a:pPr indent="0" marL="0">
-              <a:buNone/>
-            </a:pPr>
-            <a:endParaRPr lang="en-US" sz="900" dirty="0"/>
-          </a:p>
-          <a:p>
-            <a:pPr indent="0" marL="0">
-              <a:buNone/>
-            </a:pPr>
-            <a:r>
-              <a:rPr lang="en-US" sz="900" dirty="0">
+            <a:endParaRPr lang="en-US" sz="1400" dirty="0"/>
+          </a:p>
+          <a:p>
+            <a:pPr indent="0" marL="0">
+              <a:buNone/>
+            </a:pPr>
+            <a:endParaRPr lang="en-US" sz="1400" dirty="0"/>
+          </a:p>
+          <a:p>
+            <a:pPr indent="0" marL="0">
+              <a:buNone/>
+            </a:pPr>
+            <a:r>
+              <a:rPr lang="en-US" sz="1400" dirty="0">
                 <a:solidFill>
                   <a:srgbClr val="FBF5E6"/>
                 </a:solidFill>
@@ -2800,16 +2800,16 @@
                 <a:ea typeface="Calibri" pitchFamily="34" charset="-122"/>
                 <a:cs typeface="Calibri" pitchFamily="34" charset="-120"/>
               </a:rPr>
-              <a:t>❖ 軼事（Giovanni da Prato 記載）：</a:t>
-            </a:r>
-            <a:endParaRPr lang="en-US" sz="900" dirty="0"/>
-          </a:p>
-          <a:p>
-            <a:pPr indent="0" marL="0">
-              <a:buNone/>
-            </a:pPr>
-            <a:r>
-              <a:rPr lang="en-US" sz="900" dirty="0">
+              <a:t>■ 軼事（Giovanni da Prato 記載）：</a:t>
+            </a:r>
+            <a:endParaRPr lang="en-US" sz="1400" dirty="0"/>
+          </a:p>
+          <a:p>
+            <a:pPr indent="0" marL="0">
+              <a:buNone/>
+            </a:pPr>
+            <a:r>
+              <a:rPr lang="en-US" sz="1400" dirty="0">
                 <a:solidFill>
                   <a:srgbClr val="FBF5E6"/>
                 </a:solidFill>
@@ -2819,14 +2819,14 @@
               </a:rPr>
               <a:t>  據說當 Landini 彈奏 organetto 時，</a:t>
             </a:r>
-            <a:endParaRPr lang="en-US" sz="900" dirty="0"/>
-          </a:p>
-          <a:p>
-            <a:pPr indent="0" marL="0">
-              <a:buNone/>
-            </a:pPr>
-            <a:r>
-              <a:rPr lang="en-US" sz="900" dirty="0">
+            <a:endParaRPr lang="en-US" sz="1400" dirty="0"/>
+          </a:p>
+          <a:p>
+            <a:pPr indent="0" marL="0">
+              <a:buNone/>
+            </a:pPr>
+            <a:r>
+              <a:rPr lang="en-US" sz="1400" dirty="0">
                 <a:solidFill>
                   <a:srgbClr val="FBF5E6"/>
                 </a:solidFill>
@@ -2836,14 +2836,14 @@
               </a:rPr>
               <a:t>  樹上的鳥群會停止歌唱而傾聽，</a:t>
             </a:r>
-            <a:endParaRPr lang="en-US" sz="900" dirty="0"/>
-          </a:p>
-          <a:p>
-            <a:pPr indent="0" marL="0">
-              <a:buNone/>
-            </a:pPr>
-            <a:r>
-              <a:rPr lang="en-US" sz="900" dirty="0">
+            <a:endParaRPr lang="en-US" sz="1400" dirty="0"/>
+          </a:p>
+          <a:p>
+            <a:pPr indent="0" marL="0">
+              <a:buNone/>
+            </a:pPr>
+            <a:r>
+              <a:rPr lang="en-US" sz="1400" dirty="0">
                 <a:solidFill>
                   <a:srgbClr val="FBF5E6"/>
                 </a:solidFill>
@@ -2853,14 +2853,14 @@
               </a:rPr>
               <a:t>  其中一隻夜鶯棲在他頭上</a:t>
             </a:r>
-            <a:endParaRPr lang="en-US" sz="900" dirty="0"/>
-          </a:p>
-          <a:p>
-            <a:pPr indent="0" marL="0">
-              <a:buNone/>
-            </a:pPr>
-            <a:r>
-              <a:rPr lang="en-US" sz="900" dirty="0">
+            <a:endParaRPr lang="en-US" sz="1400" dirty="0"/>
+          </a:p>
+          <a:p>
+            <a:pPr indent="0" marL="0">
+              <a:buNone/>
+            </a:pPr>
+            <a:r>
+              <a:rPr lang="en-US" sz="1400" dirty="0">
                 <a:solidFill>
                   <a:srgbClr val="FBF5E6"/>
                 </a:solidFill>
@@ -2870,7 +2870,7 @@
               </a:rPr>
               <a:t>  的樹枝繼續鳴叫</a:t>
             </a:r>
-            <a:endParaRPr lang="en-US" sz="900" dirty="0"/>
+            <a:endParaRPr lang="en-US" sz="1400" dirty="0"/>
           </a:p>
         </p:txBody>
       </p:sp>
@@ -2883,7 +2883,7 @@
         <p:spPr>
           <a:xfrm>
             <a:off x="4663440" y="1097280"/>
-            <a:ext cx="4206240" cy="3657600"/>
+            <a:ext cx="4206240" cy="3794760"/>
           </a:xfrm>
           <a:prstGeom prst="rect">
             <a:avLst/>
@@ -2919,7 +2919,7 @@
               <a:buNone/>
             </a:pPr>
             <a:r>
-              <a:rPr lang="en-US" sz="1300" b="1" dirty="0">
+              <a:rPr lang="en-US" sz="1400" b="1" dirty="0">
                 <a:solidFill>
                   <a:srgbClr val="C8A020"/>
                 </a:solidFill>
@@ -2927,9 +2927,9 @@
                 <a:ea typeface="Georgia" pitchFamily="34" charset="-122"/>
                 <a:cs typeface="Georgia" pitchFamily="34" charset="-120"/>
               </a:rPr>
-              <a:t>🎼 音樂特徵 Musical Style</a:t>
-            </a:r>
-            <a:endParaRPr lang="en-US" sz="1300" dirty="0"/>
+              <a:t>■ 音樂特徵 Musical Style</a:t>
+            </a:r>
+            <a:endParaRPr lang="en-US" sz="1400" dirty="0"/>
           </a:p>
         </p:txBody>
       </p:sp>
@@ -2962,23 +2962,23 @@
         <p:spPr>
           <a:xfrm>
             <a:off x="4846320" y="1627632"/>
-            <a:ext cx="3840480" cy="3108960"/>
-          </a:xfrm>
-          <a:prstGeom prst="rect">
-            <a:avLst/>
-          </a:prstGeom>
-          <a:noFill/>
-          <a:ln/>
-        </p:spPr>
-        <p:txBody>
-          <a:bodyPr wrap="square" rtlCol="0" anchor="ctr"/>
-          <a:lstStyle/>
-          <a:p>
-            <a:pPr indent="0" marL="0">
-              <a:buNone/>
-            </a:pPr>
-            <a:r>
-              <a:rPr lang="en-US" sz="900" dirty="0">
+            <a:ext cx="3840480" cy="3291840"/>
+          </a:xfrm>
+          <a:prstGeom prst="rect">
+            <a:avLst/>
+          </a:prstGeom>
+          <a:noFill/>
+          <a:ln/>
+        </p:spPr>
+        <p:txBody>
+          <a:bodyPr wrap="square" rtlCol="0" anchor="t"/>
+          <a:lstStyle/>
+          <a:p>
+            <a:pPr indent="0" marL="0">
+              <a:buNone/>
+            </a:pPr>
+            <a:r>
+              <a:rPr lang="en-US" sz="1400" dirty="0">
                 <a:solidFill>
                   <a:srgbClr val="FBF5E6"/>
                 </a:solidFill>
@@ -2986,16 +2986,16 @@
                 <a:ea typeface="Calibri" pitchFamily="34" charset="-122"/>
                 <a:cs typeface="Calibri" pitchFamily="34" charset="-120"/>
               </a:rPr>
-              <a:t>❖ 作品：140 ballate · 12 madrigals</a:t>
-            </a:r>
-            <a:endParaRPr lang="en-US" sz="900" dirty="0"/>
-          </a:p>
-          <a:p>
-            <a:pPr indent="0" marL="0">
-              <a:buNone/>
-            </a:pPr>
-            <a:r>
-              <a:rPr lang="en-US" sz="900" dirty="0">
+              <a:t>■ 作品：140 ballate · 12 madrigals</a:t>
+            </a:r>
+            <a:endParaRPr lang="en-US" sz="1400" dirty="0"/>
+          </a:p>
+          <a:p>
+            <a:pPr indent="0" marL="0">
+              <a:buNone/>
+            </a:pPr>
+            <a:r>
+              <a:rPr lang="en-US" sz="1400" dirty="0">
                 <a:solidFill>
                   <a:srgbClr val="FBF5E6"/>
                 </a:solidFill>
@@ -3005,20 +3005,20 @@
               </a:rPr>
               <a:t>  · 1 caccia · 1 virelai —— 無宗教音樂</a:t>
             </a:r>
-            <a:endParaRPr lang="en-US" sz="900" dirty="0"/>
-          </a:p>
-          <a:p>
-            <a:pPr indent="0" marL="0">
-              <a:buNone/>
-            </a:pPr>
-            <a:endParaRPr lang="en-US" sz="900" dirty="0"/>
-          </a:p>
-          <a:p>
-            <a:pPr indent="0" marL="0">
-              <a:buNone/>
-            </a:pPr>
-            <a:r>
-              <a:rPr lang="en-US" sz="900" dirty="0">
+            <a:endParaRPr lang="en-US" sz="1400" dirty="0"/>
+          </a:p>
+          <a:p>
+            <a:pPr indent="0" marL="0">
+              <a:buNone/>
+            </a:pPr>
+            <a:endParaRPr lang="en-US" sz="1400" dirty="0"/>
+          </a:p>
+          <a:p>
+            <a:pPr indent="0" marL="0">
+              <a:buNone/>
+            </a:pPr>
+            <a:r>
+              <a:rPr lang="en-US" sz="1400" dirty="0">
                 <a:solidFill>
                   <a:srgbClr val="FBF5E6"/>
                 </a:solidFill>
@@ -3026,16 +3026,16 @@
                 <a:ea typeface="Calibri" pitchFamily="34" charset="-122"/>
                 <a:cs typeface="Calibri" pitchFamily="34" charset="-120"/>
               </a:rPr>
-              <a:t>❖ 旋律優雅如拱——級進為主、弧形線條</a:t>
-            </a:r>
-            <a:endParaRPr lang="en-US" sz="900" dirty="0"/>
-          </a:p>
-          <a:p>
-            <a:pPr indent="0" marL="0">
-              <a:buNone/>
-            </a:pPr>
-            <a:r>
-              <a:rPr lang="en-US" sz="900" dirty="0">
+              <a:t>■ 旋律優雅如拱——級進為主、弧形線條</a:t>
+            </a:r>
+            <a:endParaRPr lang="en-US" sz="1400" dirty="0"/>
+          </a:p>
+          <a:p>
+            <a:pPr indent="0" marL="0">
+              <a:buNone/>
+            </a:pPr>
+            <a:r>
+              <a:rPr lang="en-US" sz="1400" dirty="0">
                 <a:solidFill>
                   <a:srgbClr val="FBF5E6"/>
                 </a:solidFill>
@@ -3043,22 +3043,22 @@
                 <a:ea typeface="Calibri" pitchFamily="34" charset="-122"/>
                 <a:cs typeface="Calibri" pitchFamily="34" charset="-120"/>
               </a:rPr>
-              <a:t>  · 比 Machaut 更平滑流暢</a:t>
-            </a:r>
-            <a:endParaRPr lang="en-US" sz="900" dirty="0"/>
-          </a:p>
-          <a:p>
-            <a:pPr indent="0" marL="0">
-              <a:buNone/>
-            </a:pPr>
-            <a:endParaRPr lang="en-US" sz="900" dirty="0"/>
-          </a:p>
-          <a:p>
-            <a:pPr indent="0" marL="0">
-              <a:buNone/>
-            </a:pPr>
-            <a:r>
-              <a:rPr lang="en-US" sz="900" dirty="0">
+              <a:t>  比 Machaut 更平滑流暢</a:t>
+            </a:r>
+            <a:endParaRPr lang="en-US" sz="1400" dirty="0"/>
+          </a:p>
+          <a:p>
+            <a:pPr indent="0" marL="0">
+              <a:buNone/>
+            </a:pPr>
+            <a:endParaRPr lang="en-US" sz="1400" dirty="0"/>
+          </a:p>
+          <a:p>
+            <a:pPr indent="0" marL="0">
+              <a:buNone/>
+            </a:pPr>
+            <a:r>
+              <a:rPr lang="en-US" sz="1400" dirty="0">
                 <a:solidFill>
                   <a:srgbClr val="FBF5E6"/>
                 </a:solidFill>
@@ -3066,22 +3066,22 @@
                 <a:ea typeface="Calibri" pitchFamily="34" charset="-122"/>
                 <a:cs typeface="Calibri" pitchFamily="34" charset="-120"/>
               </a:rPr>
-              <a:t>❖ 三度與六度的和聲頻繁出現——甜美</a:t>
-            </a:r>
-            <a:endParaRPr lang="en-US" sz="900" dirty="0"/>
-          </a:p>
-          <a:p>
-            <a:pPr indent="0" marL="0">
-              <a:buNone/>
-            </a:pPr>
-            <a:endParaRPr lang="en-US" sz="900" dirty="0"/>
-          </a:p>
-          <a:p>
-            <a:pPr indent="0" marL="0">
-              <a:buNone/>
-            </a:pPr>
-            <a:r>
-              <a:rPr lang="en-US" sz="900" dirty="0">
+              <a:t>■ 三度與六度的和聲頻繁——甜美</a:t>
+            </a:r>
+            <a:endParaRPr lang="en-US" sz="1400" dirty="0"/>
+          </a:p>
+          <a:p>
+            <a:pPr indent="0" marL="0">
+              <a:buNone/>
+            </a:pPr>
+            <a:endParaRPr lang="en-US" sz="1400" dirty="0"/>
+          </a:p>
+          <a:p>
+            <a:pPr indent="0" marL="0">
+              <a:buNone/>
+            </a:pPr>
+            <a:r>
+              <a:rPr lang="en-US" sz="1400" dirty="0">
                 <a:solidFill>
                   <a:srgbClr val="FBF5E6"/>
                 </a:solidFill>
@@ -3089,16 +3089,16 @@
                 <a:ea typeface="Calibri" pitchFamily="34" charset="-122"/>
                 <a:cs typeface="Calibri" pitchFamily="34" charset="-120"/>
               </a:rPr>
-              <a:t>❖ 每行詩的首末音節加花唱，</a:t>
-            </a:r>
-            <a:endParaRPr lang="en-US" sz="900" dirty="0"/>
-          </a:p>
-          <a:p>
-            <a:pPr indent="0" marL="0">
-              <a:buNone/>
-            </a:pPr>
-            <a:r>
-              <a:rPr lang="en-US" sz="900" dirty="0">
+              <a:t>■ 每行詩首末音節加花唱，</a:t>
+            </a:r>
+            <a:endParaRPr lang="en-US" sz="1400" dirty="0"/>
+          </a:p>
+          <a:p>
+            <a:pPr indent="0" marL="0">
+              <a:buNone/>
+            </a:pPr>
+            <a:r>
+              <a:rPr lang="en-US" sz="1400" dirty="0">
                 <a:solidFill>
                   <a:srgbClr val="FBF5E6"/>
                 </a:solidFill>
@@ -3106,22 +3106,22 @@
                 <a:ea typeface="Calibri" pitchFamily="34" charset="-122"/>
                 <a:cs typeface="Calibri" pitchFamily="34" charset="-120"/>
               </a:rPr>
-              <a:t>  中間部分清楚的音節式宣讀</a:t>
-            </a:r>
-            <a:endParaRPr lang="en-US" sz="900" dirty="0"/>
-          </a:p>
-          <a:p>
-            <a:pPr indent="0" marL="0">
-              <a:buNone/>
-            </a:pPr>
-            <a:endParaRPr lang="en-US" sz="900" dirty="0"/>
-          </a:p>
-          <a:p>
-            <a:pPr indent="0" marL="0">
-              <a:buNone/>
-            </a:pPr>
-            <a:r>
-              <a:rPr lang="en-US" sz="900" dirty="0">
+              <a:t>  中間為音節式宣讀</a:t>
+            </a:r>
+            <a:endParaRPr lang="en-US" sz="1400" dirty="0"/>
+          </a:p>
+          <a:p>
+            <a:pPr indent="0" marL="0">
+              <a:buNone/>
+            </a:pPr>
+            <a:endParaRPr lang="en-US" sz="1400" dirty="0"/>
+          </a:p>
+          <a:p>
+            <a:pPr indent="0" marL="0">
+              <a:buNone/>
+            </a:pPr>
+            <a:r>
+              <a:rPr lang="en-US" sz="1400" dirty="0">
                 <a:solidFill>
                   <a:srgbClr val="FBF5E6"/>
                 </a:solidFill>
@@ -3129,16 +3129,16 @@
                 <a:ea typeface="Calibri" pitchFamily="34" charset="-122"/>
                 <a:cs typeface="Calibri" pitchFamily="34" charset="-120"/>
               </a:rPr>
-              <a:t>❖ Landini 終止式（Landini cadence）：</a:t>
-            </a:r>
-            <a:endParaRPr lang="en-US" sz="900" dirty="0"/>
-          </a:p>
-          <a:p>
-            <a:pPr indent="0" marL="0">
-              <a:buNone/>
-            </a:pPr>
-            <a:r>
-              <a:rPr lang="en-US" sz="900" dirty="0">
+              <a:t>■ Landini 終止式（Landini cadence）：</a:t>
+            </a:r>
+            <a:endParaRPr lang="en-US" sz="1400" dirty="0"/>
+          </a:p>
+          <a:p>
+            <a:pPr indent="0" marL="0">
+              <a:buNone/>
+            </a:pPr>
+            <a:r>
+              <a:rPr lang="en-US" sz="1400" dirty="0">
                 <a:solidFill>
                   <a:srgbClr val="FBF5E6"/>
                 </a:solidFill>
@@ -3146,16 +3146,16 @@
                 <a:ea typeface="Calibri" pitchFamily="34" charset="-122"/>
                 <a:cs typeface="Calibri" pitchFamily="34" charset="-120"/>
               </a:rPr>
-              <a:t>  終止前上聲部先下行到下鄰音，</a:t>
-            </a:r>
-            <a:endParaRPr lang="en-US" sz="900" dirty="0"/>
-          </a:p>
-          <a:p>
-            <a:pPr indent="0" marL="0">
-              <a:buNone/>
-            </a:pPr>
-            <a:r>
-              <a:rPr lang="en-US" sz="900" dirty="0">
+              <a:t>  上聲部先下行到下鄰音，</a:t>
+            </a:r>
+            <a:endParaRPr lang="en-US" sz="1400" dirty="0"/>
+          </a:p>
+          <a:p>
+            <a:pPr indent="0" marL="0">
+              <a:buNone/>
+            </a:pPr>
+            <a:r>
+              <a:rPr lang="en-US" sz="1400" dirty="0">
                 <a:solidFill>
                   <a:srgbClr val="FBF5E6"/>
                 </a:solidFill>
@@ -3163,16 +3163,16 @@
                 <a:ea typeface="Calibri" pitchFamily="34" charset="-122"/>
                 <a:cs typeface="Calibri" pitchFamily="34" charset="-120"/>
               </a:rPr>
-              <a:t>  再上跳三度到主音——</a:t>
-            </a:r>
-            <a:endParaRPr lang="en-US" sz="900" dirty="0"/>
-          </a:p>
-          <a:p>
-            <a:pPr indent="0" marL="0">
-              <a:buNone/>
-            </a:pPr>
-            <a:r>
-              <a:rPr lang="en-US" sz="900" dirty="0">
+              <a:t>  再上跳三度到主音</a:t>
+            </a:r>
+            <a:endParaRPr lang="en-US" sz="1400" dirty="0"/>
+          </a:p>
+          <a:p>
+            <a:pPr indent="0" marL="0">
+              <a:buNone/>
+            </a:pPr>
+            <a:r>
+              <a:rPr lang="en-US" sz="1400" dirty="0">
                 <a:solidFill>
                   <a:srgbClr val="FBF5E6"/>
                 </a:solidFill>
@@ -3180,16 +3180,22 @@
                 <a:ea typeface="Calibri" pitchFamily="34" charset="-122"/>
                 <a:cs typeface="Calibri" pitchFamily="34" charset="-120"/>
               </a:rPr>
-              <a:t>  從他開始成為風格標誌</a:t>
-            </a:r>
-            <a:endParaRPr lang="en-US" sz="900" dirty="0"/>
-          </a:p>
-          <a:p>
-            <a:pPr indent="0" marL="0">
-              <a:buNone/>
-            </a:pPr>
-            <a:r>
-              <a:rPr lang="en-US" sz="900" dirty="0">
+              <a:t>  14–15 世紀法義音樂普及</a:t>
+            </a:r>
+            <a:endParaRPr lang="en-US" sz="1400" dirty="0"/>
+          </a:p>
+          <a:p>
+            <a:pPr indent="0" marL="0">
+              <a:buNone/>
+            </a:pPr>
+            <a:endParaRPr lang="en-US" sz="1400" dirty="0"/>
+          </a:p>
+          <a:p>
+            <a:pPr indent="0" marL="0">
+              <a:buNone/>
+            </a:pPr>
+            <a:r>
+              <a:rPr lang="en-US" sz="1400" dirty="0">
                 <a:solidFill>
                   <a:srgbClr val="FBF5E6"/>
                 </a:solidFill>
@@ -3197,22 +3203,16 @@
                 <a:ea typeface="Calibri" pitchFamily="34" charset="-122"/>
                 <a:cs typeface="Calibri" pitchFamily="34" charset="-120"/>
               </a:rPr>
-              <a:t>  在 14 世紀末到 15 世紀初法義音樂中普及</a:t>
-            </a:r>
-            <a:endParaRPr lang="en-US" sz="900" dirty="0"/>
-          </a:p>
-          <a:p>
-            <a:pPr indent="0" marL="0">
-              <a:buNone/>
-            </a:pPr>
-            <a:endParaRPr lang="en-US" sz="900" dirty="0"/>
-          </a:p>
-          <a:p>
-            <a:pPr indent="0" marL="0">
-              <a:buNone/>
-            </a:pPr>
-            <a:r>
-              <a:rPr lang="en-US" sz="900" dirty="0">
+              <a:t>■ 埋葬於 San Lorenzo</a:t>
+            </a:r>
+            <a:endParaRPr lang="en-US" sz="1400" dirty="0"/>
+          </a:p>
+          <a:p>
+            <a:pPr indent="0" marL="0">
+              <a:buNone/>
+            </a:pPr>
+            <a:r>
+              <a:rPr lang="en-US" sz="1400" dirty="0">
                 <a:solidFill>
                   <a:srgbClr val="FBF5E6"/>
                 </a:solidFill>
@@ -3220,26 +3220,9 @@
                 <a:ea typeface="Calibri" pitchFamily="34" charset="-122"/>
                 <a:cs typeface="Calibri" pitchFamily="34" charset="-120"/>
               </a:rPr>
-              <a:t>❖ 埋葬於 San Lorenzo</a:t>
-            </a:r>
-            <a:endParaRPr lang="en-US" sz="900" dirty="0"/>
-          </a:p>
-          <a:p>
-            <a:pPr indent="0" marL="0">
-              <a:buNone/>
-            </a:pPr>
-            <a:r>
-              <a:rPr lang="en-US" sz="900" dirty="0">
-                <a:solidFill>
-                  <a:srgbClr val="FBF5E6"/>
-                </a:solidFill>
-                <a:latin typeface="Calibri" pitchFamily="34" charset="0"/>
-                <a:ea typeface="Calibri" pitchFamily="34" charset="-122"/>
-                <a:cs typeface="Calibri" pitchFamily="34" charset="-120"/>
-              </a:rPr>
-              <a:t>  墓碑上刻著他彈奏 organetto 的形象</a:t>
-            </a:r>
-            <a:endParaRPr lang="en-US" sz="900" dirty="0"/>
+              <a:t>  墓碑刻其彈奏 organetto 形象</a:t>
+            </a:r>
+            <a:endParaRPr lang="en-US" sz="1400" dirty="0"/>
           </a:p>
         </p:txBody>
       </p:sp>
@@ -3379,7 +3362,7 @@
               <a:buNone/>
             </a:pPr>
             <a:r>
-              <a:rPr lang="en-US" sz="1300" dirty="0">
+              <a:rPr lang="en-US" sz="1400" dirty="0">
                 <a:solidFill>
                   <a:srgbClr val="E8D8A8"/>
                 </a:solidFill>
@@ -3389,7 +3372,7 @@
               </a:rPr>
               <a:t>Voices, Instruments, and Musica Ficta</a:t>
             </a:r>
-            <a:endParaRPr lang="en-US" sz="1300" dirty="0"/>
+            <a:endParaRPr lang="en-US" sz="1400" dirty="0"/>
           </a:p>
         </p:txBody>
       </p:sp>
@@ -3458,7 +3441,7 @@
               <a:buNone/>
             </a:pPr>
             <a:r>
-              <a:rPr lang="en-US" sz="1300" b="1" dirty="0">
+              <a:rPr lang="en-US" sz="1400" b="1" dirty="0">
                 <a:solidFill>
                   <a:srgbClr val="C8A020"/>
                 </a:solidFill>
@@ -3466,9 +3449,9 @@
                 <a:ea typeface="Georgia" pitchFamily="34" charset="-122"/>
                 <a:cs typeface="Georgia" pitchFamily="34" charset="-120"/>
               </a:rPr>
-              <a:t>🎺 Haut 與 Bas 樂器 · Voices or Instruments?</a:t>
-            </a:r>
-            <a:endParaRPr lang="en-US" sz="1300" dirty="0"/>
+              <a:t>■ Haut 與 Bas 樂器 · Voices or Instruments?</a:t>
+            </a:r>
+            <a:endParaRPr lang="en-US" sz="1400" dirty="0"/>
           </a:p>
         </p:txBody>
       </p:sp>
@@ -3490,14 +3473,14 @@
           <a:ln/>
         </p:spPr>
         <p:txBody>
-          <a:bodyPr wrap="square" rtlCol="0" anchor="ctr"/>
-          <a:lstStyle/>
-          <a:p>
-            <a:pPr indent="0" marL="0">
-              <a:buNone/>
-            </a:pPr>
-            <a:r>
-              <a:rPr lang="en-US" sz="950" dirty="0">
+          <a:bodyPr wrap="square" rtlCol="0" anchor="t"/>
+          <a:lstStyle/>
+          <a:p>
+            <a:pPr indent="0" marL="0">
+              <a:buNone/>
+            </a:pPr>
+            <a:r>
+              <a:rPr lang="en-US" sz="1400" dirty="0">
                 <a:solidFill>
                   <a:srgbClr val="E8D8A8"/>
                 </a:solidFill>
@@ -3507,14 +3490,14 @@
               </a:rPr>
               <a:t>• 14–16 世紀以音量區分樂器：haut「高」(響亮) · bas「低」(柔和)</a:t>
             </a:r>
-            <a:endParaRPr lang="en-US" sz="950" dirty="0"/>
-          </a:p>
-          <a:p>
-            <a:pPr indent="0" marL="0">
-              <a:buNone/>
-            </a:pPr>
-            <a:r>
-              <a:rPr lang="en-US" sz="950" dirty="0">
+            <a:endParaRPr lang="en-US" sz="1400" dirty="0"/>
+          </a:p>
+          <a:p>
+            <a:pPr indent="0" marL="0">
+              <a:buNone/>
+            </a:pPr>
+            <a:r>
+              <a:rPr lang="en-US" sz="1400" dirty="0">
                 <a:solidFill>
                   <a:srgbClr val="E8D8A8"/>
                 </a:solidFill>
@@ -3524,14 +3507,14 @@
               </a:rPr>
               <a:t>  Haut: shawms, trumpets, cornetts · Bas: harps, vielles, lutes, psalteries, recorders</a:t>
             </a:r>
-            <a:endParaRPr lang="en-US" sz="950" dirty="0"/>
-          </a:p>
-          <a:p>
-            <a:pPr indent="0" marL="0">
-              <a:buNone/>
-            </a:pPr>
-            <a:r>
-              <a:rPr lang="en-US" sz="950" dirty="0">
+            <a:endParaRPr lang="en-US" sz="1400" dirty="0"/>
+          </a:p>
+          <a:p>
+            <a:pPr indent="0" marL="0">
+              <a:buNone/>
+            </a:pPr>
+            <a:r>
+              <a:rPr lang="en-US" sz="1400" dirty="0">
                 <a:solidFill>
                   <a:srgbClr val="E8D8A8"/>
                 </a:solidFill>
@@ -3541,14 +3524,14 @@
               </a:rPr>
               <a:t>• 長期爭論：聲部由人聲唱還是樂器奏？</a:t>
             </a:r>
-            <a:endParaRPr lang="en-US" sz="950" dirty="0"/>
-          </a:p>
-          <a:p>
-            <a:pPr indent="0" marL="0">
-              <a:buNone/>
-            </a:pPr>
-            <a:r>
-              <a:rPr lang="en-US" sz="950" dirty="0">
+            <a:endParaRPr lang="en-US" sz="1400" dirty="0"/>
+          </a:p>
+          <a:p>
+            <a:pPr indent="0" marL="0">
+              <a:buNone/>
+            </a:pPr>
+            <a:r>
+              <a:rPr lang="en-US" sz="1400" dirty="0">
                 <a:solidFill>
                   <a:srgbClr val="E8D8A8"/>
                 </a:solidFill>
@@ -3558,14 +3541,14 @@
               </a:rPr>
               <a:t>  Christopher Page · David Fallows 等 1970–80 年代學者論證：14 世紀複音通常</a:t>
             </a:r>
-            <a:endParaRPr lang="en-US" sz="950" dirty="0"/>
-          </a:p>
-          <a:p>
-            <a:pPr indent="0" marL="0">
-              <a:buNone/>
-            </a:pPr>
-            <a:r>
-              <a:rPr lang="en-US" sz="950" dirty="0">
+            <a:endParaRPr lang="en-US" sz="1400" dirty="0"/>
+          </a:p>
+          <a:p>
+            <a:pPr indent="0" marL="0">
+              <a:buNone/>
+            </a:pPr>
+            <a:r>
+              <a:rPr lang="en-US" sz="1400" dirty="0">
                 <a:solidFill>
                   <a:srgbClr val="E8D8A8"/>
                 </a:solidFill>
@@ -3575,14 +3558,14 @@
               </a:rPr>
               <a:t>  為每聲部一位歌者，無器樂——</a:t>
             </a:r>
-            <a:endParaRPr lang="en-US" sz="950" dirty="0"/>
-          </a:p>
-          <a:p>
-            <a:pPr indent="0" marL="0">
-              <a:buNone/>
-            </a:pPr>
-            <a:r>
-              <a:rPr lang="en-US" sz="950" dirty="0">
+            <a:endParaRPr lang="en-US" sz="1400" dirty="0"/>
+          </a:p>
+          <a:p>
+            <a:pPr indent="0" marL="0">
+              <a:buNone/>
+            </a:pPr>
+            <a:r>
+              <a:rPr lang="en-US" sz="1400" dirty="0">
                 <a:solidFill>
                   <a:srgbClr val="E8D8A8"/>
                 </a:solidFill>
@@ -3592,7 +3575,7 @@
               </a:rPr>
               <a:t>• 但宮廷世俗場合可能有器樂參與 · Gothic Voices 等團體的錄音證實此觀點</a:t>
             </a:r>
-            <a:endParaRPr lang="en-US" sz="950" dirty="0"/>
+            <a:endParaRPr lang="en-US" sz="1400" dirty="0"/>
           </a:p>
         </p:txBody>
       </p:sp>
@@ -3641,7 +3624,7 @@
               <a:buNone/>
             </a:pPr>
             <a:r>
-              <a:rPr lang="en-US" sz="1300" b="1" dirty="0">
+              <a:rPr lang="en-US" sz="1400" b="1" dirty="0">
                 <a:solidFill>
                   <a:srgbClr val="C8A020"/>
                 </a:solidFill>
@@ -3649,9 +3632,9 @@
                 <a:ea typeface="Georgia" pitchFamily="34" charset="-122"/>
                 <a:cs typeface="Georgia" pitchFamily="34" charset="-120"/>
               </a:rPr>
-              <a:t>🎵 Musica Ficta（「虛構的音樂」）</a:t>
-            </a:r>
-            <a:endParaRPr lang="en-US" sz="1300" dirty="0"/>
+              <a:t>■ Musica Ficta（「虛構的音樂」）</a:t>
+            </a:r>
+            <a:endParaRPr lang="en-US" sz="1400" dirty="0"/>
           </a:p>
         </p:txBody>
       </p:sp>
@@ -3673,14 +3656,14 @@
           <a:ln/>
         </p:spPr>
         <p:txBody>
-          <a:bodyPr wrap="square" rtlCol="0" anchor="ctr"/>
-          <a:lstStyle/>
-          <a:p>
-            <a:pPr indent="0" marL="0">
-              <a:buNone/>
-            </a:pPr>
-            <a:r>
-              <a:rPr lang="en-US" sz="950" dirty="0">
+          <a:bodyPr wrap="square" rtlCol="0" anchor="t"/>
+          <a:lstStyle/>
+          <a:p>
+            <a:pPr indent="0" marL="0">
+              <a:buNone/>
+            </a:pPr>
+            <a:r>
+              <a:rPr lang="en-US" sz="1400" dirty="0">
                 <a:solidFill>
                   <a:srgbClr val="E8D8A8"/>
                 </a:solidFill>
@@ -3690,14 +3673,14 @@
               </a:rPr>
               <a:t>• 演出時對某些音作半音調整——避免 F–B 三全音、平滑旋律、終止甜美化</a:t>
             </a:r>
-            <a:endParaRPr lang="en-US" sz="950" dirty="0"/>
-          </a:p>
-          <a:p>
-            <a:pPr indent="0" marL="0">
-              <a:buNone/>
-            </a:pPr>
-            <a:r>
-              <a:rPr lang="en-US" sz="950" dirty="0">
+            <a:endParaRPr lang="en-US" sz="1400" dirty="0"/>
+          </a:p>
+          <a:p>
+            <a:pPr indent="0" marL="0">
+              <a:buNone/>
+            </a:pPr>
+            <a:r>
+              <a:rPr lang="en-US" sz="1400" dirty="0">
                 <a:solidFill>
                   <a:srgbClr val="E8D8A8"/>
                 </a:solidFill>
@@ -3707,14 +3690,14 @@
               </a:rPr>
               <a:t>• 稱為 ficta（feigned）因為這些音落在 Guido 手的 musica recta 範圍外</a:t>
             </a:r>
-            <a:endParaRPr lang="en-US" sz="950" dirty="0"/>
-          </a:p>
-          <a:p>
-            <a:pPr indent="0" marL="0">
-              <a:buNone/>
-            </a:pPr>
-            <a:r>
-              <a:rPr lang="en-US" sz="950" dirty="0">
+            <a:endParaRPr lang="en-US" sz="1400" dirty="0"/>
+          </a:p>
+          <a:p>
+            <a:pPr indent="0" marL="0">
+              <a:buNone/>
+            </a:pPr>
+            <a:r>
+              <a:rPr lang="en-US" sz="1400" dirty="0">
                 <a:solidFill>
                   <a:srgbClr val="E8D8A8"/>
                 </a:solidFill>
@@ -3724,14 +3707,14 @@
               </a:rPr>
               <a:t>• 演唱者受訓練於演出時即時判斷何時應升/降半音——作曲家只在必要處寫出</a:t>
             </a:r>
-            <a:endParaRPr lang="en-US" sz="950" dirty="0"/>
-          </a:p>
-          <a:p>
-            <a:pPr indent="0" marL="0">
-              <a:buNone/>
-            </a:pPr>
-            <a:r>
-              <a:rPr lang="en-US" sz="950" dirty="0">
+            <a:endParaRPr lang="en-US" sz="1400" dirty="0"/>
+          </a:p>
+          <a:p>
+            <a:pPr indent="0" marL="0">
+              <a:buNone/>
+            </a:pPr>
+            <a:r>
+              <a:rPr lang="en-US" sz="1400" dirty="0">
                 <a:solidFill>
                   <a:srgbClr val="E8D8A8"/>
                 </a:solidFill>
@@ -3741,14 +3724,14 @@
               </a:rPr>
               <a:t>• Double leading-tone cadence（雙導音終止）——上下兩聲部皆半音上行至完全協和</a:t>
             </a:r>
-            <a:endParaRPr lang="en-US" sz="950" dirty="0"/>
-          </a:p>
-          <a:p>
-            <a:pPr indent="0" marL="0">
-              <a:buNone/>
-            </a:pPr>
-            <a:r>
-              <a:rPr lang="en-US" sz="950" dirty="0">
+            <a:endParaRPr lang="en-US" sz="1400" dirty="0"/>
+          </a:p>
+          <a:p>
+            <a:pPr indent="0" marL="0">
+              <a:buNone/>
+            </a:pPr>
+            <a:r>
+              <a:rPr lang="en-US" sz="1400" dirty="0">
                 <a:solidFill>
                   <a:srgbClr val="E8D8A8"/>
                 </a:solidFill>
@@ -3758,14 +3741,14 @@
               </a:rPr>
               <a:t>  成為 14–15 世紀音樂的招牌聲響</a:t>
             </a:r>
-            <a:endParaRPr lang="en-US" sz="950" dirty="0"/>
-          </a:p>
-          <a:p>
-            <a:pPr indent="0" marL="0">
-              <a:buNone/>
-            </a:pPr>
-            <a:r>
-              <a:rPr lang="en-US" sz="950" dirty="0">
+            <a:endParaRPr lang="en-US" sz="1400" dirty="0"/>
+          </a:p>
+          <a:p>
+            <a:pPr indent="0" marL="0">
+              <a:buNone/>
+            </a:pPr>
+            <a:r>
+              <a:rPr lang="en-US" sz="1400" dirty="0">
                 <a:solidFill>
                   <a:srgbClr val="E8D8A8"/>
                 </a:solidFill>
@@ -3775,14 +3758,14 @@
               </a:rPr>
               <a:t>• Prosdocimo de' Beldomandi（卒 1428）的 Contrapunctus (1412) 詳細討論此原則</a:t>
             </a:r>
-            <a:endParaRPr lang="en-US" sz="950" dirty="0"/>
-          </a:p>
-          <a:p>
-            <a:pPr indent="0" marL="0">
-              <a:buNone/>
-            </a:pPr>
-            <a:r>
-              <a:rPr lang="en-US" sz="950" dirty="0">
+            <a:endParaRPr lang="en-US" sz="1400" dirty="0"/>
+          </a:p>
+          <a:p>
+            <a:pPr indent="0" marL="0">
+              <a:buNone/>
+            </a:pPr>
+            <a:r>
+              <a:rPr lang="en-US" sz="1400" dirty="0">
                 <a:solidFill>
                   <a:srgbClr val="E8D8A8"/>
                 </a:solidFill>
@@ -3792,7 +3775,7 @@
               </a:rPr>
               <a:t>  「較完美協和音程越近，聲響越甜美」</a:t>
             </a:r>
-            <a:endParaRPr lang="en-US" sz="950" dirty="0"/>
+            <a:endParaRPr lang="en-US" sz="1400" dirty="0"/>
           </a:p>
         </p:txBody>
       </p:sp>
@@ -3977,7 +3960,7 @@
                   <a:srgbClr val="000000"/>
                 </a:solidFill>
               </a:rPr>
-              <a:t>🎵</a:t>
+              <a:t>■</a:t>
             </a:r>
             <a:endParaRPr lang="en-US" sz="1600" dirty="0"/>
           </a:p>
@@ -4008,7 +3991,7 @@
               <a:buNone/>
             </a:pPr>
             <a:r>
-              <a:rPr lang="en-US" sz="1000" b="1" dirty="0">
+              <a:rPr lang="en-US" sz="1400" b="1" dirty="0">
                 <a:solidFill>
                   <a:srgbClr val="C8A020"/>
                 </a:solidFill>
@@ -4018,7 +4001,7 @@
               </a:rPr>
               <a:t>Philippe de Vitry</a:t>
             </a:r>
-            <a:endParaRPr lang="en-US" sz="1000" dirty="0"/>
+            <a:endParaRPr lang="en-US" sz="1400" dirty="0"/>
           </a:p>
         </p:txBody>
       </p:sp>
@@ -4040,14 +4023,14 @@
           <a:ln/>
         </p:spPr>
         <p:txBody>
-          <a:bodyPr wrap="square" lIns="0" tIns="0" rIns="0" bIns="0" rtlCol="0" anchor="ctr"/>
-          <a:lstStyle/>
-          <a:p>
-            <a:pPr indent="0" marL="0">
-              <a:buNone/>
-            </a:pPr>
-            <a:r>
-              <a:rPr lang="en-US" sz="800" dirty="0">
+          <a:bodyPr wrap="square" lIns="0" tIns="0" rIns="0" bIns="0" rtlCol="0" anchor="t"/>
+          <a:lstStyle/>
+          <a:p>
+            <a:pPr indent="0" marL="0">
+              <a:buNone/>
+            </a:pPr>
+            <a:r>
+              <a:rPr lang="en-US" sz="1400" dirty="0">
                 <a:solidFill>
                   <a:srgbClr val="E8D8A8"/>
                 </a:solidFill>
@@ -4057,7 +4040,7 @@
               </a:rPr>
               <a:t>1291–1361</a:t>
             </a:r>
-            <a:endParaRPr lang="en-US" sz="800" dirty="0"/>
+            <a:endParaRPr lang="en-US" sz="1400" dirty="0"/>
           </a:p>
         </p:txBody>
       </p:sp>
@@ -4099,14 +4082,14 @@
           <a:ln/>
         </p:spPr>
         <p:txBody>
-          <a:bodyPr wrap="square" lIns="0" tIns="0" rIns="0" bIns="0" rtlCol="0" anchor="ctr"/>
-          <a:lstStyle/>
-          <a:p>
-            <a:pPr indent="0" marL="0">
-              <a:buNone/>
-            </a:pPr>
-            <a:r>
-              <a:rPr lang="en-US" sz="850" dirty="0">
+          <a:bodyPr wrap="square" lIns="0" tIns="0" rIns="0" bIns="0" rtlCol="0" anchor="t"/>
+          <a:lstStyle/>
+          <a:p>
+            <a:pPr indent="0" marL="0">
+              <a:buNone/>
+            </a:pPr>
+            <a:r>
+              <a:rPr lang="en-US" sz="1400" dirty="0">
                 <a:solidFill>
                   <a:srgbClr val="FBF5E6"/>
                 </a:solidFill>
@@ -4116,7 +4099,7 @@
               </a:rPr>
               <a:t>Ars Nova 的奠基者——教會參事、詩人、Meaux 主教 · Cum statua / Hugo 為最早的 isorhythmic motet 之一</a:t>
             </a:r>
-            <a:endParaRPr lang="en-US" sz="850" dirty="0"/>
+            <a:endParaRPr lang="en-US" sz="1400" dirty="0"/>
           </a:p>
         </p:txBody>
       </p:sp>
@@ -4170,7 +4153,7 @@
                   <a:srgbClr val="000000"/>
                 </a:solidFill>
               </a:rPr>
-              <a:t>👑</a:t>
+              <a:t>■</a:t>
             </a:r>
             <a:endParaRPr lang="en-US" sz="1600" dirty="0"/>
           </a:p>
@@ -4201,7 +4184,7 @@
               <a:buNone/>
             </a:pPr>
             <a:r>
-              <a:rPr lang="en-US" sz="1000" b="1" dirty="0">
+              <a:rPr lang="en-US" sz="1400" b="1" dirty="0">
                 <a:solidFill>
                   <a:srgbClr val="C8A020"/>
                 </a:solidFill>
@@ -4211,7 +4194,7 @@
               </a:rPr>
               <a:t>Guillaume de Machaut</a:t>
             </a:r>
-            <a:endParaRPr lang="en-US" sz="1000" dirty="0"/>
+            <a:endParaRPr lang="en-US" sz="1400" dirty="0"/>
           </a:p>
         </p:txBody>
       </p:sp>
@@ -4233,14 +4216,14 @@
           <a:ln/>
         </p:spPr>
         <p:txBody>
-          <a:bodyPr wrap="square" lIns="0" tIns="0" rIns="0" bIns="0" rtlCol="0" anchor="ctr"/>
-          <a:lstStyle/>
-          <a:p>
-            <a:pPr indent="0" marL="0">
-              <a:buNone/>
-            </a:pPr>
-            <a:r>
-              <a:rPr lang="en-US" sz="800" dirty="0">
+          <a:bodyPr wrap="square" lIns="0" tIns="0" rIns="0" bIns="0" rtlCol="0" anchor="t"/>
+          <a:lstStyle/>
+          <a:p>
+            <a:pPr indent="0" marL="0">
+              <a:buNone/>
+            </a:pPr>
+            <a:r>
+              <a:rPr lang="en-US" sz="1400" dirty="0">
                 <a:solidFill>
                   <a:srgbClr val="E8D8A8"/>
                 </a:solidFill>
@@ -4250,7 +4233,7 @@
               </a:rPr>
               <a:t>ca. 1300–1377</a:t>
             </a:r>
-            <a:endParaRPr lang="en-US" sz="800" dirty="0"/>
+            <a:endParaRPr lang="en-US" sz="1400" dirty="0"/>
           </a:p>
         </p:txBody>
       </p:sp>
@@ -4292,14 +4275,14 @@
           <a:ln/>
         </p:spPr>
         <p:txBody>
-          <a:bodyPr wrap="square" lIns="0" tIns="0" rIns="0" bIns="0" rtlCol="0" anchor="ctr"/>
-          <a:lstStyle/>
-          <a:p>
-            <a:pPr indent="0" marL="0">
-              <a:buNone/>
-            </a:pPr>
-            <a:r>
-              <a:rPr lang="en-US" sz="850" dirty="0">
+          <a:bodyPr wrap="square" lIns="0" tIns="0" rIns="0" bIns="0" rtlCol="0" anchor="t"/>
+          <a:lstStyle/>
+          <a:p>
+            <a:pPr indent="0" marL="0">
+              <a:buNone/>
+            </a:pPr>
+            <a:r>
+              <a:rPr lang="en-US" sz="1400" dirty="0">
                 <a:solidFill>
                   <a:srgbClr val="FBF5E6"/>
                 </a:solidFill>
@@ -4309,7 +4292,7 @@
               </a:rPr>
               <a:t>14 世紀最重要作曲家兼詩人 · Messe de Nostre Dame · 首位主動編纂全集的作曲家 · 展現作者意識</a:t>
             </a:r>
-            <a:endParaRPr lang="en-US" sz="850" dirty="0"/>
+            <a:endParaRPr lang="en-US" sz="1400" dirty="0"/>
           </a:p>
         </p:txBody>
       </p:sp>
@@ -4363,7 +4346,7 @@
                   <a:srgbClr val="000000"/>
                 </a:solidFill>
               </a:rPr>
-              <a:t>📚</a:t>
+              <a:t>■</a:t>
             </a:r>
             <a:endParaRPr lang="en-US" sz="1600" dirty="0"/>
           </a:p>
@@ -4394,7 +4377,7 @@
               <a:buNone/>
             </a:pPr>
             <a:r>
-              <a:rPr lang="en-US" sz="1000" b="1" dirty="0">
+              <a:rPr lang="en-US" sz="1400" b="1" dirty="0">
                 <a:solidFill>
                   <a:srgbClr val="C8A020"/>
                 </a:solidFill>
@@ -4404,7 +4387,7 @@
               </a:rPr>
               <a:t>Jehan des Murs</a:t>
             </a:r>
-            <a:endParaRPr lang="en-US" sz="1000" dirty="0"/>
+            <a:endParaRPr lang="en-US" sz="1400" dirty="0"/>
           </a:p>
         </p:txBody>
       </p:sp>
@@ -4426,14 +4409,14 @@
           <a:ln/>
         </p:spPr>
         <p:txBody>
-          <a:bodyPr wrap="square" lIns="0" tIns="0" rIns="0" bIns="0" rtlCol="0" anchor="ctr"/>
-          <a:lstStyle/>
-          <a:p>
-            <a:pPr indent="0" marL="0">
-              <a:buNone/>
-            </a:pPr>
-            <a:r>
-              <a:rPr lang="en-US" sz="800" dirty="0">
+          <a:bodyPr wrap="square" lIns="0" tIns="0" rIns="0" bIns="0" rtlCol="0" anchor="t"/>
+          <a:lstStyle/>
+          <a:p>
+            <a:pPr indent="0" marL="0">
+              <a:buNone/>
+            </a:pPr>
+            <a:r>
+              <a:rPr lang="en-US" sz="1400" dirty="0">
                 <a:solidFill>
                   <a:srgbClr val="E8D8A8"/>
                 </a:solidFill>
@@ -4443,7 +4426,7 @@
               </a:rPr>
               <a:t>ca. 1290–ca. 1355</a:t>
             </a:r>
-            <a:endParaRPr lang="en-US" sz="800" dirty="0"/>
+            <a:endParaRPr lang="en-US" sz="1400" dirty="0"/>
           </a:p>
         </p:txBody>
       </p:sp>
@@ -4485,14 +4468,14 @@
           <a:ln/>
         </p:spPr>
         <p:txBody>
-          <a:bodyPr wrap="square" lIns="0" tIns="0" rIns="0" bIns="0" rtlCol="0" anchor="ctr"/>
-          <a:lstStyle/>
-          <a:p>
-            <a:pPr indent="0" marL="0">
-              <a:buNone/>
-            </a:pPr>
-            <a:r>
-              <a:rPr lang="en-US" sz="850" dirty="0">
+          <a:bodyPr wrap="square" lIns="0" tIns="0" rIns="0" bIns="0" rtlCol="0" anchor="t"/>
+          <a:lstStyle/>
+          <a:p>
+            <a:pPr indent="0" marL="0">
+              <a:buNone/>
+            </a:pPr>
+            <a:r>
+              <a:rPr lang="en-US" sz="1400" dirty="0">
                 <a:solidFill>
                   <a:srgbClr val="FBF5E6"/>
                 </a:solidFill>
@@ -4502,7 +4485,7 @@
               </a:rPr>
               <a:t>數學家、天文學家兼樂論家 · Ars nova 相關論文 · 1340 描述 mensuration signs</a:t>
             </a:r>
-            <a:endParaRPr lang="en-US" sz="850" dirty="0"/>
+            <a:endParaRPr lang="en-US" sz="1400" dirty="0"/>
           </a:p>
         </p:txBody>
       </p:sp>
@@ -4556,7 +4539,7 @@
                   <a:srgbClr val="000000"/>
                 </a:solidFill>
               </a:rPr>
-              <a:t>🔻</a:t>
+              <a:t>■</a:t>
             </a:r>
             <a:endParaRPr lang="en-US" sz="1600" dirty="0"/>
           </a:p>
@@ -4587,7 +4570,7 @@
               <a:buNone/>
             </a:pPr>
             <a:r>
-              <a:rPr lang="en-US" sz="1000" b="1" dirty="0">
+              <a:rPr lang="en-US" sz="1400" b="1" dirty="0">
                 <a:solidFill>
                   <a:srgbClr val="C8A020"/>
                 </a:solidFill>
@@ -4597,7 +4580,7 @@
               </a:rPr>
               <a:t>Jacobus de Ispania</a:t>
             </a:r>
-            <a:endParaRPr lang="en-US" sz="1000" dirty="0"/>
+            <a:endParaRPr lang="en-US" sz="1400" dirty="0"/>
           </a:p>
         </p:txBody>
       </p:sp>
@@ -4619,14 +4602,14 @@
           <a:ln/>
         </p:spPr>
         <p:txBody>
-          <a:bodyPr wrap="square" lIns="0" tIns="0" rIns="0" bIns="0" rtlCol="0" anchor="ctr"/>
-          <a:lstStyle/>
-          <a:p>
-            <a:pPr indent="0" marL="0">
-              <a:buNone/>
-            </a:pPr>
-            <a:r>
-              <a:rPr lang="en-US" sz="800" dirty="0">
+          <a:bodyPr wrap="square" lIns="0" tIns="0" rIns="0" bIns="0" rtlCol="0" anchor="t"/>
+          <a:lstStyle/>
+          <a:p>
+            <a:pPr indent="0" marL="0">
+              <a:buNone/>
+            </a:pPr>
+            <a:r>
+              <a:rPr lang="en-US" sz="1400" dirty="0">
                 <a:solidFill>
                   <a:srgbClr val="E8D8A8"/>
                 </a:solidFill>
@@ -4636,7 +4619,7 @@
               </a:rPr>
               <a:t>ca. 1260–after 1330</a:t>
             </a:r>
-            <a:endParaRPr lang="en-US" sz="800" dirty="0"/>
+            <a:endParaRPr lang="en-US" sz="1400" dirty="0"/>
           </a:p>
         </p:txBody>
       </p:sp>
@@ -4678,14 +4661,14 @@
           <a:ln/>
         </p:spPr>
         <p:txBody>
-          <a:bodyPr wrap="square" lIns="0" tIns="0" rIns="0" bIns="0" rtlCol="0" anchor="ctr"/>
-          <a:lstStyle/>
-          <a:p>
-            <a:pPr indent="0" marL="0">
-              <a:buNone/>
-            </a:pPr>
-            <a:r>
-              <a:rPr lang="en-US" sz="850" dirty="0">
+          <a:bodyPr wrap="square" lIns="0" tIns="0" rIns="0" bIns="0" rtlCol="0" anchor="t"/>
+          <a:lstStyle/>
+          <a:p>
+            <a:pPr indent="0" marL="0">
+              <a:buNone/>
+            </a:pPr>
+            <a:r>
+              <a:rPr lang="en-US" sz="1400" dirty="0">
                 <a:solidFill>
                   <a:srgbClr val="FBF5E6"/>
                 </a:solidFill>
@@ -4695,7 +4678,7 @@
               </a:rPr>
               <a:t>Speculum musicae (ca. 1330)——最長的中世紀音樂論文 · 反對 Ars Nova · 擁護 ars antiqua</a:t>
             </a:r>
-            <a:endParaRPr lang="en-US" sz="850" dirty="0"/>
+            <a:endParaRPr lang="en-US" sz="1400" dirty="0"/>
           </a:p>
         </p:txBody>
       </p:sp>
@@ -4749,7 +4732,7 @@
                   <a:srgbClr val="000000"/>
                 </a:solidFill>
               </a:rPr>
-              <a:t>🎨</a:t>
+              <a:t>■</a:t>
             </a:r>
             <a:endParaRPr lang="en-US" sz="1600" dirty="0"/>
           </a:p>
@@ -4780,7 +4763,7 @@
               <a:buNone/>
             </a:pPr>
             <a:r>
-              <a:rPr lang="en-US" sz="1000" b="1" dirty="0">
+              <a:rPr lang="en-US" sz="1400" b="1" dirty="0">
                 <a:solidFill>
                   <a:srgbClr val="C8A020"/>
                 </a:solidFill>
@@ -4790,7 +4773,7 @@
               </a:rPr>
               <a:t>Philipoctus de Caserta</a:t>
             </a:r>
-            <a:endParaRPr lang="en-US" sz="1000" dirty="0"/>
+            <a:endParaRPr lang="en-US" sz="1400" dirty="0"/>
           </a:p>
         </p:txBody>
       </p:sp>
@@ -4812,14 +4795,14 @@
           <a:ln/>
         </p:spPr>
         <p:txBody>
-          <a:bodyPr wrap="square" lIns="0" tIns="0" rIns="0" bIns="0" rtlCol="0" anchor="ctr"/>
-          <a:lstStyle/>
-          <a:p>
-            <a:pPr indent="0" marL="0">
-              <a:buNone/>
-            </a:pPr>
-            <a:r>
-              <a:rPr lang="en-US" sz="800" dirty="0">
+          <a:bodyPr wrap="square" lIns="0" tIns="0" rIns="0" bIns="0" rtlCol="0" anchor="t"/>
+          <a:lstStyle/>
+          <a:p>
+            <a:pPr indent="0" marL="0">
+              <a:buNone/>
+            </a:pPr>
+            <a:r>
+              <a:rPr lang="en-US" sz="1400" dirty="0">
                 <a:solidFill>
                   <a:srgbClr val="E8D8A8"/>
                 </a:solidFill>
@@ -4829,7 +4812,7 @@
               </a:rPr>
               <a:t>fl. 1370s</a:t>
             </a:r>
-            <a:endParaRPr lang="en-US" sz="800" dirty="0"/>
+            <a:endParaRPr lang="en-US" sz="1400" dirty="0"/>
           </a:p>
         </p:txBody>
       </p:sp>
@@ -4871,14 +4854,14 @@
           <a:ln/>
         </p:spPr>
         <p:txBody>
-          <a:bodyPr wrap="square" lIns="0" tIns="0" rIns="0" bIns="0" rtlCol="0" anchor="ctr"/>
-          <a:lstStyle/>
-          <a:p>
-            <a:pPr indent="0" marL="0">
-              <a:buNone/>
-            </a:pPr>
-            <a:r>
-              <a:rPr lang="en-US" sz="850" dirty="0">
+          <a:bodyPr wrap="square" lIns="0" tIns="0" rIns="0" bIns="0" rtlCol="0" anchor="t"/>
+          <a:lstStyle/>
+          <a:p>
+            <a:pPr indent="0" marL="0">
+              <a:buNone/>
+            </a:pPr>
+            <a:r>
+              <a:rPr lang="en-US" sz="1400" dirty="0">
                 <a:solidFill>
                   <a:srgbClr val="FBF5E6"/>
                 </a:solidFill>
@@ -4888,7 +4871,7 @@
               </a:rPr>
               <a:t>亞維農教廷作曲家兼樂論家 · "Ars Subtilior" 一詞源自其論文 · En remirant vo douce pourtraiture</a:t>
             </a:r>
-            <a:endParaRPr lang="en-US" sz="850" dirty="0"/>
+            <a:endParaRPr lang="en-US" sz="1400" dirty="0"/>
           </a:p>
         </p:txBody>
       </p:sp>
@@ -4942,7 +4925,7 @@
                   <a:srgbClr val="000000"/>
                 </a:solidFill>
               </a:rPr>
-              <a:t>🎹</a:t>
+              <a:t>■</a:t>
             </a:r>
             <a:endParaRPr lang="en-US" sz="1600" dirty="0"/>
           </a:p>
@@ -4973,7 +4956,7 @@
               <a:buNone/>
             </a:pPr>
             <a:r>
-              <a:rPr lang="en-US" sz="1000" b="1" dirty="0">
+              <a:rPr lang="en-US" sz="1400" b="1" dirty="0">
                 <a:solidFill>
                   <a:srgbClr val="C8A020"/>
                 </a:solidFill>
@@ -4983,7 +4966,7 @@
               </a:rPr>
               <a:t>Francesco Landini</a:t>
             </a:r>
-            <a:endParaRPr lang="en-US" sz="1000" dirty="0"/>
+            <a:endParaRPr lang="en-US" sz="1400" dirty="0"/>
           </a:p>
         </p:txBody>
       </p:sp>
@@ -5005,14 +4988,14 @@
           <a:ln/>
         </p:spPr>
         <p:txBody>
-          <a:bodyPr wrap="square" lIns="0" tIns="0" rIns="0" bIns="0" rtlCol="0" anchor="ctr"/>
-          <a:lstStyle/>
-          <a:p>
-            <a:pPr indent="0" marL="0">
-              <a:buNone/>
-            </a:pPr>
-            <a:r>
-              <a:rPr lang="en-US" sz="800" dirty="0">
+          <a:bodyPr wrap="square" lIns="0" tIns="0" rIns="0" bIns="0" rtlCol="0" anchor="t"/>
+          <a:lstStyle/>
+          <a:p>
+            <a:pPr indent="0" marL="0">
+              <a:buNone/>
+            </a:pPr>
+            <a:r>
+              <a:rPr lang="en-US" sz="1400" dirty="0">
                 <a:solidFill>
                   <a:srgbClr val="E8D8A8"/>
                 </a:solidFill>
@@ -5022,7 +5005,7 @@
               </a:rPr>
               <a:t>ca. 1325–1397</a:t>
             </a:r>
-            <a:endParaRPr lang="en-US" sz="800" dirty="0"/>
+            <a:endParaRPr lang="en-US" sz="1400" dirty="0"/>
           </a:p>
         </p:txBody>
       </p:sp>
@@ -5064,14 +5047,14 @@
           <a:ln/>
         </p:spPr>
         <p:txBody>
-          <a:bodyPr wrap="square" lIns="0" tIns="0" rIns="0" bIns="0" rtlCol="0" anchor="ctr"/>
-          <a:lstStyle/>
-          <a:p>
-            <a:pPr indent="0" marL="0">
-              <a:buNone/>
-            </a:pPr>
-            <a:r>
-              <a:rPr lang="en-US" sz="850" dirty="0">
+          <a:bodyPr wrap="square" lIns="0" tIns="0" rIns="0" bIns="0" rtlCol="0" anchor="t"/>
+          <a:lstStyle/>
+          <a:p>
+            <a:pPr indent="0" marL="0">
+              <a:buNone/>
+            </a:pPr>
+            <a:r>
+              <a:rPr lang="en-US" sz="1400" dirty="0">
                 <a:solidFill>
                   <a:srgbClr val="FBF5E6"/>
                 </a:solidFill>
@@ -5081,7 +5064,7 @@
               </a:rPr>
               <a:t>Trecento 最重要作曲家 · 失明的 organetto 大師 · 140 ballate · Landini cadence 得名於他</a:t>
             </a:r>
-            <a:endParaRPr lang="en-US" sz="850" dirty="0"/>
+            <a:endParaRPr lang="en-US" sz="1400" dirty="0"/>
           </a:p>
         </p:txBody>
       </p:sp>
@@ -5135,7 +5118,7 @@
                   <a:srgbClr val="000000"/>
                 </a:solidFill>
               </a:rPr>
-              <a:t>🎭</a:t>
+              <a:t>■</a:t>
             </a:r>
             <a:endParaRPr lang="en-US" sz="1600" dirty="0"/>
           </a:p>
@@ -5166,7 +5149,7 @@
               <a:buNone/>
             </a:pPr>
             <a:r>
-              <a:rPr lang="en-US" sz="1000" b="1" dirty="0">
+              <a:rPr lang="en-US" sz="1400" b="1" dirty="0">
                 <a:solidFill>
                   <a:srgbClr val="C8A020"/>
                 </a:solidFill>
@@ -5176,7 +5159,7 @@
               </a:rPr>
               <a:t>Jacopo da Bologna</a:t>
             </a:r>
-            <a:endParaRPr lang="en-US" sz="1000" dirty="0"/>
+            <a:endParaRPr lang="en-US" sz="1400" dirty="0"/>
           </a:p>
         </p:txBody>
       </p:sp>
@@ -5198,14 +5181,14 @@
           <a:ln/>
         </p:spPr>
         <p:txBody>
-          <a:bodyPr wrap="square" lIns="0" tIns="0" rIns="0" bIns="0" rtlCol="0" anchor="ctr"/>
-          <a:lstStyle/>
-          <a:p>
-            <a:pPr indent="0" marL="0">
-              <a:buNone/>
-            </a:pPr>
-            <a:r>
-              <a:rPr lang="en-US" sz="800" dirty="0">
+          <a:bodyPr wrap="square" lIns="0" tIns="0" rIns="0" bIns="0" rtlCol="0" anchor="t"/>
+          <a:lstStyle/>
+          <a:p>
+            <a:pPr indent="0" marL="0">
+              <a:buNone/>
+            </a:pPr>
+            <a:r>
+              <a:rPr lang="en-US" sz="1400" dirty="0">
                 <a:solidFill>
                   <a:srgbClr val="E8D8A8"/>
                 </a:solidFill>
@@ -5215,7 +5198,7 @@
               </a:rPr>
               <a:t>fl. 1340s–60s</a:t>
             </a:r>
-            <a:endParaRPr lang="en-US" sz="800" dirty="0"/>
+            <a:endParaRPr lang="en-US" sz="1400" dirty="0"/>
           </a:p>
         </p:txBody>
       </p:sp>
@@ -5257,14 +5240,14 @@
           <a:ln/>
         </p:spPr>
         <p:txBody>
-          <a:bodyPr wrap="square" lIns="0" tIns="0" rIns="0" bIns="0" rtlCol="0" anchor="ctr"/>
-          <a:lstStyle/>
-          <a:p>
-            <a:pPr indent="0" marL="0">
-              <a:buNone/>
-            </a:pPr>
-            <a:r>
-              <a:rPr lang="en-US" sz="850" dirty="0">
+          <a:bodyPr wrap="square" lIns="0" tIns="0" rIns="0" bIns="0" rtlCol="0" anchor="t"/>
+          <a:lstStyle/>
+          <a:p>
+            <a:pPr indent="0" marL="0">
+              <a:buNone/>
+            </a:pPr>
+            <a:r>
+              <a:rPr lang="en-US" sz="1400" dirty="0">
                 <a:solidFill>
                   <a:srgbClr val="FBF5E6"/>
                 </a:solidFill>
@@ -5274,7 +5257,7 @@
               </a:rPr>
               <a:t>Trecento 早期重要 madrigal 作曲家 · Non al suo amante 為 Petrarch 詩譜曲</a:t>
             </a:r>
-            <a:endParaRPr lang="en-US" sz="850" dirty="0"/>
+            <a:endParaRPr lang="en-US" sz="1400" dirty="0"/>
           </a:p>
         </p:txBody>
       </p:sp>
@@ -5328,7 +5311,7 @@
                   <a:srgbClr val="000000"/>
                 </a:solidFill>
               </a:rPr>
-              <a:t>📜</a:t>
+              <a:t>■</a:t>
             </a:r>
             <a:endParaRPr lang="en-US" sz="1600" dirty="0"/>
           </a:p>
@@ -5359,7 +5342,7 @@
               <a:buNone/>
             </a:pPr>
             <a:r>
-              <a:rPr lang="en-US" sz="1000" b="1" dirty="0">
+              <a:rPr lang="en-US" sz="1400" b="1" dirty="0">
                 <a:solidFill>
                   <a:srgbClr val="C8A020"/>
                 </a:solidFill>
@@ -5369,7 +5352,7 @@
               </a:rPr>
               <a:t>Prosdocimo de' Beldomandi</a:t>
             </a:r>
-            <a:endParaRPr lang="en-US" sz="1000" dirty="0"/>
+            <a:endParaRPr lang="en-US" sz="1400" dirty="0"/>
           </a:p>
         </p:txBody>
       </p:sp>
@@ -5391,14 +5374,14 @@
           <a:ln/>
         </p:spPr>
         <p:txBody>
-          <a:bodyPr wrap="square" lIns="0" tIns="0" rIns="0" bIns="0" rtlCol="0" anchor="ctr"/>
-          <a:lstStyle/>
-          <a:p>
-            <a:pPr indent="0" marL="0">
-              <a:buNone/>
-            </a:pPr>
-            <a:r>
-              <a:rPr lang="en-US" sz="800" dirty="0">
+          <a:bodyPr wrap="square" lIns="0" tIns="0" rIns="0" bIns="0" rtlCol="0" anchor="t"/>
+          <a:lstStyle/>
+          <a:p>
+            <a:pPr indent="0" marL="0">
+              <a:buNone/>
+            </a:pPr>
+            <a:r>
+              <a:rPr lang="en-US" sz="1400" dirty="0">
                 <a:solidFill>
                   <a:srgbClr val="E8D8A8"/>
                 </a:solidFill>
@@ -5408,7 +5391,7 @@
               </a:rPr>
               <a:t>d. 1428</a:t>
             </a:r>
-            <a:endParaRPr lang="en-US" sz="800" dirty="0"/>
+            <a:endParaRPr lang="en-US" sz="1400" dirty="0"/>
           </a:p>
         </p:txBody>
       </p:sp>
@@ -5450,14 +5433,14 @@
           <a:ln/>
         </p:spPr>
         <p:txBody>
-          <a:bodyPr wrap="square" lIns="0" tIns="0" rIns="0" bIns="0" rtlCol="0" anchor="ctr"/>
-          <a:lstStyle/>
-          <a:p>
-            <a:pPr indent="0" marL="0">
-              <a:buNone/>
-            </a:pPr>
-            <a:r>
-              <a:rPr lang="en-US" sz="850" dirty="0">
+          <a:bodyPr wrap="square" lIns="0" tIns="0" rIns="0" bIns="0" rtlCol="0" anchor="t"/>
+          <a:lstStyle/>
+          <a:p>
+            <a:pPr indent="0" marL="0">
+              <a:buNone/>
+            </a:pPr>
+            <a:r>
+              <a:rPr lang="en-US" sz="1400" dirty="0">
                 <a:solidFill>
                   <a:srgbClr val="FBF5E6"/>
                 </a:solidFill>
@@ -5467,7 +5450,7 @@
               </a:rPr>
               <a:t>Padua 大學教授 · Contrapunctus (1412) 最清楚地闡述 musica ficta 規則</a:t>
             </a:r>
-            <a:endParaRPr lang="en-US" sz="850" dirty="0"/>
+            <a:endParaRPr lang="en-US" sz="1400" dirty="0"/>
           </a:p>
         </p:txBody>
       </p:sp>
@@ -5640,14 +5623,14 @@
           <a:ln/>
         </p:spPr>
         <p:txBody>
-          <a:bodyPr wrap="square" lIns="0" tIns="0" rIns="0" bIns="0" rtlCol="0" anchor="ctr"/>
+          <a:bodyPr wrap="square" lIns="0" tIns="0" rIns="0" bIns="0" rtlCol="0" anchor="t"/>
           <a:lstStyle/>
           <a:p>
             <a:pPr algn="r" indent="0" marL="0">
               <a:buNone/>
             </a:pPr>
             <a:r>
-              <a:rPr lang="en-US" sz="800" dirty="0">
+              <a:rPr lang="en-US" sz="1400" dirty="0">
                 <a:solidFill>
                   <a:srgbClr val="E8D8A8"/>
                 </a:solidFill>
@@ -5657,7 +5640,7 @@
               </a:rPr>
               <a:t>ca. 1300</a:t>
             </a:r>
-            <a:endParaRPr lang="en-US" sz="800" dirty="0"/>
+            <a:endParaRPr lang="en-US" sz="1400" dirty="0"/>
           </a:p>
         </p:txBody>
       </p:sp>
@@ -5679,14 +5662,14 @@
           <a:ln/>
         </p:spPr>
         <p:txBody>
-          <a:bodyPr wrap="square" lIns="0" tIns="0" rIns="0" bIns="0" rtlCol="0" anchor="ctr"/>
-          <a:lstStyle/>
-          <a:p>
-            <a:pPr indent="0" marL="0">
-              <a:buNone/>
-            </a:pPr>
-            <a:r>
-              <a:rPr lang="en-US" sz="800" dirty="0">
+          <a:bodyPr wrap="square" lIns="0" tIns="0" rIns="0" bIns="0" rtlCol="0" anchor="t"/>
+          <a:lstStyle/>
+          <a:p>
+            <a:pPr indent="0" marL="0">
+              <a:buNone/>
+            </a:pPr>
+            <a:r>
+              <a:rPr lang="en-US" sz="1400" dirty="0">
                 <a:solidFill>
                   <a:srgbClr val="FBF5E6"/>
                 </a:solidFill>
@@ -5696,7 +5679,7 @@
               </a:rPr>
               <a:t>機械時鐘問世 · Mechanical clocks invented</a:t>
             </a:r>
-            <a:endParaRPr lang="en-US" sz="800" dirty="0"/>
+            <a:endParaRPr lang="en-US" sz="1400" dirty="0"/>
           </a:p>
         </p:txBody>
       </p:sp>
@@ -5738,14 +5721,14 @@
           <a:ln/>
         </p:spPr>
         <p:txBody>
-          <a:bodyPr wrap="square" lIns="0" tIns="0" rIns="0" bIns="0" rtlCol="0" anchor="ctr"/>
+          <a:bodyPr wrap="square" lIns="0" tIns="0" rIns="0" bIns="0" rtlCol="0" anchor="t"/>
           <a:lstStyle/>
           <a:p>
             <a:pPr algn="r" indent="0" marL="0">
               <a:buNone/>
             </a:pPr>
             <a:r>
-              <a:rPr lang="en-US" sz="800" dirty="0">
+              <a:rPr lang="en-US" sz="1400" dirty="0">
                 <a:solidFill>
                   <a:srgbClr val="E8D8A8"/>
                 </a:solidFill>
@@ -5755,7 +5738,7 @@
               </a:rPr>
               <a:t>ca. 1305</a:t>
             </a:r>
-            <a:endParaRPr lang="en-US" sz="800" dirty="0"/>
+            <a:endParaRPr lang="en-US" sz="1400" dirty="0"/>
           </a:p>
         </p:txBody>
       </p:sp>
@@ -5777,14 +5760,14 @@
           <a:ln/>
         </p:spPr>
         <p:txBody>
-          <a:bodyPr wrap="square" lIns="0" tIns="0" rIns="0" bIns="0" rtlCol="0" anchor="ctr"/>
-          <a:lstStyle/>
-          <a:p>
-            <a:pPr indent="0" marL="0">
-              <a:buNone/>
-            </a:pPr>
-            <a:r>
-              <a:rPr lang="en-US" sz="800" dirty="0">
+          <a:bodyPr wrap="square" lIns="0" tIns="0" rIns="0" bIns="0" rtlCol="0" anchor="t"/>
+          <a:lstStyle/>
+          <a:p>
+            <a:pPr indent="0" marL="0">
+              <a:buNone/>
+            </a:pPr>
+            <a:r>
+              <a:rPr lang="en-US" sz="1400" dirty="0">
                 <a:solidFill>
                   <a:srgbClr val="FBF5E6"/>
                 </a:solidFill>
@@ -5794,7 +5777,7 @@
               </a:rPr>
               <a:t>Giotto · Scrovegni Chapel 壁畫</a:t>
             </a:r>
-            <a:endParaRPr lang="en-US" sz="800" dirty="0"/>
+            <a:endParaRPr lang="en-US" sz="1400" dirty="0"/>
           </a:p>
         </p:txBody>
       </p:sp>
@@ -5836,14 +5819,14 @@
           <a:ln/>
         </p:spPr>
         <p:txBody>
-          <a:bodyPr wrap="square" lIns="0" tIns="0" rIns="0" bIns="0" rtlCol="0" anchor="ctr"/>
+          <a:bodyPr wrap="square" lIns="0" tIns="0" rIns="0" bIns="0" rtlCol="0" anchor="t"/>
           <a:lstStyle/>
           <a:p>
             <a:pPr algn="r" indent="0" marL="0">
               <a:buNone/>
             </a:pPr>
             <a:r>
-              <a:rPr lang="en-US" sz="800" dirty="0">
+              <a:rPr lang="en-US" sz="1400" dirty="0">
                 <a:solidFill>
                   <a:srgbClr val="E8D8A8"/>
                 </a:solidFill>
@@ -5853,7 +5836,7 @@
               </a:rPr>
               <a:t>1307</a:t>
             </a:r>
-            <a:endParaRPr lang="en-US" sz="800" dirty="0"/>
+            <a:endParaRPr lang="en-US" sz="1400" dirty="0"/>
           </a:p>
         </p:txBody>
       </p:sp>
@@ -5875,14 +5858,14 @@
           <a:ln/>
         </p:spPr>
         <p:txBody>
-          <a:bodyPr wrap="square" lIns="0" tIns="0" rIns="0" bIns="0" rtlCol="0" anchor="ctr"/>
-          <a:lstStyle/>
-          <a:p>
-            <a:pPr indent="0" marL="0">
-              <a:buNone/>
-            </a:pPr>
-            <a:r>
-              <a:rPr lang="en-US" sz="800" dirty="0">
+          <a:bodyPr wrap="square" lIns="0" tIns="0" rIns="0" bIns="0" rtlCol="0" anchor="t"/>
+          <a:lstStyle/>
+          <a:p>
+            <a:pPr indent="0" marL="0">
+              <a:buNone/>
+            </a:pPr>
+            <a:r>
+              <a:rPr lang="en-US" sz="1400" dirty="0">
                 <a:solidFill>
                   <a:srgbClr val="FBF5E6"/>
                 </a:solidFill>
@@ -5892,7 +5875,7 @@
               </a:rPr>
               <a:t>Dante · Divine Comedy 以托斯卡納方言寫成</a:t>
             </a:r>
-            <a:endParaRPr lang="en-US" sz="800" dirty="0"/>
+            <a:endParaRPr lang="en-US" sz="1400" dirty="0"/>
           </a:p>
         </p:txBody>
       </p:sp>
@@ -5934,14 +5917,14 @@
           <a:ln/>
         </p:spPr>
         <p:txBody>
-          <a:bodyPr wrap="square" lIns="0" tIns="0" rIns="0" bIns="0" rtlCol="0" anchor="ctr"/>
+          <a:bodyPr wrap="square" lIns="0" tIns="0" rIns="0" bIns="0" rtlCol="0" anchor="t"/>
           <a:lstStyle/>
           <a:p>
             <a:pPr algn="r" indent="0" marL="0">
               <a:buNone/>
             </a:pPr>
             <a:r>
-              <a:rPr lang="en-US" sz="800" dirty="0">
+              <a:rPr lang="en-US" sz="1400" dirty="0">
                 <a:solidFill>
                   <a:srgbClr val="E8D8A8"/>
                 </a:solidFill>
@@ -5951,7 +5934,7 @@
               </a:rPr>
               <a:t>1309</a:t>
             </a:r>
-            <a:endParaRPr lang="en-US" sz="800" dirty="0"/>
+            <a:endParaRPr lang="en-US" sz="1400" dirty="0"/>
           </a:p>
         </p:txBody>
       </p:sp>
@@ -5973,14 +5956,14 @@
           <a:ln/>
         </p:spPr>
         <p:txBody>
-          <a:bodyPr wrap="square" lIns="0" tIns="0" rIns="0" bIns="0" rtlCol="0" anchor="ctr"/>
-          <a:lstStyle/>
-          <a:p>
-            <a:pPr indent="0" marL="0">
-              <a:buNone/>
-            </a:pPr>
-            <a:r>
-              <a:rPr lang="en-US" sz="800" dirty="0">
+          <a:bodyPr wrap="square" lIns="0" tIns="0" rIns="0" bIns="0" rtlCol="0" anchor="t"/>
+          <a:lstStyle/>
+          <a:p>
+            <a:pPr indent="0" marL="0">
+              <a:buNone/>
+            </a:pPr>
+            <a:r>
+              <a:rPr lang="en-US" sz="1400" dirty="0">
                 <a:solidFill>
                   <a:srgbClr val="FBF5E6"/>
                 </a:solidFill>
@@ -5990,7 +5973,7 @@
               </a:rPr>
               <a:t>教皇 Clement V 移駐亞維農「巴比倫之囚」</a:t>
             </a:r>
-            <a:endParaRPr lang="en-US" sz="800" dirty="0"/>
+            <a:endParaRPr lang="en-US" sz="1400" dirty="0"/>
           </a:p>
         </p:txBody>
       </p:sp>
@@ -6032,14 +6015,14 @@
           <a:ln/>
         </p:spPr>
         <p:txBody>
-          <a:bodyPr wrap="square" lIns="0" tIns="0" rIns="0" bIns="0" rtlCol="0" anchor="ctr"/>
+          <a:bodyPr wrap="square" lIns="0" tIns="0" rIns="0" bIns="0" rtlCol="0" anchor="t"/>
           <a:lstStyle/>
           <a:p>
             <a:pPr algn="r" indent="0" marL="0">
               <a:buNone/>
             </a:pPr>
             <a:r>
-              <a:rPr lang="en-US" sz="800" dirty="0">
+              <a:rPr lang="en-US" sz="1400" dirty="0">
                 <a:solidFill>
                   <a:srgbClr val="E8D8A8"/>
                 </a:solidFill>
@@ -6049,7 +6032,7 @@
               </a:rPr>
               <a:t>ca. 1317</a:t>
             </a:r>
-            <a:endParaRPr lang="en-US" sz="800" dirty="0"/>
+            <a:endParaRPr lang="en-US" sz="1400" dirty="0"/>
           </a:p>
         </p:txBody>
       </p:sp>
@@ -6071,14 +6054,14 @@
           <a:ln/>
         </p:spPr>
         <p:txBody>
-          <a:bodyPr wrap="square" lIns="0" tIns="0" rIns="0" bIns="0" rtlCol="0" anchor="ctr"/>
-          <a:lstStyle/>
-          <a:p>
-            <a:pPr indent="0" marL="0">
-              <a:buNone/>
-            </a:pPr>
-            <a:r>
-              <a:rPr lang="en-US" sz="800" dirty="0">
+          <a:bodyPr wrap="square" lIns="0" tIns="0" rIns="0" bIns="0" rtlCol="0" anchor="t"/>
+          <a:lstStyle/>
+          <a:p>
+            <a:pPr indent="0" marL="0">
+              <a:buNone/>
+            </a:pPr>
+            <a:r>
+              <a:rPr lang="en-US" sz="1400" dirty="0">
                 <a:solidFill>
                   <a:srgbClr val="FBF5E6"/>
                 </a:solidFill>
@@ -6088,7 +6071,7 @@
               </a:rPr>
               <a:t>Roman de Fauvel 手稿（含 169 首音樂作品）</a:t>
             </a:r>
-            <a:endParaRPr lang="en-US" sz="800" dirty="0"/>
+            <a:endParaRPr lang="en-US" sz="1400" dirty="0"/>
           </a:p>
         </p:txBody>
       </p:sp>
@@ -6130,14 +6113,14 @@
           <a:ln/>
         </p:spPr>
         <p:txBody>
-          <a:bodyPr wrap="square" lIns="0" tIns="0" rIns="0" bIns="0" rtlCol="0" anchor="ctr"/>
+          <a:bodyPr wrap="square" lIns="0" tIns="0" rIns="0" bIns="0" rtlCol="0" anchor="t"/>
           <a:lstStyle/>
           <a:p>
             <a:pPr algn="r" indent="0" marL="0">
               <a:buNone/>
             </a:pPr>
             <a:r>
-              <a:rPr lang="en-US" sz="800" dirty="0">
+              <a:rPr lang="en-US" sz="1400" dirty="0">
                 <a:solidFill>
                   <a:srgbClr val="E8D8A8"/>
                 </a:solidFill>
@@ -6147,7 +6130,7 @@
               </a:rPr>
               <a:t>ca. 1320</a:t>
             </a:r>
-            <a:endParaRPr lang="en-US" sz="800" dirty="0"/>
+            <a:endParaRPr lang="en-US" sz="1400" dirty="0"/>
           </a:p>
         </p:txBody>
       </p:sp>
@@ -6169,14 +6152,14 @@
           <a:ln/>
         </p:spPr>
         <p:txBody>
-          <a:bodyPr wrap="square" lIns="0" tIns="0" rIns="0" bIns="0" rtlCol="0" anchor="ctr"/>
-          <a:lstStyle/>
-          <a:p>
-            <a:pPr indent="0" marL="0">
-              <a:buNone/>
-            </a:pPr>
-            <a:r>
-              <a:rPr lang="en-US" sz="800" dirty="0">
+          <a:bodyPr wrap="square" lIns="0" tIns="0" rIns="0" bIns="0" rtlCol="0" anchor="t"/>
+          <a:lstStyle/>
+          <a:p>
+            <a:pPr indent="0" marL="0">
+              <a:buNone/>
+            </a:pPr>
+            <a:r>
+              <a:rPr lang="en-US" sz="1400" dirty="0">
                 <a:solidFill>
                   <a:srgbClr val="FBF5E6"/>
                 </a:solidFill>
@@ -6186,7 +6169,7 @@
               </a:rPr>
               <a:t>Philippe de Vitry · Cum statua/Hugo · Ars nova 論文</a:t>
             </a:r>
-            <a:endParaRPr lang="en-US" sz="800" dirty="0"/>
+            <a:endParaRPr lang="en-US" sz="1400" dirty="0"/>
           </a:p>
         </p:txBody>
       </p:sp>
@@ -6228,14 +6211,14 @@
           <a:ln/>
         </p:spPr>
         <p:txBody>
-          <a:bodyPr wrap="square" lIns="0" tIns="0" rIns="0" bIns="0" rtlCol="0" anchor="ctr"/>
+          <a:bodyPr wrap="square" lIns="0" tIns="0" rIns="0" bIns="0" rtlCol="0" anchor="t"/>
           <a:lstStyle/>
           <a:p>
             <a:pPr algn="r" indent="0" marL="0">
               <a:buNone/>
             </a:pPr>
             <a:r>
-              <a:rPr lang="en-US" sz="800" dirty="0">
+              <a:rPr lang="en-US" sz="1400" dirty="0">
                 <a:solidFill>
                   <a:srgbClr val="E8D8A8"/>
                 </a:solidFill>
@@ -6245,7 +6228,7 @@
               </a:rPr>
               <a:t>ca. 1323</a:t>
             </a:r>
-            <a:endParaRPr lang="en-US" sz="800" dirty="0"/>
+            <a:endParaRPr lang="en-US" sz="1400" dirty="0"/>
           </a:p>
         </p:txBody>
       </p:sp>
@@ -6267,14 +6250,14 @@
           <a:ln/>
         </p:spPr>
         <p:txBody>
-          <a:bodyPr wrap="square" lIns="0" tIns="0" rIns="0" bIns="0" rtlCol="0" anchor="ctr"/>
-          <a:lstStyle/>
-          <a:p>
-            <a:pPr indent="0" marL="0">
-              <a:buNone/>
-            </a:pPr>
-            <a:r>
-              <a:rPr lang="en-US" sz="800" dirty="0">
+          <a:bodyPr wrap="square" lIns="0" tIns="0" rIns="0" bIns="0" rtlCol="0" anchor="t"/>
+          <a:lstStyle/>
+          <a:p>
+            <a:pPr indent="0" marL="0">
+              <a:buNone/>
+            </a:pPr>
+            <a:r>
+              <a:rPr lang="en-US" sz="1400" dirty="0">
                 <a:solidFill>
                   <a:srgbClr val="FBF5E6"/>
                 </a:solidFill>
@@ -6284,7 +6267,7 @@
               </a:rPr>
               <a:t>Machaut 入 John of Luxembourg 之服</a:t>
             </a:r>
-            <a:endParaRPr lang="en-US" sz="800" dirty="0"/>
+            <a:endParaRPr lang="en-US" sz="1400" dirty="0"/>
           </a:p>
         </p:txBody>
       </p:sp>
@@ -6326,14 +6309,14 @@
           <a:ln/>
         </p:spPr>
         <p:txBody>
-          <a:bodyPr wrap="square" lIns="0" tIns="0" rIns="0" bIns="0" rtlCol="0" anchor="ctr"/>
+          <a:bodyPr wrap="square" lIns="0" tIns="0" rIns="0" bIns="0" rtlCol="0" anchor="t"/>
           <a:lstStyle/>
           <a:p>
             <a:pPr algn="r" indent="0" marL="0">
               <a:buNone/>
             </a:pPr>
             <a:r>
-              <a:rPr lang="en-US" sz="800" dirty="0">
+              <a:rPr lang="en-US" sz="1400" dirty="0">
                 <a:solidFill>
                   <a:srgbClr val="E8D8A8"/>
                 </a:solidFill>
@@ -6343,7 +6326,7 @@
               </a:rPr>
               <a:t>ca. 1330</a:t>
             </a:r>
-            <a:endParaRPr lang="en-US" sz="800" dirty="0"/>
+            <a:endParaRPr lang="en-US" sz="1400" dirty="0"/>
           </a:p>
         </p:txBody>
       </p:sp>
@@ -6365,14 +6348,14 @@
           <a:ln/>
         </p:spPr>
         <p:txBody>
-          <a:bodyPr wrap="square" lIns="0" tIns="0" rIns="0" bIns="0" rtlCol="0" anchor="ctr"/>
-          <a:lstStyle/>
-          <a:p>
-            <a:pPr indent="0" marL="0">
-              <a:buNone/>
-            </a:pPr>
-            <a:r>
-              <a:rPr lang="en-US" sz="800" dirty="0">
+          <a:bodyPr wrap="square" lIns="0" tIns="0" rIns="0" bIns="0" rtlCol="0" anchor="t"/>
+          <a:lstStyle/>
+          <a:p>
+            <a:pPr indent="0" marL="0">
+              <a:buNone/>
+            </a:pPr>
+            <a:r>
+              <a:rPr lang="en-US" sz="1400" dirty="0">
                 <a:solidFill>
                   <a:srgbClr val="FBF5E6"/>
                 </a:solidFill>
@@ -6382,7 +6365,7 @@
               </a:rPr>
               <a:t>Jacobus de Ispania · Speculum musicae</a:t>
             </a:r>
-            <a:endParaRPr lang="en-US" sz="800" dirty="0"/>
+            <a:endParaRPr lang="en-US" sz="1400" dirty="0"/>
           </a:p>
         </p:txBody>
       </p:sp>
@@ -6424,14 +6407,14 @@
           <a:ln/>
         </p:spPr>
         <p:txBody>
-          <a:bodyPr wrap="square" lIns="0" tIns="0" rIns="0" bIns="0" rtlCol="0" anchor="ctr"/>
+          <a:bodyPr wrap="square" lIns="0" tIns="0" rIns="0" bIns="0" rtlCol="0" anchor="t"/>
           <a:lstStyle/>
           <a:p>
             <a:pPr algn="r" indent="0" marL="0">
               <a:buNone/>
             </a:pPr>
             <a:r>
-              <a:rPr lang="en-US" sz="800" dirty="0">
+              <a:rPr lang="en-US" sz="1400" dirty="0">
                 <a:solidFill>
                   <a:srgbClr val="E8D8A8"/>
                 </a:solidFill>
@@ -6441,7 +6424,7 @@
               </a:rPr>
               <a:t>1337–1453</a:t>
             </a:r>
-            <a:endParaRPr lang="en-US" sz="800" dirty="0"/>
+            <a:endParaRPr lang="en-US" sz="1400" dirty="0"/>
           </a:p>
         </p:txBody>
       </p:sp>
@@ -6463,14 +6446,14 @@
           <a:ln/>
         </p:spPr>
         <p:txBody>
-          <a:bodyPr wrap="square" lIns="0" tIns="0" rIns="0" bIns="0" rtlCol="0" anchor="ctr"/>
-          <a:lstStyle/>
-          <a:p>
-            <a:pPr indent="0" marL="0">
-              <a:buNone/>
-            </a:pPr>
-            <a:r>
-              <a:rPr lang="en-US" sz="800" dirty="0">
+          <a:bodyPr wrap="square" lIns="0" tIns="0" rIns="0" bIns="0" rtlCol="0" anchor="t"/>
+          <a:lstStyle/>
+          <a:p>
+            <a:pPr indent="0" marL="0">
+              <a:buNone/>
+            </a:pPr>
+            <a:r>
+              <a:rPr lang="en-US" sz="1400" dirty="0">
                 <a:solidFill>
                   <a:srgbClr val="FBF5E6"/>
                 </a:solidFill>
@@ -6480,7 +6463,7 @@
               </a:rPr>
               <a:t>英法百年戰爭 · Hundred Years' War</a:t>
             </a:r>
-            <a:endParaRPr lang="en-US" sz="800" dirty="0"/>
+            <a:endParaRPr lang="en-US" sz="1400" dirty="0"/>
           </a:p>
         </p:txBody>
       </p:sp>
@@ -6522,14 +6505,14 @@
           <a:ln/>
         </p:spPr>
         <p:txBody>
-          <a:bodyPr wrap="square" lIns="0" tIns="0" rIns="0" bIns="0" rtlCol="0" anchor="ctr"/>
+          <a:bodyPr wrap="square" lIns="0" tIns="0" rIns="0" bIns="0" rtlCol="0" anchor="t"/>
           <a:lstStyle/>
           <a:p>
             <a:pPr algn="r" indent="0" marL="0">
               <a:buNone/>
             </a:pPr>
             <a:r>
-              <a:rPr lang="en-US" sz="800" dirty="0">
+              <a:rPr lang="en-US" sz="1400" dirty="0">
                 <a:solidFill>
                   <a:srgbClr val="E8D8A8"/>
                 </a:solidFill>
@@ -6539,7 +6522,7 @@
               </a:rPr>
               <a:t>ca. 1340</a:t>
             </a:r>
-            <a:endParaRPr lang="en-US" sz="800" dirty="0"/>
+            <a:endParaRPr lang="en-US" sz="1400" dirty="0"/>
           </a:p>
         </p:txBody>
       </p:sp>
@@ -6561,14 +6544,14 @@
           <a:ln/>
         </p:spPr>
         <p:txBody>
-          <a:bodyPr wrap="square" lIns="0" tIns="0" rIns="0" bIns="0" rtlCol="0" anchor="ctr"/>
-          <a:lstStyle/>
-          <a:p>
-            <a:pPr indent="0" marL="0">
-              <a:buNone/>
-            </a:pPr>
-            <a:r>
-              <a:rPr lang="en-US" sz="800" dirty="0">
+          <a:bodyPr wrap="square" lIns="0" tIns="0" rIns="0" bIns="0" rtlCol="0" anchor="t"/>
+          <a:lstStyle/>
+          <a:p>
+            <a:pPr indent="0" marL="0">
+              <a:buNone/>
+            </a:pPr>
+            <a:r>
+              <a:rPr lang="en-US" sz="1400" dirty="0">
                 <a:solidFill>
                   <a:srgbClr val="FBF5E6"/>
                 </a:solidFill>
@@ -6578,7 +6561,7 @@
               </a:rPr>
               <a:t>Jehan des Murs 描述 mensuration signs</a:t>
             </a:r>
-            <a:endParaRPr lang="en-US" sz="800" dirty="0"/>
+            <a:endParaRPr lang="en-US" sz="1400" dirty="0"/>
           </a:p>
         </p:txBody>
       </p:sp>
@@ -6620,14 +6603,14 @@
           <a:ln/>
         </p:spPr>
         <p:txBody>
-          <a:bodyPr wrap="square" lIns="0" tIns="0" rIns="0" bIns="0" rtlCol="0" anchor="ctr"/>
+          <a:bodyPr wrap="square" lIns="0" tIns="0" rIns="0" bIns="0" rtlCol="0" anchor="t"/>
           <a:lstStyle/>
           <a:p>
             <a:pPr algn="r" indent="0" marL="0">
               <a:buNone/>
             </a:pPr>
             <a:r>
-              <a:rPr lang="en-US" sz="800" dirty="0">
+              <a:rPr lang="en-US" sz="1400" dirty="0">
                 <a:solidFill>
                   <a:srgbClr val="E8D8A8"/>
                 </a:solidFill>
@@ -6637,7 +6620,7 @@
               </a:rPr>
               <a:t>1340</a:t>
             </a:r>
-            <a:endParaRPr lang="en-US" sz="800" dirty="0"/>
+            <a:endParaRPr lang="en-US" sz="1400" dirty="0"/>
           </a:p>
         </p:txBody>
       </p:sp>
@@ -6659,14 +6642,14 @@
           <a:ln/>
         </p:spPr>
         <p:txBody>
-          <a:bodyPr wrap="square" lIns="0" tIns="0" rIns="0" bIns="0" rtlCol="0" anchor="ctr"/>
-          <a:lstStyle/>
-          <a:p>
-            <a:pPr indent="0" marL="0">
-              <a:buNone/>
-            </a:pPr>
-            <a:r>
-              <a:rPr lang="en-US" sz="800" dirty="0">
+          <a:bodyPr wrap="square" lIns="0" tIns="0" rIns="0" bIns="0" rtlCol="0" anchor="t"/>
+          <a:lstStyle/>
+          <a:p>
+            <a:pPr indent="0" marL="0">
+              <a:buNone/>
+            </a:pPr>
+            <a:r>
+              <a:rPr lang="en-US" sz="1400" dirty="0">
                 <a:solidFill>
                   <a:srgbClr val="FBF5E6"/>
                 </a:solidFill>
@@ -6676,7 +6659,7 @@
               </a:rPr>
               <a:t>Machaut 成為 Reims 主教座堂參事</a:t>
             </a:r>
-            <a:endParaRPr lang="en-US" sz="800" dirty="0"/>
+            <a:endParaRPr lang="en-US" sz="1400" dirty="0"/>
           </a:p>
         </p:txBody>
       </p:sp>
@@ -6718,14 +6701,14 @@
           <a:ln/>
         </p:spPr>
         <p:txBody>
-          <a:bodyPr wrap="square" lIns="0" tIns="0" rIns="0" bIns="0" rtlCol="0" anchor="ctr"/>
+          <a:bodyPr wrap="square" lIns="0" tIns="0" rIns="0" bIns="0" rtlCol="0" anchor="t"/>
           <a:lstStyle/>
           <a:p>
             <a:pPr algn="r" indent="0" marL="0">
               <a:buNone/>
             </a:pPr>
             <a:r>
-              <a:rPr lang="en-US" sz="800" dirty="0">
+              <a:rPr lang="en-US" sz="1400" dirty="0">
                 <a:solidFill>
                   <a:srgbClr val="E8D8A8"/>
                 </a:solidFill>
@@ -6735,7 +6718,7 @@
               </a:rPr>
               <a:t>1347–50</a:t>
             </a:r>
-            <a:endParaRPr lang="en-US" sz="800" dirty="0"/>
+            <a:endParaRPr lang="en-US" sz="1400" dirty="0"/>
           </a:p>
         </p:txBody>
       </p:sp>
@@ -6757,14 +6740,14 @@
           <a:ln/>
         </p:spPr>
         <p:txBody>
-          <a:bodyPr wrap="square" lIns="0" tIns="0" rIns="0" bIns="0" rtlCol="0" anchor="ctr"/>
-          <a:lstStyle/>
-          <a:p>
-            <a:pPr indent="0" marL="0">
-              <a:buNone/>
-            </a:pPr>
-            <a:r>
-              <a:rPr lang="en-US" sz="800" dirty="0">
+          <a:bodyPr wrap="square" lIns="0" tIns="0" rIns="0" bIns="0" rtlCol="0" anchor="t"/>
+          <a:lstStyle/>
+          <a:p>
+            <a:pPr indent="0" marL="0">
+              <a:buNone/>
+            </a:pPr>
+            <a:r>
+              <a:rPr lang="en-US" sz="1400" dirty="0">
                 <a:solidFill>
                   <a:srgbClr val="FBF5E6"/>
                 </a:solidFill>
@@ -6774,7 +6757,7 @@
               </a:rPr>
               <a:t>黑死病 · Black Death 殺死歐洲 1/3 人口</a:t>
             </a:r>
-            <a:endParaRPr lang="en-US" sz="800" dirty="0"/>
+            <a:endParaRPr lang="en-US" sz="1400" dirty="0"/>
           </a:p>
         </p:txBody>
       </p:sp>
@@ -6816,14 +6799,14 @@
           <a:ln/>
         </p:spPr>
         <p:txBody>
-          <a:bodyPr wrap="square" lIns="0" tIns="0" rIns="0" bIns="0" rtlCol="0" anchor="ctr"/>
+          <a:bodyPr wrap="square" lIns="0" tIns="0" rIns="0" bIns="0" rtlCol="0" anchor="t"/>
           <a:lstStyle/>
           <a:p>
             <a:pPr algn="r" indent="0" marL="0">
               <a:buNone/>
             </a:pPr>
             <a:r>
-              <a:rPr lang="en-US" sz="800" dirty="0">
+              <a:rPr lang="en-US" sz="1400" dirty="0">
                 <a:solidFill>
                   <a:srgbClr val="E8D8A8"/>
                 </a:solidFill>
@@ -6833,7 +6816,7 @@
               </a:rPr>
               <a:t>1348–53</a:t>
             </a:r>
-            <a:endParaRPr lang="en-US" sz="800" dirty="0"/>
+            <a:endParaRPr lang="en-US" sz="1400" dirty="0"/>
           </a:p>
         </p:txBody>
       </p:sp>
@@ -6855,14 +6838,14 @@
           <a:ln/>
         </p:spPr>
         <p:txBody>
-          <a:bodyPr wrap="square" lIns="0" tIns="0" rIns="0" bIns="0" rtlCol="0" anchor="ctr"/>
-          <a:lstStyle/>
-          <a:p>
-            <a:pPr indent="0" marL="0">
-              <a:buNone/>
-            </a:pPr>
-            <a:r>
-              <a:rPr lang="en-US" sz="800" dirty="0">
+          <a:bodyPr wrap="square" lIns="0" tIns="0" rIns="0" bIns="0" rtlCol="0" anchor="t"/>
+          <a:lstStyle/>
+          <a:p>
+            <a:pPr indent="0" marL="0">
+              <a:buNone/>
+            </a:pPr>
+            <a:r>
+              <a:rPr lang="en-US" sz="1400" dirty="0">
                 <a:solidFill>
                   <a:srgbClr val="FBF5E6"/>
                 </a:solidFill>
@@ -6872,7 +6855,7 @@
               </a:rPr>
               <a:t>Boccaccio · Decameron</a:t>
             </a:r>
-            <a:endParaRPr lang="en-US" sz="800" dirty="0"/>
+            <a:endParaRPr lang="en-US" sz="1400" dirty="0"/>
           </a:p>
         </p:txBody>
       </p:sp>
@@ -6914,14 +6897,14 @@
           <a:ln/>
         </p:spPr>
         <p:txBody>
-          <a:bodyPr wrap="square" lIns="0" tIns="0" rIns="0" bIns="0" rtlCol="0" anchor="ctr"/>
+          <a:bodyPr wrap="square" lIns="0" tIns="0" rIns="0" bIns="0" rtlCol="0" anchor="t"/>
           <a:lstStyle/>
           <a:p>
             <a:pPr algn="r" indent="0" marL="0">
               <a:buNone/>
             </a:pPr>
             <a:r>
-              <a:rPr lang="en-US" sz="800" dirty="0">
+              <a:rPr lang="en-US" sz="1400" dirty="0">
                 <a:solidFill>
                   <a:srgbClr val="E8D8A8"/>
                 </a:solidFill>
@@ -6931,7 +6914,7 @@
               </a:rPr>
               <a:t>ca. 1350s</a:t>
             </a:r>
-            <a:endParaRPr lang="en-US" sz="800" dirty="0"/>
+            <a:endParaRPr lang="en-US" sz="1400" dirty="0"/>
           </a:p>
         </p:txBody>
       </p:sp>
@@ -6953,14 +6936,14 @@
           <a:ln/>
         </p:spPr>
         <p:txBody>
-          <a:bodyPr wrap="square" lIns="0" tIns="0" rIns="0" bIns="0" rtlCol="0" anchor="ctr"/>
-          <a:lstStyle/>
-          <a:p>
-            <a:pPr indent="0" marL="0">
-              <a:buNone/>
-            </a:pPr>
-            <a:r>
-              <a:rPr lang="en-US" sz="800" dirty="0">
+          <a:bodyPr wrap="square" lIns="0" tIns="0" rIns="0" bIns="0" rtlCol="0" anchor="t"/>
+          <a:lstStyle/>
+          <a:p>
+            <a:pPr indent="0" marL="0">
+              <a:buNone/>
+            </a:pPr>
+            <a:r>
+              <a:rPr lang="en-US" sz="1400" dirty="0">
                 <a:solidFill>
                   <a:srgbClr val="FBF5E6"/>
                 </a:solidFill>
@@ -6970,7 +6953,7 @@
               </a:rPr>
               <a:t>Jacopo da Bologna · Non al suo amante</a:t>
             </a:r>
-            <a:endParaRPr lang="en-US" sz="800" dirty="0"/>
+            <a:endParaRPr lang="en-US" sz="1400" dirty="0"/>
           </a:p>
         </p:txBody>
       </p:sp>
@@ -7012,14 +6995,14 @@
           <a:ln/>
         </p:spPr>
         <p:txBody>
-          <a:bodyPr wrap="square" lIns="0" tIns="0" rIns="0" bIns="0" rtlCol="0" anchor="ctr"/>
+          <a:bodyPr wrap="square" lIns="0" tIns="0" rIns="0" bIns="0" rtlCol="0" anchor="t"/>
           <a:lstStyle/>
           <a:p>
             <a:pPr algn="r" indent="0" marL="0">
               <a:buNone/>
             </a:pPr>
             <a:r>
-              <a:rPr lang="en-US" sz="800" dirty="0">
+              <a:rPr lang="en-US" sz="1400" dirty="0">
                 <a:solidFill>
                   <a:srgbClr val="E8D8A8"/>
                 </a:solidFill>
@@ -7029,7 +7012,7 @@
               </a:rPr>
               <a:t>ca. 1360s</a:t>
             </a:r>
-            <a:endParaRPr lang="en-US" sz="800" dirty="0"/>
+            <a:endParaRPr lang="en-US" sz="1400" dirty="0"/>
           </a:p>
         </p:txBody>
       </p:sp>
@@ -7051,14 +7034,14 @@
           <a:ln/>
         </p:spPr>
         <p:txBody>
-          <a:bodyPr wrap="square" lIns="0" tIns="0" rIns="0" bIns="0" rtlCol="0" anchor="ctr"/>
-          <a:lstStyle/>
-          <a:p>
-            <a:pPr indent="0" marL="0">
-              <a:buNone/>
-            </a:pPr>
-            <a:r>
-              <a:rPr lang="en-US" sz="800" dirty="0">
+          <a:bodyPr wrap="square" lIns="0" tIns="0" rIns="0" bIns="0" rtlCol="0" anchor="t"/>
+          <a:lstStyle/>
+          <a:p>
+            <a:pPr indent="0" marL="0">
+              <a:buNone/>
+            </a:pPr>
+            <a:r>
+              <a:rPr lang="en-US" sz="1400" dirty="0">
                 <a:solidFill>
                   <a:srgbClr val="FBF5E6"/>
                 </a:solidFill>
@@ -7068,7 +7051,7 @@
               </a:rPr>
               <a:t>Machaut · Messe de Nostre Dame</a:t>
             </a:r>
-            <a:endParaRPr lang="en-US" sz="800" dirty="0"/>
+            <a:endParaRPr lang="en-US" sz="1400" dirty="0"/>
           </a:p>
         </p:txBody>
       </p:sp>
@@ -7110,14 +7093,14 @@
           <a:ln/>
         </p:spPr>
         <p:txBody>
-          <a:bodyPr wrap="square" lIns="0" tIns="0" rIns="0" bIns="0" rtlCol="0" anchor="ctr"/>
+          <a:bodyPr wrap="square" lIns="0" tIns="0" rIns="0" bIns="0" rtlCol="0" anchor="t"/>
           <a:lstStyle/>
           <a:p>
             <a:pPr algn="r" indent="0" marL="0">
               <a:buNone/>
             </a:pPr>
             <a:r>
-              <a:rPr lang="en-US" sz="800" dirty="0">
+              <a:rPr lang="en-US" sz="1400" dirty="0">
                 <a:solidFill>
                   <a:srgbClr val="E8D8A8"/>
                 </a:solidFill>
@@ -7127,7 +7110,7 @@
               </a:rPr>
               <a:t>1365–97</a:t>
             </a:r>
-            <a:endParaRPr lang="en-US" sz="800" dirty="0"/>
+            <a:endParaRPr lang="en-US" sz="1400" dirty="0"/>
           </a:p>
         </p:txBody>
       </p:sp>
@@ -7149,14 +7132,14 @@
           <a:ln/>
         </p:spPr>
         <p:txBody>
-          <a:bodyPr wrap="square" lIns="0" tIns="0" rIns="0" bIns="0" rtlCol="0" anchor="ctr"/>
-          <a:lstStyle/>
-          <a:p>
-            <a:pPr indent="0" marL="0">
-              <a:buNone/>
-            </a:pPr>
-            <a:r>
-              <a:rPr lang="en-US" sz="800" dirty="0">
+          <a:bodyPr wrap="square" lIns="0" tIns="0" rIns="0" bIns="0" rtlCol="0" anchor="t"/>
+          <a:lstStyle/>
+          <a:p>
+            <a:pPr indent="0" marL="0">
+              <a:buNone/>
+            </a:pPr>
+            <a:r>
+              <a:rPr lang="en-US" sz="1400" dirty="0">
                 <a:solidFill>
                   <a:srgbClr val="FBF5E6"/>
                 </a:solidFill>
@@ -7166,7 +7149,7 @@
               </a:rPr>
               <a:t>Francesco Landini 任 San Lorenzo 教堂 chaplain</a:t>
             </a:r>
-            <a:endParaRPr lang="en-US" sz="800" dirty="0"/>
+            <a:endParaRPr lang="en-US" sz="1400" dirty="0"/>
           </a:p>
         </p:txBody>
       </p:sp>
@@ -7208,14 +7191,14 @@
           <a:ln/>
         </p:spPr>
         <p:txBody>
-          <a:bodyPr wrap="square" lIns="0" tIns="0" rIns="0" bIns="0" rtlCol="0" anchor="ctr"/>
+          <a:bodyPr wrap="square" lIns="0" tIns="0" rIns="0" bIns="0" rtlCol="0" anchor="t"/>
           <a:lstStyle/>
           <a:p>
             <a:pPr algn="r" indent="0" marL="0">
               <a:buNone/>
             </a:pPr>
             <a:r>
-              <a:rPr lang="en-US" sz="800" dirty="0">
+              <a:rPr lang="en-US" sz="1400" dirty="0">
                 <a:solidFill>
                   <a:srgbClr val="E8D8A8"/>
                 </a:solidFill>
@@ -7225,7 +7208,7 @@
               </a:rPr>
               <a:t>1378–1417</a:t>
             </a:r>
-            <a:endParaRPr lang="en-US" sz="800" dirty="0"/>
+            <a:endParaRPr lang="en-US" sz="1400" dirty="0"/>
           </a:p>
         </p:txBody>
       </p:sp>
@@ -7247,14 +7230,14 @@
           <a:ln/>
         </p:spPr>
         <p:txBody>
-          <a:bodyPr wrap="square" lIns="0" tIns="0" rIns="0" bIns="0" rtlCol="0" anchor="ctr"/>
-          <a:lstStyle/>
-          <a:p>
-            <a:pPr indent="0" marL="0">
-              <a:buNone/>
-            </a:pPr>
-            <a:r>
-              <a:rPr lang="en-US" sz="800" dirty="0">
+          <a:bodyPr wrap="square" lIns="0" tIns="0" rIns="0" bIns="0" rtlCol="0" anchor="t"/>
+          <a:lstStyle/>
+          <a:p>
+            <a:pPr indent="0" marL="0">
+              <a:buNone/>
+            </a:pPr>
+            <a:r>
+              <a:rPr lang="en-US" sz="1400" dirty="0">
                 <a:solidFill>
                   <a:srgbClr val="FBF5E6"/>
                 </a:solidFill>
@@ -7264,7 +7247,7 @@
               </a:rPr>
               <a:t>教會大分裂 · Great Schism of the Papacy</a:t>
             </a:r>
-            <a:endParaRPr lang="en-US" sz="800" dirty="0"/>
+            <a:endParaRPr lang="en-US" sz="1400" dirty="0"/>
           </a:p>
         </p:txBody>
       </p:sp>
@@ -7306,14 +7289,14 @@
           <a:ln/>
         </p:spPr>
         <p:txBody>
-          <a:bodyPr wrap="square" lIns="0" tIns="0" rIns="0" bIns="0" rtlCol="0" anchor="ctr"/>
+          <a:bodyPr wrap="square" lIns="0" tIns="0" rIns="0" bIns="0" rtlCol="0" anchor="t"/>
           <a:lstStyle/>
           <a:p>
             <a:pPr algn="r" indent="0" marL="0">
               <a:buNone/>
             </a:pPr>
             <a:r>
-              <a:rPr lang="en-US" sz="800" dirty="0">
+              <a:rPr lang="en-US" sz="1400" dirty="0">
                 <a:solidFill>
                   <a:srgbClr val="E8D8A8"/>
                 </a:solidFill>
@@ -7323,7 +7306,7 @@
               </a:rPr>
               <a:t>ca. 1370s</a:t>
             </a:r>
-            <a:endParaRPr lang="en-US" sz="800" dirty="0"/>
+            <a:endParaRPr lang="en-US" sz="1400" dirty="0"/>
           </a:p>
         </p:txBody>
       </p:sp>
@@ -7345,14 +7328,14 @@
           <a:ln/>
         </p:spPr>
         <p:txBody>
-          <a:bodyPr wrap="square" lIns="0" tIns="0" rIns="0" bIns="0" rtlCol="0" anchor="ctr"/>
-          <a:lstStyle/>
-          <a:p>
-            <a:pPr indent="0" marL="0">
-              <a:buNone/>
-            </a:pPr>
-            <a:r>
-              <a:rPr lang="en-US" sz="800" dirty="0">
+          <a:bodyPr wrap="square" lIns="0" tIns="0" rIns="0" bIns="0" rtlCol="0" anchor="t"/>
+          <a:lstStyle/>
+          <a:p>
+            <a:pPr indent="0" marL="0">
+              <a:buNone/>
+            </a:pPr>
+            <a:r>
+              <a:rPr lang="en-US" sz="1400" dirty="0">
                 <a:solidFill>
                   <a:srgbClr val="FBF5E6"/>
                 </a:solidFill>
@@ -7362,7 +7345,7 @@
               </a:rPr>
               <a:t>Philipoctus de Caserta · En remirant vo douce pourtraiture</a:t>
             </a:r>
-            <a:endParaRPr lang="en-US" sz="800" dirty="0"/>
+            <a:endParaRPr lang="en-US" sz="1400" dirty="0"/>
           </a:p>
         </p:txBody>
       </p:sp>
@@ -7404,14 +7387,14 @@
           <a:ln/>
         </p:spPr>
         <p:txBody>
-          <a:bodyPr wrap="square" lIns="0" tIns="0" rIns="0" bIns="0" rtlCol="0" anchor="ctr"/>
+          <a:bodyPr wrap="square" lIns="0" tIns="0" rIns="0" bIns="0" rtlCol="0" anchor="t"/>
           <a:lstStyle/>
           <a:p>
             <a:pPr algn="r" indent="0" marL="0">
               <a:buNone/>
             </a:pPr>
             <a:r>
-              <a:rPr lang="en-US" sz="800" dirty="0">
+              <a:rPr lang="en-US" sz="1400" dirty="0">
                 <a:solidFill>
                   <a:srgbClr val="E8D8A8"/>
                 </a:solidFill>
@@ -7421,7 +7404,7 @@
               </a:rPr>
               <a:t>ca. 1387–1400</a:t>
             </a:r>
-            <a:endParaRPr lang="en-US" sz="800" dirty="0"/>
+            <a:endParaRPr lang="en-US" sz="1400" dirty="0"/>
           </a:p>
         </p:txBody>
       </p:sp>
@@ -7443,14 +7426,14 @@
           <a:ln/>
         </p:spPr>
         <p:txBody>
-          <a:bodyPr wrap="square" lIns="0" tIns="0" rIns="0" bIns="0" rtlCol="0" anchor="ctr"/>
-          <a:lstStyle/>
-          <a:p>
-            <a:pPr indent="0" marL="0">
-              <a:buNone/>
-            </a:pPr>
-            <a:r>
-              <a:rPr lang="en-US" sz="800" dirty="0">
+          <a:bodyPr wrap="square" lIns="0" tIns="0" rIns="0" bIns="0" rtlCol="0" anchor="t"/>
+          <a:lstStyle/>
+          <a:p>
+            <a:pPr indent="0" marL="0">
+              <a:buNone/>
+            </a:pPr>
+            <a:r>
+              <a:rPr lang="en-US" sz="1400" dirty="0">
                 <a:solidFill>
                   <a:srgbClr val="FBF5E6"/>
                 </a:solidFill>
@@ -7460,7 +7443,7 @@
               </a:rPr>
               <a:t>Chaucer · Canterbury Tales</a:t>
             </a:r>
-            <a:endParaRPr lang="en-US" sz="800" dirty="0"/>
+            <a:endParaRPr lang="en-US" sz="1400" dirty="0"/>
           </a:p>
         </p:txBody>
       </p:sp>
@@ -7502,14 +7485,14 @@
           <a:ln/>
         </p:spPr>
         <p:txBody>
-          <a:bodyPr wrap="square" lIns="0" tIns="0" rIns="0" bIns="0" rtlCol="0" anchor="ctr"/>
+          <a:bodyPr wrap="square" lIns="0" tIns="0" rIns="0" bIns="0" rtlCol="0" anchor="t"/>
           <a:lstStyle/>
           <a:p>
             <a:pPr algn="r" indent="0" marL="0">
               <a:buNone/>
             </a:pPr>
             <a:r>
-              <a:rPr lang="en-US" sz="800" dirty="0">
+              <a:rPr lang="en-US" sz="1400" dirty="0">
                 <a:solidFill>
                   <a:srgbClr val="E8D8A8"/>
                 </a:solidFill>
@@ -7519,7 +7502,7 @@
               </a:rPr>
               <a:t>ca. 1410–15</a:t>
             </a:r>
-            <a:endParaRPr lang="en-US" sz="800" dirty="0"/>
+            <a:endParaRPr lang="en-US" sz="1400" dirty="0"/>
           </a:p>
         </p:txBody>
       </p:sp>
@@ -7541,14 +7524,14 @@
           <a:ln/>
         </p:spPr>
         <p:txBody>
-          <a:bodyPr wrap="square" lIns="0" tIns="0" rIns="0" bIns="0" rtlCol="0" anchor="ctr"/>
-          <a:lstStyle/>
-          <a:p>
-            <a:pPr indent="0" marL="0">
-              <a:buNone/>
-            </a:pPr>
-            <a:r>
-              <a:rPr lang="en-US" sz="800" dirty="0">
+          <a:bodyPr wrap="square" lIns="0" tIns="0" rIns="0" bIns="0" rtlCol="0" anchor="t"/>
+          <a:lstStyle/>
+          <a:p>
+            <a:pPr indent="0" marL="0">
+              <a:buNone/>
+            </a:pPr>
+            <a:r>
+              <a:rPr lang="en-US" sz="1400" dirty="0">
                 <a:solidFill>
                   <a:srgbClr val="FBF5E6"/>
                 </a:solidFill>
@@ -7558,7 +7541,7 @@
               </a:rPr>
               <a:t>Squarcialupi Codex 抄本完成</a:t>
             </a:r>
-            <a:endParaRPr lang="en-US" sz="800" dirty="0"/>
+            <a:endParaRPr lang="en-US" sz="1400" dirty="0"/>
           </a:p>
         </p:txBody>
       </p:sp>
@@ -7691,14 +7674,14 @@
           <a:ln/>
         </p:spPr>
         <p:txBody>
-          <a:bodyPr wrap="square" rtlCol="0" anchor="ctr"/>
-          <a:lstStyle/>
-          <a:p>
-            <a:pPr indent="0" marL="0">
-              <a:buNone/>
-            </a:pPr>
-            <a:r>
-              <a:rPr lang="en-US" sz="1200" dirty="0">
+          <a:bodyPr wrap="square" rtlCol="0" anchor="t"/>
+          <a:lstStyle/>
+          <a:p>
+            <a:pPr indent="0" marL="0">
+              <a:buNone/>
+            </a:pPr>
+            <a:r>
+              <a:rPr lang="en-US" sz="1400" dirty="0">
                 <a:solidFill>
                   <a:srgbClr val="5C3A28"/>
                 </a:solidFill>
@@ -7708,7 +7691,7 @@
               </a:rPr>
               <a:t>Chapter Summary · Why This Music Mattered</a:t>
             </a:r>
-            <a:endParaRPr lang="en-US" sz="1200" dirty="0"/>
+            <a:endParaRPr lang="en-US" sz="1400" dirty="0"/>
           </a:p>
         </p:txBody>
       </p:sp>
@@ -7782,7 +7765,7 @@
                   <a:srgbClr val="000000"/>
                 </a:solidFill>
               </a:rPr>
-              <a:t>📐</a:t>
+              <a:t>■</a:t>
             </a:r>
             <a:endParaRPr lang="en-US" sz="1600" dirty="0"/>
           </a:p>
@@ -7806,14 +7789,14 @@
           <a:ln/>
         </p:spPr>
         <p:txBody>
-          <a:bodyPr wrap="square" lIns="0" tIns="0" rIns="0" bIns="0" rtlCol="0" anchor="ctr"/>
-          <a:lstStyle/>
-          <a:p>
-            <a:pPr indent="0" marL="0">
-              <a:buNone/>
-            </a:pPr>
-            <a:r>
-              <a:rPr lang="en-US" sz="1000" dirty="0">
+          <a:bodyPr wrap="square" lIns="0" tIns="0" rIns="0" bIns="0" rtlCol="0" anchor="t"/>
+          <a:lstStyle/>
+          <a:p>
+            <a:pPr indent="0" marL="0">
+              <a:buNone/>
+            </a:pPr>
+            <a:r>
+              <a:rPr lang="en-US" sz="1400" dirty="0">
                 <a:solidFill>
                   <a:srgbClr val="FBF5E6"/>
                 </a:solidFill>
@@ -7823,14 +7806,14 @@
               </a:rPr>
               <a:t>Ars Nova 記譜是現代記譜的直系祖先——首次能精確記下任何節奏，包括切分音</a:t>
             </a:r>
-            <a:endParaRPr lang="en-US" sz="1000" dirty="0"/>
-          </a:p>
-          <a:p>
-            <a:pPr indent="0" marL="0">
-              <a:buNone/>
-            </a:pPr>
-            <a:r>
-              <a:rPr lang="en-US" sz="1000" dirty="0">
+            <a:endParaRPr lang="en-US" sz="1400" dirty="0"/>
+          </a:p>
+          <a:p>
+            <a:pPr indent="0" marL="0">
+              <a:buNone/>
+            </a:pPr>
+            <a:r>
+              <a:rPr lang="en-US" sz="1400" dirty="0">
                 <a:solidFill>
                   <a:srgbClr val="FBF5E6"/>
                 </a:solidFill>
@@ -7840,7 +7823,7 @@
               </a:rPr>
               <a:t>Ars Nova notation is the direct ancestor of modern notation, first able to capture any rhythm</a:t>
             </a:r>
-            <a:endParaRPr lang="en-US" sz="1000" dirty="0"/>
+            <a:endParaRPr lang="en-US" sz="1400" dirty="0"/>
           </a:p>
         </p:txBody>
       </p:sp>
@@ -7894,7 +7877,7 @@
                   <a:srgbClr val="000000"/>
                 </a:solidFill>
               </a:rPr>
-              <a:t>✍</a:t>
+              <a:t>■</a:t>
             </a:r>
             <a:endParaRPr lang="en-US" sz="1600" dirty="0"/>
           </a:p>
@@ -7918,14 +7901,14 @@
           <a:ln/>
         </p:spPr>
         <p:txBody>
-          <a:bodyPr wrap="square" lIns="0" tIns="0" rIns="0" bIns="0" rtlCol="0" anchor="ctr"/>
-          <a:lstStyle/>
-          <a:p>
-            <a:pPr indent="0" marL="0">
-              <a:buNone/>
-            </a:pPr>
-            <a:r>
-              <a:rPr lang="en-US" sz="1000" dirty="0">
+          <a:bodyPr wrap="square" lIns="0" tIns="0" rIns="0" bIns="0" rtlCol="0" anchor="t"/>
+          <a:lstStyle/>
+          <a:p>
+            <a:pPr indent="0" marL="0">
+              <a:buNone/>
+            </a:pPr>
+            <a:r>
+              <a:rPr lang="en-US" sz="1400" dirty="0">
                 <a:solidFill>
                   <a:srgbClr val="FBF5E6"/>
                 </a:solidFill>
@@ -7935,14 +7918,14 @@
               </a:rPr>
               <a:t>精確記譜使作品能獨立流通——催生作曲家的「作者意識」，Machaut 是第一個主動編全集的例子</a:t>
             </a:r>
-            <a:endParaRPr lang="en-US" sz="1000" dirty="0"/>
-          </a:p>
-          <a:p>
-            <a:pPr indent="0" marL="0">
-              <a:buNone/>
-            </a:pPr>
-            <a:r>
-              <a:rPr lang="en-US" sz="1000" dirty="0">
+            <a:endParaRPr lang="en-US" sz="1400" dirty="0"/>
+          </a:p>
+          <a:p>
+            <a:pPr indent="0" marL="0">
+              <a:buNone/>
+            </a:pPr>
+            <a:r>
+              <a:rPr lang="en-US" sz="1400" dirty="0">
                 <a:solidFill>
                   <a:srgbClr val="FBF5E6"/>
                 </a:solidFill>
@@ -7952,7 +7935,7 @@
               </a:rPr>
               <a:t>Accurate notation enabled composers to take pride in authorship, first seen in Machaut</a:t>
             </a:r>
-            <a:endParaRPr lang="en-US" sz="1000" dirty="0"/>
+            <a:endParaRPr lang="en-US" sz="1400" dirty="0"/>
           </a:p>
         </p:txBody>
       </p:sp>
@@ -8006,7 +7989,7 @@
                   <a:srgbClr val="000000"/>
                 </a:solidFill>
               </a:rPr>
-              <a:t>⚖</a:t>
+              <a:t>■</a:t>
             </a:r>
             <a:endParaRPr lang="en-US" sz="1600" dirty="0"/>
           </a:p>
@@ -8030,14 +8013,14 @@
           <a:ln/>
         </p:spPr>
         <p:txBody>
-          <a:bodyPr wrap="square" lIns="0" tIns="0" rIns="0" bIns="0" rtlCol="0" anchor="ctr"/>
-          <a:lstStyle/>
-          <a:p>
-            <a:pPr indent="0" marL="0">
-              <a:buNone/>
-            </a:pPr>
-            <a:r>
-              <a:rPr lang="en-US" sz="1000" dirty="0">
+          <a:bodyPr wrap="square" lIns="0" tIns="0" rIns="0" bIns="0" rtlCol="0" anchor="t"/>
+          <a:lstStyle/>
+          <a:p>
+            <a:pPr indent="0" marL="0">
+              <a:buNone/>
+            </a:pPr>
+            <a:r>
+              <a:rPr lang="en-US" sz="1400" dirty="0">
                 <a:solidFill>
                   <a:srgbClr val="FBF5E6"/>
                 </a:solidFill>
@@ -8047,14 +8030,14 @@
               </a:rPr>
               <a:t>動盪的世紀產出最精緻的藝術——結構（isorhythm、formes fixes）與感官愉悅並重</a:t>
             </a:r>
-            <a:endParaRPr lang="en-US" sz="1000" dirty="0"/>
-          </a:p>
-          <a:p>
-            <a:pPr indent="0" marL="0">
-              <a:buNone/>
-            </a:pPr>
-            <a:r>
-              <a:rPr lang="en-US" sz="1000" dirty="0">
+            <a:endParaRPr lang="en-US" sz="1400" dirty="0"/>
+          </a:p>
+          <a:p>
+            <a:pPr indent="0" marL="0">
+              <a:buNone/>
+            </a:pPr>
+            <a:r>
+              <a:rPr lang="en-US" sz="1400" dirty="0">
                 <a:solidFill>
                   <a:srgbClr val="FBF5E6"/>
                 </a:solidFill>
@@ -8064,7 +8047,7 @@
               </a:rPr>
               <a:t>A turbulent century produced the most refined art: structure and sensory pleasure in balance</a:t>
             </a:r>
-            <a:endParaRPr lang="en-US" sz="1000" dirty="0"/>
+            <a:endParaRPr lang="en-US" sz="1400" dirty="0"/>
           </a:p>
         </p:txBody>
       </p:sp>
@@ -8118,7 +8101,7 @@
                   <a:srgbClr val="000000"/>
                 </a:solidFill>
               </a:rPr>
-              <a:t>🎵</a:t>
+              <a:t>■</a:t>
             </a:r>
             <a:endParaRPr lang="en-US" sz="1600" dirty="0"/>
           </a:p>
@@ -8142,14 +8125,14 @@
           <a:ln/>
         </p:spPr>
         <p:txBody>
-          <a:bodyPr wrap="square" lIns="0" tIns="0" rIns="0" bIns="0" rtlCol="0" anchor="ctr"/>
-          <a:lstStyle/>
-          <a:p>
-            <a:pPr indent="0" marL="0">
-              <a:buNone/>
-            </a:pPr>
-            <a:r>
-              <a:rPr lang="en-US" sz="1000" dirty="0">
+          <a:bodyPr wrap="square" lIns="0" tIns="0" rIns="0" bIns="0" rtlCol="0" anchor="t"/>
+          <a:lstStyle/>
+          <a:p>
+            <a:pPr indent="0" marL="0">
+              <a:buNone/>
+            </a:pPr>
+            <a:r>
+              <a:rPr lang="en-US" sz="1400" dirty="0">
                 <a:solidFill>
                   <a:srgbClr val="FBF5E6"/>
                 </a:solidFill>
@@ -8159,14 +8142,14 @@
               </a:rPr>
               <a:t>三度與六度的甜美與平行五八度的古老並存——14 世紀和聲的獨特聲響</a:t>
             </a:r>
-            <a:endParaRPr lang="en-US" sz="1000" dirty="0"/>
-          </a:p>
-          <a:p>
-            <a:pPr indent="0" marL="0">
-              <a:buNone/>
-            </a:pPr>
-            <a:r>
-              <a:rPr lang="en-US" sz="1000" dirty="0">
+            <a:endParaRPr lang="en-US" sz="1400" dirty="0"/>
+          </a:p>
+          <a:p>
+            <a:pPr indent="0" marL="0">
+              <a:buNone/>
+            </a:pPr>
+            <a:r>
+              <a:rPr lang="en-US" sz="1400" dirty="0">
                 <a:solidFill>
                   <a:srgbClr val="FBF5E6"/>
                 </a:solidFill>
@@ -8176,7 +8159,7 @@
               </a:rPr>
               <a:t>Thirds and sixths coexist with parallel fifths and octaves—a distinctive 14th-century sound</a:t>
             </a:r>
-            <a:endParaRPr lang="en-US" sz="1000" dirty="0"/>
+            <a:endParaRPr lang="en-US" sz="1400" dirty="0"/>
           </a:p>
         </p:txBody>
       </p:sp>
@@ -8230,7 +8213,7 @@
                   <a:srgbClr val="000000"/>
                 </a:solidFill>
               </a:rPr>
-              <a:t>🇫🇷🇮🇹</a:t>
+              <a:t>FRIT</a:t>
             </a:r>
             <a:endParaRPr lang="en-US" sz="1600" dirty="0"/>
           </a:p>
@@ -8254,14 +8237,14 @@
           <a:ln/>
         </p:spPr>
         <p:txBody>
-          <a:bodyPr wrap="square" lIns="0" tIns="0" rIns="0" bIns="0" rtlCol="0" anchor="ctr"/>
-          <a:lstStyle/>
-          <a:p>
-            <a:pPr indent="0" marL="0">
-              <a:buNone/>
-            </a:pPr>
-            <a:r>
-              <a:rPr lang="en-US" sz="1000" dirty="0">
+          <a:bodyPr wrap="square" lIns="0" tIns="0" rIns="0" bIns="0" rtlCol="0" anchor="t"/>
+          <a:lstStyle/>
+          <a:p>
+            <a:pPr indent="0" marL="0">
+              <a:buNone/>
+            </a:pPr>
+            <a:r>
+              <a:rPr lang="en-US" sz="1400" dirty="0">
                 <a:solidFill>
                   <a:srgbClr val="FBF5E6"/>
                 </a:solidFill>
@@ -8271,14 +8254,14 @@
               </a:rPr>
               <a:t>法國理性結構與義大利旋律流暢——為 15 世紀國際風格鋪路</a:t>
             </a:r>
-            <a:endParaRPr lang="en-US" sz="1000" dirty="0"/>
-          </a:p>
-          <a:p>
-            <a:pPr indent="0" marL="0">
-              <a:buNone/>
-            </a:pPr>
-            <a:r>
-              <a:rPr lang="en-US" sz="1000" dirty="0">
+            <a:endParaRPr lang="en-US" sz="1400" dirty="0"/>
+          </a:p>
+          <a:p>
+            <a:pPr indent="0" marL="0">
+              <a:buNone/>
+            </a:pPr>
+            <a:r>
+              <a:rPr lang="en-US" sz="1400" dirty="0">
                 <a:solidFill>
                   <a:srgbClr val="FBF5E6"/>
                 </a:solidFill>
@@ -8288,7 +8271,7 @@
               </a:rPr>
               <a:t>French structure + Italian lyricism foreshadow the 15th-century international style</a:t>
             </a:r>
-            <a:endParaRPr lang="en-US" sz="1000" dirty="0"/>
+            <a:endParaRPr lang="en-US" sz="1400" dirty="0"/>
           </a:p>
         </p:txBody>
       </p:sp>
@@ -8342,7 +8325,7 @@
                   <a:srgbClr val="000000"/>
                 </a:solidFill>
               </a:rPr>
-              <a:t>🎧</a:t>
+              <a:t>■</a:t>
             </a:r>
             <a:endParaRPr lang="en-US" sz="1600" dirty="0"/>
           </a:p>
@@ -8366,14 +8349,14 @@
           <a:ln/>
         </p:spPr>
         <p:txBody>
-          <a:bodyPr wrap="square" lIns="0" tIns="0" rIns="0" bIns="0" rtlCol="0" anchor="ctr"/>
-          <a:lstStyle/>
-          <a:p>
-            <a:pPr indent="0" marL="0">
-              <a:buNone/>
-            </a:pPr>
-            <a:r>
-              <a:rPr lang="en-US" sz="1000" dirty="0">
+          <a:bodyPr wrap="square" lIns="0" tIns="0" rIns="0" bIns="0" rtlCol="0" anchor="t"/>
+          <a:lstStyle/>
+          <a:p>
+            <a:pPr indent="0" marL="0">
+              <a:buNone/>
+            </a:pPr>
+            <a:r>
+              <a:rPr lang="en-US" sz="1400" dirty="0">
                 <a:solidFill>
                   <a:srgbClr val="FBF5E6"/>
                 </a:solidFill>
@@ -8383,14 +8366,14 @@
               </a:rPr>
               <a:t>Messiaen、Ligeti 受 Ars Subtilior 影響；Panda Bear 取樣 Machaut；Landini 進入 Judy Collins 的專輯</a:t>
             </a:r>
-            <a:endParaRPr lang="en-US" sz="1000" dirty="0"/>
-          </a:p>
-          <a:p>
-            <a:pPr indent="0" marL="0">
-              <a:buNone/>
-            </a:pPr>
-            <a:r>
-              <a:rPr lang="en-US" sz="1000" dirty="0">
+            <a:endParaRPr lang="en-US" sz="1400" dirty="0"/>
+          </a:p>
+          <a:p>
+            <a:pPr indent="0" marL="0">
+              <a:buNone/>
+            </a:pPr>
+            <a:r>
+              <a:rPr lang="en-US" sz="1400" dirty="0">
                 <a:solidFill>
                   <a:srgbClr val="FBF5E6"/>
                 </a:solidFill>
@@ -8400,7 +8383,7 @@
               </a:rPr>
               <a:t>Modern echoes: Messiaen, Ligeti, Panda Bear's "I'm Not", Judy Collins's Wildflowers</a:t>
             </a:r>
-            <a:endParaRPr lang="en-US" sz="1000" dirty="0"/>
+            <a:endParaRPr lang="en-US" sz="1400" dirty="0"/>
           </a:p>
         </p:txBody>
       </p:sp>
@@ -8560,8 +8543,8 @@
         </p:nvSpPr>
         <p:spPr>
           <a:xfrm>
-            <a:off x="365760" y="1005840"/>
-            <a:ext cx="3931920" cy="2194560"/>
+            <a:off x="365760" y="960120"/>
+            <a:ext cx="8412480" cy="1874520"/>
           </a:xfrm>
           <a:prstGeom prst="rect">
             <a:avLst/>
@@ -8580,17 +8563,17 @@
         </p:nvSpPr>
         <p:spPr>
           <a:xfrm>
-            <a:off x="502920" y="1069848"/>
-            <a:ext cx="3657600" cy="365760"/>
-          </a:xfrm>
-          <a:prstGeom prst="rect">
-            <a:avLst/>
-          </a:prstGeom>
-          <a:noFill/>
-          <a:ln/>
-        </p:spPr>
-        <p:txBody>
-          <a:bodyPr wrap="square" rtlCol="0" anchor="ctr"/>
+            <a:off x="502920" y="1005840"/>
+            <a:ext cx="8138160" cy="274320"/>
+          </a:xfrm>
+          <a:prstGeom prst="rect">
+            <a:avLst/>
+          </a:prstGeom>
+          <a:noFill/>
+          <a:ln/>
+        </p:spPr>
+        <p:txBody>
+          <a:bodyPr wrap="square" lIns="0" tIns="0" rIns="0" bIns="0" rtlCol="0" anchor="t"/>
           <a:lstStyle/>
           <a:p>
             <a:pPr indent="0" marL="0">
@@ -8605,7 +8588,7 @@
                 <a:ea typeface="Georgia" pitchFamily="34" charset="-122"/>
                 <a:cs typeface="Georgia" pitchFamily="34" charset="-120"/>
               </a:rPr>
-              <a:t>🎧 聆聽 Listen</a:t>
+              <a:t>NAWM 聆聽 YouTube</a:t>
             </a:r>
             <a:endParaRPr lang="en-US" sz="1400" dirty="0"/>
           </a:p>
@@ -8619,28 +8602,24 @@
         </p:nvSpPr>
         <p:spPr>
           <a:xfrm>
-            <a:off x="502920" y="1444752"/>
-            <a:ext cx="3657600" cy="1737360"/>
-          </a:xfrm>
-          <a:prstGeom prst="rect">
-            <a:avLst/>
-          </a:prstGeom>
-          <a:noFill/>
-          <a:ln/>
-        </p:spPr>
-        <p:txBody>
-          <a:bodyPr wrap="square" rtlCol="0" anchor="ctr"/>
-          <a:lstStyle/>
-          <a:p>
-            <a:pPr marL="342900" indent="-342900">
-              <a:spcAft>
-                <a:spcPts val="200"/>
-              </a:spcAft>
-              <a:buSzPct val="100000"/>
-              <a:buChar char="•"/>
-            </a:pPr>
-            <a:r>
-              <a:rPr lang="en-US" sz="850" dirty="0">
+            <a:off x="502920" y="1280160"/>
+            <a:ext cx="8138160" cy="1508760"/>
+          </a:xfrm>
+          <a:prstGeom prst="rect">
+            <a:avLst/>
+          </a:prstGeom>
+          <a:noFill/>
+          <a:ln/>
+        </p:spPr>
+        <p:txBody>
+          <a:bodyPr wrap="square" lIns="0" tIns="0" rIns="0" bIns="0" rtlCol="0" anchor="t"/>
+          <a:lstStyle/>
+          <a:p>
+            <a:pPr indent="0" marL="0">
+              <a:buNone/>
+            </a:pPr>
+            <a:r>
+              <a:rPr lang="en-US" sz="1400" dirty="0">
                 <a:solidFill>
                   <a:srgbClr val="E8D8A8"/>
                 </a:solidFill>
@@ -8648,20 +8627,16 @@
                 <a:ea typeface="Calibri" pitchFamily="34" charset="-122"/>
                 <a:cs typeface="Calibri" pitchFamily="34" charset="-120"/>
               </a:rPr>
-              <a:t>Vitry — Cum statua / Hugo (NAWM 24)  youtu.be/cS9bdjm0hN0</a:t>
-            </a:r>
-            <a:endParaRPr lang="en-US" sz="850" dirty="0"/>
-          </a:p>
-          <a:p>
-            <a:pPr marL="342900" indent="-342900">
-              <a:spcAft>
-                <a:spcPts val="200"/>
-              </a:spcAft>
-              <a:buSzPct val="100000"/>
-              <a:buChar char="•"/>
-            </a:pPr>
-            <a:r>
-              <a:rPr lang="en-US" sz="850" dirty="0">
+              <a:t>24 Vitry · Cum statua/Hugo  youtu.be/cS9bdjm0hN0</a:t>
+            </a:r>
+            <a:endParaRPr lang="en-US" sz="1400" dirty="0"/>
+          </a:p>
+          <a:p>
+            <a:pPr indent="0" marL="0">
+              <a:buNone/>
+            </a:pPr>
+            <a:r>
+              <a:rPr lang="en-US" sz="1400" dirty="0">
                 <a:solidFill>
                   <a:srgbClr val="E8D8A8"/>
                 </a:solidFill>
@@ -8669,20 +8644,16 @@
                 <a:ea typeface="Calibri" pitchFamily="34" charset="-122"/>
                 <a:cs typeface="Calibri" pitchFamily="34" charset="-120"/>
               </a:rPr>
-              <a:t>Machaut — Messe: Kyrie (NAWM 25a)  youtu.be/JtFMfmG5VlY</a:t>
-            </a:r>
-            <a:endParaRPr lang="en-US" sz="850" dirty="0"/>
-          </a:p>
-          <a:p>
-            <a:pPr marL="342900" indent="-342900">
-              <a:spcAft>
-                <a:spcPts val="200"/>
-              </a:spcAft>
-              <a:buSzPct val="100000"/>
-              <a:buChar char="•"/>
-            </a:pPr>
-            <a:r>
-              <a:rPr lang="en-US" sz="850" dirty="0">
+              <a:t>25a Machaut · Messe Kyrie  youtu.be/JtFMfmG5VlY</a:t>
+            </a:r>
+            <a:endParaRPr lang="en-US" sz="1400" dirty="0"/>
+          </a:p>
+          <a:p>
+            <a:pPr indent="0" marL="0">
+              <a:buNone/>
+            </a:pPr>
+            <a:r>
+              <a:rPr lang="en-US" sz="1400" dirty="0">
                 <a:solidFill>
                   <a:srgbClr val="E8D8A8"/>
                 </a:solidFill>
@@ -8690,20 +8661,16 @@
                 <a:ea typeface="Calibri" pitchFamily="34" charset="-122"/>
                 <a:cs typeface="Calibri" pitchFamily="34" charset="-120"/>
               </a:rPr>
-              <a:t>Machaut — Messe: Gloria (NAWM 25b)  youtu.be/RCyvt86_2Ko</a:t>
-            </a:r>
-            <a:endParaRPr lang="en-US" sz="850" dirty="0"/>
-          </a:p>
-          <a:p>
-            <a:pPr marL="342900" indent="-342900">
-              <a:spcAft>
-                <a:spcPts val="200"/>
-              </a:spcAft>
-              <a:buSzPct val="100000"/>
-              <a:buChar char="•"/>
-            </a:pPr>
-            <a:r>
-              <a:rPr lang="en-US" sz="850" dirty="0">
+              <a:t>26 Machaut · Douce dame jolie  youtu.be/pSjXxAOkSM8</a:t>
+            </a:r>
+            <a:endParaRPr lang="en-US" sz="1400" dirty="0"/>
+          </a:p>
+          <a:p>
+            <a:pPr indent="0" marL="0">
+              <a:buNone/>
+            </a:pPr>
+            <a:r>
+              <a:rPr lang="en-US" sz="1400" dirty="0">
                 <a:solidFill>
                   <a:srgbClr val="E8D8A8"/>
                 </a:solidFill>
@@ -8711,20 +8678,16 @@
                 <a:ea typeface="Calibri" pitchFamily="34" charset="-122"/>
                 <a:cs typeface="Calibri" pitchFamily="34" charset="-120"/>
               </a:rPr>
-              <a:t>Machaut — Douce dame jolie (NAWM 26)  youtu.be/pSjXxAOkSM8</a:t>
-            </a:r>
-            <a:endParaRPr lang="en-US" sz="850" dirty="0"/>
-          </a:p>
-          <a:p>
-            <a:pPr marL="342900" indent="-342900">
-              <a:spcAft>
-                <a:spcPts val="200"/>
-              </a:spcAft>
-              <a:buSzPct val="100000"/>
-              <a:buChar char="•"/>
-            </a:pPr>
-            <a:r>
-              <a:rPr lang="en-US" sz="850" dirty="0">
+              <a:t>27 Machaut · Rose, liz  youtu.be/VYY1WO6FimA</a:t>
+            </a:r>
+            <a:endParaRPr lang="en-US" sz="1400" dirty="0"/>
+          </a:p>
+          <a:p>
+            <a:pPr indent="0" marL="0">
+              <a:buNone/>
+            </a:pPr>
+            <a:r>
+              <a:rPr lang="en-US" sz="1400" dirty="0">
                 <a:solidFill>
                   <a:srgbClr val="E8D8A8"/>
                 </a:solidFill>
@@ -8732,20 +8695,16 @@
                 <a:ea typeface="Calibri" pitchFamily="34" charset="-122"/>
                 <a:cs typeface="Calibri" pitchFamily="34" charset="-120"/>
               </a:rPr>
-              <a:t>Machaut — Rose, liz, printemps (NAWM 27)  youtu.be/VYY1WO6FimA</a:t>
-            </a:r>
-            <a:endParaRPr lang="en-US" sz="850" dirty="0"/>
-          </a:p>
-          <a:p>
-            <a:pPr marL="342900" indent="-342900">
-              <a:spcAft>
-                <a:spcPts val="200"/>
-              </a:spcAft>
-              <a:buSzPct val="100000"/>
-              <a:buChar char="•"/>
-            </a:pPr>
-            <a:r>
-              <a:rPr lang="en-US" sz="850" dirty="0">
+              <a:t>28 Caserta · En remirant  youtu.be/_LziNn1jpf0</a:t>
+            </a:r>
+            <a:endParaRPr lang="en-US" sz="1400" dirty="0"/>
+          </a:p>
+          <a:p>
+            <a:pPr indent="0" marL="0">
+              <a:buNone/>
+            </a:pPr>
+            <a:r>
+              <a:rPr lang="en-US" sz="1400" dirty="0">
                 <a:solidFill>
                   <a:srgbClr val="E8D8A8"/>
                 </a:solidFill>
@@ -8753,72 +8712,9 @@
                 <a:ea typeface="Calibri" pitchFamily="34" charset="-122"/>
                 <a:cs typeface="Calibri" pitchFamily="34" charset="-120"/>
               </a:rPr>
-              <a:t>Caserta — En remirant (NAWM 28)  youtu.be/_LziNn1jpf0</a:t>
-            </a:r>
-            <a:endParaRPr lang="en-US" sz="850" dirty="0"/>
-          </a:p>
-          <a:p>
-            <a:pPr marL="342900" indent="-342900">
-              <a:spcAft>
-                <a:spcPts val="200"/>
-              </a:spcAft>
-              <a:buSzPct val="100000"/>
-              <a:buChar char="•"/>
-            </a:pPr>
-            <a:r>
-              <a:rPr lang="en-US" sz="850" dirty="0">
-                <a:solidFill>
-                  <a:srgbClr val="E8D8A8"/>
-                </a:solidFill>
-                <a:latin typeface="Calibri" pitchFamily="34" charset="0"/>
-                <a:ea typeface="Calibri" pitchFamily="34" charset="-122"/>
-                <a:cs typeface="Calibri" pitchFamily="34" charset="-120"/>
-              </a:rPr>
-              <a:t>Jacopo — Non al suo amante (NAWM 29)  youtu.be/SqDSGNZmtUw</a:t>
-            </a:r>
-            <a:endParaRPr lang="en-US" sz="850" dirty="0"/>
-          </a:p>
-          <a:p>
-            <a:pPr marL="342900" indent="-342900">
-              <a:spcAft>
-                <a:spcPts val="200"/>
-              </a:spcAft>
-              <a:buSzPct val="100000"/>
-              <a:buChar char="•"/>
-            </a:pPr>
-            <a:r>
-              <a:rPr lang="en-US" sz="850" dirty="0">
-                <a:solidFill>
-                  <a:srgbClr val="E8D8A8"/>
-                </a:solidFill>
-                <a:latin typeface="Calibri" pitchFamily="34" charset="0"/>
-                <a:ea typeface="Calibri" pitchFamily="34" charset="-122"/>
-                <a:cs typeface="Calibri" pitchFamily="34" charset="-120"/>
-              </a:rPr>
-              <a:t>Landini — Così pensoso (NAWM 30)  youtu.be/eB0QXbTsB4U</a:t>
-            </a:r>
-            <a:endParaRPr lang="en-US" sz="850" dirty="0"/>
-          </a:p>
-          <a:p>
-            <a:pPr marL="342900" indent="-342900">
-              <a:spcAft>
-                <a:spcPts val="200"/>
-              </a:spcAft>
-              <a:buSzPct val="100000"/>
-              <a:buChar char="•"/>
-            </a:pPr>
-            <a:r>
-              <a:rPr lang="en-US" sz="850" dirty="0">
-                <a:solidFill>
-                  <a:srgbClr val="E8D8A8"/>
-                </a:solidFill>
-                <a:latin typeface="Calibri" pitchFamily="34" charset="0"/>
-                <a:ea typeface="Calibri" pitchFamily="34" charset="-122"/>
-                <a:cs typeface="Calibri" pitchFamily="34" charset="-120"/>
-              </a:rPr>
-              <a:t>Landini — Non avrà ma' pietà (NAWM 31)  youtu.be/TXpgPLW_6IQ</a:t>
-            </a:r>
-            <a:endParaRPr lang="en-US" sz="850" dirty="0"/>
+              <a:t>29-31 Jacopo · Landini  youtu.be/eB0QXbTsB4U</a:t>
+            </a:r>
+            <a:endParaRPr lang="en-US" sz="1400" dirty="0"/>
           </a:p>
         </p:txBody>
       </p:sp>
@@ -8830,8 +8726,8 @@
         </p:nvSpPr>
         <p:spPr>
           <a:xfrm>
-            <a:off x="4480560" y="1005840"/>
-            <a:ext cx="4297680" cy="2194560"/>
+            <a:off x="365760" y="2926080"/>
+            <a:ext cx="8412480" cy="1097280"/>
           </a:xfrm>
           <a:prstGeom prst="rect">
             <a:avLst/>
@@ -8850,17 +8746,17 @@
         </p:nvSpPr>
         <p:spPr>
           <a:xfrm>
-            <a:off x="4617720" y="1069848"/>
-            <a:ext cx="4023360" cy="365760"/>
-          </a:xfrm>
-          <a:prstGeom prst="rect">
-            <a:avLst/>
-          </a:prstGeom>
-          <a:noFill/>
-          <a:ln/>
-        </p:spPr>
-        <p:txBody>
-          <a:bodyPr wrap="square" rtlCol="0" anchor="ctr"/>
+            <a:off x="502920" y="2962656"/>
+            <a:ext cx="8138160" cy="256032"/>
+          </a:xfrm>
+          <a:prstGeom prst="rect">
+            <a:avLst/>
+          </a:prstGeom>
+          <a:noFill/>
+          <a:ln/>
+        </p:spPr>
+        <p:txBody>
+          <a:bodyPr wrap="square" lIns="0" tIns="0" rIns="0" bIns="0" rtlCol="0" anchor="t"/>
           <a:lstStyle/>
           <a:p>
             <a:pPr indent="0" marL="0">
@@ -8875,7 +8771,7 @@
                 <a:ea typeface="Georgia" pitchFamily="34" charset="-122"/>
                 <a:cs typeface="Georgia" pitchFamily="34" charset="-120"/>
               </a:rPr>
-              <a:t>📖 閱讀 Read</a:t>
+              <a:t>閱讀 Read</a:t>
             </a:r>
             <a:endParaRPr lang="en-US" sz="1400" dirty="0"/>
           </a:p>
@@ -8889,28 +8785,25 @@
         </p:nvSpPr>
         <p:spPr>
           <a:xfrm>
-            <a:off x="4617720" y="1444752"/>
-            <a:ext cx="4023360" cy="1737360"/>
-          </a:xfrm>
-          <a:prstGeom prst="rect">
-            <a:avLst/>
-          </a:prstGeom>
-          <a:noFill/>
-          <a:ln/>
-        </p:spPr>
-        <p:txBody>
-          <a:bodyPr wrap="square" rtlCol="0" anchor="ctr"/>
+            <a:off x="502920" y="3236976"/>
+            <a:ext cx="4023360" cy="749808"/>
+          </a:xfrm>
+          <a:prstGeom prst="rect">
+            <a:avLst/>
+          </a:prstGeom>
+          <a:noFill/>
+          <a:ln/>
+        </p:spPr>
+        <p:txBody>
+          <a:bodyPr wrap="square" lIns="0" tIns="0" rIns="0" bIns="0" rtlCol="0" anchor="t"/>
           <a:lstStyle/>
           <a:p>
             <a:pPr marL="342900" indent="-342900">
-              <a:spcAft>
-                <a:spcPts val="200"/>
-              </a:spcAft>
               <a:buSzPct val="100000"/>
               <a:buChar char="•"/>
             </a:pPr>
             <a:r>
-              <a:rPr lang="en-US" sz="900" dirty="0">
+              <a:rPr lang="en-US" sz="1400" dirty="0">
                 <a:solidFill>
                   <a:srgbClr val="E8D8A8"/>
                 </a:solidFill>
@@ -8918,20 +8811,17 @@
                 <a:ea typeface="Calibri" pitchFamily="34" charset="-122"/>
                 <a:cs typeface="Calibri" pitchFamily="34" charset="-120"/>
               </a:rPr>
-              <a:t>Daniel Leech-Wilkinson — The Modern Invention of Medieval Music</a:t>
-            </a:r>
-            <a:endParaRPr lang="en-US" sz="900" dirty="0"/>
+              <a:t>Leech-Wilkinson · Modern Invention</a:t>
+            </a:r>
+            <a:endParaRPr lang="en-US" sz="1400" dirty="0"/>
           </a:p>
           <a:p>
             <a:pPr marL="342900" indent="-342900">
-              <a:spcAft>
-                <a:spcPts val="200"/>
-              </a:spcAft>
               <a:buSzPct val="100000"/>
               <a:buChar char="•"/>
             </a:pPr>
             <a:r>
-              <a:rPr lang="en-US" sz="900" dirty="0">
+              <a:rPr lang="en-US" sz="1400" dirty="0">
                 <a:solidFill>
                   <a:srgbClr val="E8D8A8"/>
                 </a:solidFill>
@@ -8939,20 +8829,17 @@
                 <a:ea typeface="Calibri" pitchFamily="34" charset="-122"/>
                 <a:cs typeface="Calibri" pitchFamily="34" charset="-120"/>
               </a:rPr>
-              <a:t>Anne Walters Robertson — Guillaume de Machaut and Reims</a:t>
-            </a:r>
-            <a:endParaRPr lang="en-US" sz="900" dirty="0"/>
+              <a:t>Robertson · Machaut and Reims</a:t>
+            </a:r>
+            <a:endParaRPr lang="en-US" sz="1400" dirty="0"/>
           </a:p>
           <a:p>
             <a:pPr marL="342900" indent="-342900">
-              <a:spcAft>
-                <a:spcPts val="200"/>
-              </a:spcAft>
               <a:buSzPct val="100000"/>
               <a:buChar char="•"/>
             </a:pPr>
             <a:r>
-              <a:rPr lang="en-US" sz="900" dirty="0">
+              <a:rPr lang="en-US" sz="1400" dirty="0">
                 <a:solidFill>
                   <a:srgbClr val="E8D8A8"/>
                 </a:solidFill>
@@ -8960,20 +8847,39 @@
                 <a:ea typeface="Calibri" pitchFamily="34" charset="-122"/>
                 <a:cs typeface="Calibri" pitchFamily="34" charset="-120"/>
               </a:rPr>
-              <a:t>Elizabeth Eva Leach — Guillaume de Machaut: Secretary, Poet, Musician</a:t>
-            </a:r>
-            <a:endParaRPr lang="en-US" sz="900" dirty="0"/>
-          </a:p>
+              <a:t>Leach · Machaut: Secretary/Poet</a:t>
+            </a:r>
+            <a:endParaRPr lang="en-US" sz="1400" dirty="0"/>
+          </a:p>
+        </p:txBody>
+      </p:sp>
+      <p:sp>
+        <p:nvSpPr>
+          <p:cNvPr id="12" name="Text 10"/>
+          <p:cNvSpPr/>
+          <p:nvPr/>
+        </p:nvSpPr>
+        <p:spPr>
+          <a:xfrm>
+            <a:off x="4617720" y="3236976"/>
+            <a:ext cx="4023360" cy="749808"/>
+          </a:xfrm>
+          <a:prstGeom prst="rect">
+            <a:avLst/>
+          </a:prstGeom>
+          <a:noFill/>
+          <a:ln/>
+        </p:spPr>
+        <p:txBody>
+          <a:bodyPr wrap="square" lIns="0" tIns="0" rIns="0" bIns="0" rtlCol="0" anchor="t"/>
+          <a:lstStyle/>
           <a:p>
             <a:pPr marL="342900" indent="-342900">
-              <a:spcAft>
-                <a:spcPts val="200"/>
-              </a:spcAft>
               <a:buSzPct val="100000"/>
               <a:buChar char="•"/>
             </a:pPr>
             <a:r>
-              <a:rPr lang="en-US" sz="900" dirty="0">
+              <a:rPr lang="en-US" sz="1400" dirty="0">
                 <a:solidFill>
                   <a:srgbClr val="E8D8A8"/>
                 </a:solidFill>
@@ -8981,20 +8887,17 @@
                 <a:ea typeface="Calibri" pitchFamily="34" charset="-122"/>
                 <a:cs typeface="Calibri" pitchFamily="34" charset="-120"/>
               </a:rPr>
-              <a:t>Michael Long — "Musical Tastes in Fourteenth-Century Italy"</a:t>
-            </a:r>
-            <a:endParaRPr lang="en-US" sz="900" dirty="0"/>
+              <a:t>Long · Musical Tastes 14th-C. Italy</a:t>
+            </a:r>
+            <a:endParaRPr lang="en-US" sz="1400" dirty="0"/>
           </a:p>
           <a:p>
             <a:pPr marL="342900" indent="-342900">
-              <a:spcAft>
-                <a:spcPts val="200"/>
-              </a:spcAft>
               <a:buSzPct val="100000"/>
               <a:buChar char="•"/>
             </a:pPr>
             <a:r>
-              <a:rPr lang="en-US" sz="900" dirty="0">
+              <a:rPr lang="en-US" sz="1400" dirty="0">
                 <a:solidFill>
                   <a:srgbClr val="E8D8A8"/>
                 </a:solidFill>
@@ -9002,20 +8905,17 @@
                 <a:ea typeface="Calibri" pitchFamily="34" charset="-122"/>
                 <a:cs typeface="Calibri" pitchFamily="34" charset="-120"/>
               </a:rPr>
-              <a:t>Virginia Newes — "Writing, Reading and Memorizing" (Early Music 18)</a:t>
-            </a:r>
-            <a:endParaRPr lang="en-US" sz="900" dirty="0"/>
+              <a:t>Newes · Writing, Reading, Memorizing</a:t>
+            </a:r>
+            <a:endParaRPr lang="en-US" sz="1400" dirty="0"/>
           </a:p>
           <a:p>
             <a:pPr marL="342900" indent="-342900">
-              <a:spcAft>
-                <a:spcPts val="200"/>
-              </a:spcAft>
               <a:buSzPct val="100000"/>
               <a:buChar char="•"/>
             </a:pPr>
             <a:r>
-              <a:rPr lang="en-US" sz="900" dirty="0">
+              <a:rPr lang="en-US" sz="1400" dirty="0">
                 <a:solidFill>
                   <a:srgbClr val="E8D8A8"/>
                 </a:solidFill>
@@ -9023,22 +8923,22 @@
                 <a:ea typeface="Calibri" pitchFamily="34" charset="-122"/>
                 <a:cs typeface="Calibri" pitchFamily="34" charset="-120"/>
               </a:rPr>
-              <a:t>Wikipedia: Ars Nova · Ars Subtilior · Trecento · Formes fixes</a:t>
-            </a:r>
-            <a:endParaRPr lang="en-US" sz="900" dirty="0"/>
-          </a:p>
-        </p:txBody>
-      </p:sp>
-      <p:sp>
-        <p:nvSpPr>
-          <p:cNvPr id="12" name="Shape 10"/>
-          <p:cNvSpPr/>
-          <p:nvPr/>
-        </p:nvSpPr>
-        <p:spPr>
-          <a:xfrm>
-            <a:off x="365760" y="3310128"/>
-            <a:ext cx="8412480" cy="1572768"/>
+              <a:t>Wikipedia: Ars Nova · Ars Subtilior</a:t>
+            </a:r>
+            <a:endParaRPr lang="en-US" sz="1400" dirty="0"/>
+          </a:p>
+        </p:txBody>
+      </p:sp>
+      <p:sp>
+        <p:nvSpPr>
+          <p:cNvPr id="13" name="Shape 11"/>
+          <p:cNvSpPr/>
+          <p:nvPr/>
+        </p:nvSpPr>
+        <p:spPr>
+          <a:xfrm>
+            <a:off x="365760" y="4114800"/>
+            <a:ext cx="8412480" cy="868680"/>
           </a:xfrm>
           <a:prstGeom prst="rect">
             <a:avLst/>
@@ -9051,23 +8951,23 @@
       </p:sp>
       <p:sp>
         <p:nvSpPr>
-          <p:cNvPr id="13" name="Text 11"/>
-          <p:cNvSpPr/>
-          <p:nvPr/>
-        </p:nvSpPr>
-        <p:spPr>
-          <a:xfrm>
-            <a:off x="548640" y="3374136"/>
-            <a:ext cx="8046720" cy="365760"/>
-          </a:xfrm>
-          <a:prstGeom prst="rect">
-            <a:avLst/>
-          </a:prstGeom>
-          <a:noFill/>
-          <a:ln/>
-        </p:spPr>
-        <p:txBody>
-          <a:bodyPr wrap="square" rtlCol="0" anchor="ctr"/>
+          <p:cNvPr id="14" name="Text 12"/>
+          <p:cNvSpPr/>
+          <p:nvPr/>
+        </p:nvSpPr>
+        <p:spPr>
+          <a:xfrm>
+            <a:off x="502920" y="4151376"/>
+            <a:ext cx="1463040" cy="237744"/>
+          </a:xfrm>
+          <a:prstGeom prst="rect">
+            <a:avLst/>
+          </a:prstGeom>
+          <a:noFill/>
+          <a:ln/>
+        </p:spPr>
+        <p:txBody>
+          <a:bodyPr wrap="square" lIns="0" tIns="0" rIns="0" bIns="0" rtlCol="0" anchor="t"/>
           <a:lstStyle/>
           <a:p>
             <a:pPr indent="0" marL="0">
@@ -9082,38 +8982,38 @@
                 <a:ea typeface="Georgia" pitchFamily="34" charset="-122"/>
                 <a:cs typeface="Georgia" pitchFamily="34" charset="-120"/>
               </a:rPr>
-              <a:t>🔑 本章關鍵術語 Key Terms</a:t>
-            </a:r>
-            <a:endParaRPr lang="en-US" sz="1400" dirty="0"/>
-          </a:p>
-        </p:txBody>
-      </p:sp>
-      <p:sp>
-        <p:nvSpPr>
-          <p:cNvPr id="14" name="Text 12"/>
-          <p:cNvSpPr/>
-          <p:nvPr/>
-        </p:nvSpPr>
-        <p:spPr>
-          <a:xfrm>
-            <a:off x="548640" y="3776472"/>
-            <a:ext cx="8046720" cy="1051560"/>
-          </a:xfrm>
-          <a:prstGeom prst="rect">
-            <a:avLst/>
-          </a:prstGeom>
-          <a:noFill/>
-          <a:ln/>
-        </p:spPr>
-        <p:txBody>
-          <a:bodyPr wrap="square" rtlCol="0" anchor="ctr"/>
-          <a:lstStyle/>
-          <a:p>
-            <a:pPr indent="0" marL="0">
-              <a:buNone/>
-            </a:pPr>
-            <a:r>
-              <a:rPr lang="en-US" sz="850" dirty="0">
+              <a:t>■ Key Terms</a:t>
+            </a:r>
+            <a:endParaRPr lang="en-US" sz="1400" dirty="0"/>
+          </a:p>
+        </p:txBody>
+      </p:sp>
+      <p:sp>
+        <p:nvSpPr>
+          <p:cNvPr id="15" name="Text 13"/>
+          <p:cNvSpPr/>
+          <p:nvPr/>
+        </p:nvSpPr>
+        <p:spPr>
+          <a:xfrm>
+            <a:off x="2011680" y="4151376"/>
+            <a:ext cx="6629400" cy="777240"/>
+          </a:xfrm>
+          <a:prstGeom prst="rect">
+            <a:avLst/>
+          </a:prstGeom>
+          <a:noFill/>
+          <a:ln/>
+        </p:spPr>
+        <p:txBody>
+          <a:bodyPr wrap="square" lIns="0" tIns="0" rIns="0" bIns="0" rtlCol="0" anchor="t"/>
+          <a:lstStyle/>
+          <a:p>
+            <a:pPr indent="0" marL="0">
+              <a:buNone/>
+            </a:pPr>
+            <a:r>
+              <a:rPr lang="en-US" sz="1400" dirty="0">
                 <a:solidFill>
                   <a:srgbClr val="E8D8A8"/>
                 </a:solidFill>
@@ -9121,9 +9021,9 @@
                 <a:ea typeface="Calibri" pitchFamily="34" charset="-122"/>
                 <a:cs typeface="Calibri" pitchFamily="34" charset="-120"/>
               </a:rPr>
-              <a:t>Ars Nova · Ars Antiqua · Philippe de Vitry · Jehan des Murs · Minim · Mode / Time / Prolation · Mensuration sign · Perfect / Imperfect · Syncopation · Isorhythm · Talea · Color · Hocket · Ars Subtilior · Musica ficta · Musica recta · Double leading-tone cadence · Landini cadence · Formes fixes · Ballade · Rondeau · Virelai · Chanson baladée · Chant royal · Lai · Complainte · Treble-dominated style · Cantus / Tenor / Contratenor · Machaut · Messe de Nostre Dame · Roman de Fauvel · Trecento · Madrigal (14th c.) · Ritornello · Caccia · Chace · Ballata · Ripresa / Piedi / Volta · Francesco Landini · Organetto · Squarcialupi Codex · Haut / Bas instruments · Portative / Positive organ</a:t>
-            </a:r>
-            <a:endParaRPr lang="en-US" sz="850" dirty="0"/>
+              <a:t>Ars Nova · Ars Antiqua · Isorhythm · Talea / Color · Hocket · Ars Subtilior · Musica ficta · Landini cadence · Formes fixes · Ballade · Rondeau · Virelai · Machaut · Trecento · Madrigal (14c) · Caccia · Ballata · Landini</a:t>
+            </a:r>
+            <a:endParaRPr lang="en-US" sz="1400" dirty="0"/>
           </a:p>
         </p:txBody>
       </p:sp>
@@ -9308,7 +9208,7 @@
                   <a:srgbClr val="000000"/>
                 </a:solidFill>
               </a:rPr>
-              <a:t>⚔</a:t>
+              <a:t>■</a:t>
             </a:r>
             <a:endParaRPr lang="en-US" sz="2000" dirty="0"/>
           </a:p>
@@ -9371,14 +9271,14 @@
           <a:ln/>
         </p:spPr>
         <p:txBody>
-          <a:bodyPr wrap="square" lIns="0" tIns="0" rIns="0" bIns="0" rtlCol="0" anchor="ctr"/>
-          <a:lstStyle/>
-          <a:p>
-            <a:pPr indent="0" marL="0">
-              <a:buNone/>
-            </a:pPr>
-            <a:r>
-              <a:rPr lang="en-US" sz="1100" dirty="0">
+          <a:bodyPr wrap="square" lIns="0" tIns="0" rIns="0" bIns="0" rtlCol="0" anchor="t"/>
+          <a:lstStyle/>
+          <a:p>
+            <a:pPr indent="0" marL="0">
+              <a:buNone/>
+            </a:pPr>
+            <a:r>
+              <a:rPr lang="en-US" sz="1400" dirty="0">
                 <a:solidFill>
                   <a:srgbClr val="5C3A28"/>
                 </a:solidFill>
@@ -9388,7 +9288,7 @@
               </a:rPr>
               <a:t>黑死病、百年戰爭、亞維農教廷、教會大分裂——動盪中的創造力</a:t>
             </a:r>
-            <a:endParaRPr lang="en-US" sz="1100" dirty="0"/>
+            <a:endParaRPr lang="en-US" sz="1400" dirty="0"/>
           </a:p>
         </p:txBody>
       </p:sp>
@@ -9442,7 +9342,7 @@
                   <a:srgbClr val="000000"/>
                 </a:solidFill>
               </a:rPr>
-              <a:t>📜</a:t>
+              <a:t>■</a:t>
             </a:r>
             <a:endParaRPr lang="en-US" sz="2000" dirty="0"/>
           </a:p>
@@ -9505,14 +9405,14 @@
           <a:ln/>
         </p:spPr>
         <p:txBody>
-          <a:bodyPr wrap="square" lIns="0" tIns="0" rIns="0" bIns="0" rtlCol="0" anchor="ctr"/>
-          <a:lstStyle/>
-          <a:p>
-            <a:pPr indent="0" marL="0">
-              <a:buNone/>
-            </a:pPr>
-            <a:r>
-              <a:rPr lang="en-US" sz="1100" dirty="0">
+          <a:bodyPr wrap="square" lIns="0" tIns="0" rIns="0" bIns="0" rtlCol="0" anchor="t"/>
+          <a:lstStyle/>
+          <a:p>
+            <a:pPr indent="0" marL="0">
+              <a:buNone/>
+            </a:pPr>
+            <a:r>
+              <a:rPr lang="en-US" sz="1400" dirty="0">
                 <a:solidFill>
                   <a:srgbClr val="5C3A28"/>
                 </a:solidFill>
@@ -9522,7 +9422,7 @@
               </a:rPr>
               <a:t>Philippe de Vitry、二等分拍、minim、記譜革命</a:t>
             </a:r>
-            <a:endParaRPr lang="en-US" sz="1100" dirty="0"/>
+            <a:endParaRPr lang="en-US" sz="1400" dirty="0"/>
           </a:p>
         </p:txBody>
       </p:sp>
@@ -9576,7 +9476,7 @@
                   <a:srgbClr val="000000"/>
                 </a:solidFill>
               </a:rPr>
-              <a:t>👑</a:t>
+              <a:t>■</a:t>
             </a:r>
             <a:endParaRPr lang="en-US" sz="2000" dirty="0"/>
           </a:p>
@@ -9639,14 +9539,14 @@
           <a:ln/>
         </p:spPr>
         <p:txBody>
-          <a:bodyPr wrap="square" lIns="0" tIns="0" rIns="0" bIns="0" rtlCol="0" anchor="ctr"/>
-          <a:lstStyle/>
-          <a:p>
-            <a:pPr indent="0" marL="0">
-              <a:buNone/>
-            </a:pPr>
-            <a:r>
-              <a:rPr lang="en-US" sz="1100" dirty="0">
+          <a:bodyPr wrap="square" lIns="0" tIns="0" rIns="0" bIns="0" rtlCol="0" anchor="t"/>
+          <a:lstStyle/>
+          <a:p>
+            <a:pPr indent="0" marL="0">
+              <a:buNone/>
+            </a:pPr>
+            <a:r>
+              <a:rPr lang="en-US" sz="1400" dirty="0">
                 <a:solidFill>
                   <a:srgbClr val="5C3A28"/>
                 </a:solidFill>
@@ -9656,7 +9556,7 @@
               </a:rPr>
               <a:t>詩人兼作曲家 · 140 作品 · Messe de Nostre Dame · formes fixes</a:t>
             </a:r>
-            <a:endParaRPr lang="en-US" sz="1100" dirty="0"/>
+            <a:endParaRPr lang="en-US" sz="1400" dirty="0"/>
           </a:p>
         </p:txBody>
       </p:sp>
@@ -9710,7 +9610,7 @@
                   <a:srgbClr val="000000"/>
                 </a:solidFill>
               </a:rPr>
-              <a:t>🎭</a:t>
+              <a:t>■</a:t>
             </a:r>
             <a:endParaRPr lang="en-US" sz="2000" dirty="0"/>
           </a:p>
@@ -9773,14 +9673,14 @@
           <a:ln/>
         </p:spPr>
         <p:txBody>
-          <a:bodyPr wrap="square" lIns="0" tIns="0" rIns="0" bIns="0" rtlCol="0" anchor="ctr"/>
-          <a:lstStyle/>
-          <a:p>
-            <a:pPr indent="0" marL="0">
-              <a:buNone/>
-            </a:pPr>
-            <a:r>
-              <a:rPr lang="en-US" sz="1100" dirty="0">
+          <a:bodyPr wrap="square" lIns="0" tIns="0" rIns="0" bIns="0" rtlCol="0" anchor="t"/>
+          <a:lstStyle/>
+          <a:p>
+            <a:pPr indent="0" marL="0">
+              <a:buNone/>
+            </a:pPr>
+            <a:r>
+              <a:rPr lang="en-US" sz="1400" dirty="0">
                 <a:solidFill>
                   <a:srgbClr val="5C3A28"/>
                 </a:solidFill>
@@ -9790,7 +9690,7 @@
               </a:rPr>
               <a:t>巴比倫式的節奏與記譜複雜——亞維農與義大利北部的極致風格</a:t>
             </a:r>
-            <a:endParaRPr lang="en-US" sz="1100" dirty="0"/>
+            <a:endParaRPr lang="en-US" sz="1400" dirty="0"/>
           </a:p>
         </p:txBody>
       </p:sp>
@@ -9844,7 +9744,7 @@
                   <a:srgbClr val="000000"/>
                 </a:solidFill>
               </a:rPr>
-              <a:t>🇮🇹</a:t>
+              <a:t>IT</a:t>
             </a:r>
             <a:endParaRPr lang="en-US" sz="2000" dirty="0"/>
           </a:p>
@@ -9907,14 +9807,14 @@
           <a:ln/>
         </p:spPr>
         <p:txBody>
-          <a:bodyPr wrap="square" lIns="0" tIns="0" rIns="0" bIns="0" rtlCol="0" anchor="ctr"/>
-          <a:lstStyle/>
-          <a:p>
-            <a:pPr indent="0" marL="0">
-              <a:buNone/>
-            </a:pPr>
-            <a:r>
-              <a:rPr lang="en-US" sz="1100" dirty="0">
+          <a:bodyPr wrap="square" lIns="0" tIns="0" rIns="0" bIns="0" rtlCol="0" anchor="t"/>
+          <a:lstStyle/>
+          <a:p>
+            <a:pPr indent="0" marL="0">
+              <a:buNone/>
+            </a:pPr>
+            <a:r>
+              <a:rPr lang="en-US" sz="1400" dirty="0">
                 <a:solidFill>
                   <a:srgbClr val="5C3A28"/>
                 </a:solidFill>
@@ -9924,7 +9824,7 @@
               </a:rPr>
               <a:t>Madrigal · Caccia · Ballata · Francesco Landini · Squarcialupi Codex</a:t>
             </a:r>
-            <a:endParaRPr lang="en-US" sz="1100" dirty="0"/>
+            <a:endParaRPr lang="en-US" sz="1400" dirty="0"/>
           </a:p>
         </p:txBody>
       </p:sp>
@@ -9978,7 +9878,7 @@
                   <a:srgbClr val="000000"/>
                 </a:solidFill>
               </a:rPr>
-              <a:t>🎼</a:t>
+              <a:t>■</a:t>
             </a:r>
             <a:endParaRPr lang="en-US" sz="2000" dirty="0"/>
           </a:p>
@@ -10041,14 +9941,14 @@
           <a:ln/>
         </p:spPr>
         <p:txBody>
-          <a:bodyPr wrap="square" lIns="0" tIns="0" rIns="0" bIns="0" rtlCol="0" anchor="ctr"/>
-          <a:lstStyle/>
-          <a:p>
-            <a:pPr indent="0" marL="0">
-              <a:buNone/>
-            </a:pPr>
-            <a:r>
-              <a:rPr lang="en-US" sz="1100" dirty="0">
+          <a:bodyPr wrap="square" lIns="0" tIns="0" rIns="0" bIns="0" rtlCol="0" anchor="t"/>
+          <a:lstStyle/>
+          <a:p>
+            <a:pPr indent="0" marL="0">
+              <a:buNone/>
+            </a:pPr>
+            <a:r>
+              <a:rPr lang="en-US" sz="1400" dirty="0">
                 <a:solidFill>
                   <a:srgbClr val="5C3A28"/>
                 </a:solidFill>
@@ -10058,7 +9958,7 @@
               </a:rPr>
               <a:t>Musica ficta · 高低樂器 · Ars Nova 記譜是現代記譜的直系祖先</a:t>
             </a:r>
-            <a:endParaRPr lang="en-US" sz="1100" dirty="0"/>
+            <a:endParaRPr lang="en-US" sz="1400" dirty="0"/>
           </a:p>
         </p:txBody>
       </p:sp>
@@ -10198,7 +10098,7 @@
               <a:buNone/>
             </a:pPr>
             <a:r>
-              <a:rPr lang="en-US" sz="1300" dirty="0">
+              <a:rPr lang="en-US" sz="1400" dirty="0">
                 <a:solidFill>
                   <a:srgbClr val="E8D8A8"/>
                 </a:solidFill>
@@ -10208,7 +10108,7 @@
               </a:rPr>
               <a:t>Europe in the Fourteenth Century · Disruption and Creativity</a:t>
             </a:r>
-            <a:endParaRPr lang="en-US" sz="1300" dirty="0"/>
+            <a:endParaRPr lang="en-US" sz="1400" dirty="0"/>
           </a:p>
         </p:txBody>
       </p:sp>
@@ -10277,7 +10177,7 @@
               <a:buNone/>
             </a:pPr>
             <a:r>
-              <a:rPr lang="en-US" sz="1300" b="1" dirty="0">
+              <a:rPr lang="en-US" sz="1400" b="1" dirty="0">
                 <a:solidFill>
                   <a:srgbClr val="C8A020"/>
                 </a:solidFill>
@@ -10285,9 +10185,9 @@
                 <a:ea typeface="Georgia" pitchFamily="34" charset="-122"/>
                 <a:cs typeface="Georgia" pitchFamily="34" charset="-120"/>
               </a:rPr>
-              <a:t>💀 災難的世紀 A Century of Calamity</a:t>
-            </a:r>
-            <a:endParaRPr lang="en-US" sz="1300" dirty="0"/>
+              <a:t>■ 災難的世紀 A Century of Calamity</a:t>
+            </a:r>
+            <a:endParaRPr lang="en-US" sz="1400" dirty="0"/>
           </a:p>
         </p:txBody>
       </p:sp>
@@ -10309,14 +10209,14 @@
           <a:ln/>
         </p:spPr>
         <p:txBody>
-          <a:bodyPr wrap="square" rtlCol="0" anchor="ctr"/>
-          <a:lstStyle/>
-          <a:p>
-            <a:pPr indent="0" marL="0">
-              <a:buNone/>
-            </a:pPr>
-            <a:r>
-              <a:rPr lang="en-US" sz="1000" dirty="0">
+          <a:bodyPr wrap="square" rtlCol="0" anchor="t"/>
+          <a:lstStyle/>
+          <a:p>
+            <a:pPr indent="0" marL="0">
+              <a:buNone/>
+            </a:pPr>
+            <a:r>
+              <a:rPr lang="en-US" sz="1400" dirty="0">
                 <a:solidFill>
                   <a:srgbClr val="E8D8A8"/>
                 </a:solidFill>
@@ -10326,14 +10226,14 @@
               </a:rPr>
               <a:t>• 1315–22 年大饑荒：西北歐洪水造成 1/10 人口喪生</a:t>
             </a:r>
-            <a:endParaRPr lang="en-US" sz="1000" dirty="0"/>
-          </a:p>
-          <a:p>
-            <a:pPr indent="0" marL="0">
-              <a:buNone/>
-            </a:pPr>
-            <a:r>
-              <a:rPr lang="en-US" sz="1000" dirty="0">
+            <a:endParaRPr lang="en-US" sz="1400" dirty="0"/>
+          </a:p>
+          <a:p>
+            <a:pPr indent="0" marL="0">
+              <a:buNone/>
+            </a:pPr>
+            <a:r>
+              <a:rPr lang="en-US" sz="1400" dirty="0">
                 <a:solidFill>
                   <a:srgbClr val="E8D8A8"/>
                 </a:solidFill>
@@ -10343,14 +10243,14 @@
               </a:rPr>
               <a:t>• 1347–50 年黑死病（腺鼠疫+肺鼠疫）橫掃歐洲——三分之一人口死亡</a:t>
             </a:r>
-            <a:endParaRPr lang="en-US" sz="1000" dirty="0"/>
-          </a:p>
-          <a:p>
-            <a:pPr indent="0" marL="0">
-              <a:buNone/>
-            </a:pPr>
-            <a:r>
-              <a:rPr lang="en-US" sz="1000" dirty="0">
+            <a:endParaRPr lang="en-US" sz="1400" dirty="0"/>
+          </a:p>
+          <a:p>
+            <a:pPr indent="0" marL="0">
+              <a:buNone/>
+            </a:pPr>
+            <a:r>
+              <a:rPr lang="en-US" sz="1400" dirty="0">
                 <a:solidFill>
                   <a:srgbClr val="E8D8A8"/>
                 </a:solidFill>
@@ -10360,14 +10260,14 @@
               </a:rPr>
               <a:t>• 1337–1453 英法百年戰爭；各地農民與城市暴動</a:t>
             </a:r>
-            <a:endParaRPr lang="en-US" sz="1000" dirty="0"/>
-          </a:p>
-          <a:p>
-            <a:pPr indent="0" marL="0">
-              <a:buNone/>
-            </a:pPr>
-            <a:r>
-              <a:rPr lang="en-US" sz="1000" dirty="0">
+            <a:endParaRPr lang="en-US" sz="1400" dirty="0"/>
+          </a:p>
+          <a:p>
+            <a:pPr indent="0" marL="0">
+              <a:buNone/>
+            </a:pPr>
+            <a:r>
+              <a:rPr lang="en-US" sz="1400" dirty="0">
                 <a:solidFill>
                   <a:srgbClr val="E8D8A8"/>
                 </a:solidFill>
@@ -10377,14 +10277,14 @@
               </a:rPr>
               <a:t>• 教會危機：1309–77 教宗移駐亞維農（「巴比倫之囚」）· 1378–1417 教會大分裂</a:t>
             </a:r>
-            <a:endParaRPr lang="en-US" sz="1000" dirty="0"/>
-          </a:p>
-          <a:p>
-            <a:pPr indent="0" marL="0">
-              <a:buNone/>
-            </a:pPr>
-            <a:r>
-              <a:rPr lang="en-US" sz="1000" dirty="0">
+            <a:endParaRPr lang="en-US" sz="1400" dirty="0"/>
+          </a:p>
+          <a:p>
+            <a:pPr indent="0" marL="0">
+              <a:buNone/>
+            </a:pPr>
+            <a:r>
+              <a:rPr lang="en-US" sz="1400" dirty="0">
                 <a:solidFill>
                   <a:srgbClr val="E8D8A8"/>
                 </a:solidFill>
@@ -10394,7 +10294,7 @@
               </a:rPr>
               <a:t>• William of Ockham（ca. 1285–1349）主張知識應基於感官經驗——奠定現代科學方法</a:t>
             </a:r>
-            <a:endParaRPr lang="en-US" sz="1000" dirty="0"/>
+            <a:endParaRPr lang="en-US" sz="1400" dirty="0"/>
           </a:p>
         </p:txBody>
       </p:sp>
@@ -10443,7 +10343,7 @@
               <a:buNone/>
             </a:pPr>
             <a:r>
-              <a:rPr lang="en-US" sz="1300" b="1" dirty="0">
+              <a:rPr lang="en-US" sz="1400" b="1" dirty="0">
                 <a:solidFill>
                   <a:srgbClr val="C8A020"/>
                 </a:solidFill>
@@ -10451,9 +10351,9 @@
                 <a:ea typeface="Georgia" pitchFamily="34" charset="-122"/>
                 <a:cs typeface="Georgia" pitchFamily="34" charset="-120"/>
               </a:rPr>
-              <a:t>🎨 文化與技術的躍進 Cultural &amp; Technological Leaps</a:t>
-            </a:r>
-            <a:endParaRPr lang="en-US" sz="1300" dirty="0"/>
+              <a:t>■ 文化與技術的躍進 Cultural &amp; Technological Leaps</a:t>
+            </a:r>
+            <a:endParaRPr lang="en-US" sz="1400" dirty="0"/>
           </a:p>
         </p:txBody>
       </p:sp>
@@ -10475,14 +10375,14 @@
           <a:ln/>
         </p:spPr>
         <p:txBody>
-          <a:bodyPr wrap="square" rtlCol="0" anchor="ctr"/>
-          <a:lstStyle/>
-          <a:p>
-            <a:pPr indent="0" marL="0">
-              <a:buNone/>
-            </a:pPr>
-            <a:r>
-              <a:rPr lang="en-US" sz="1000" dirty="0">
+          <a:bodyPr wrap="square" rtlCol="0" anchor="t"/>
+          <a:lstStyle/>
+          <a:p>
+            <a:pPr indent="0" marL="0">
+              <a:buNone/>
+            </a:pPr>
+            <a:r>
+              <a:rPr lang="en-US" sz="1400" dirty="0">
                 <a:solidFill>
                   <a:srgbClr val="E8D8A8"/>
                 </a:solidFill>
@@ -10492,14 +10392,14 @@
               </a:rPr>
               <a:t>• Giotto（ca. 1266–1337）畫作呈現自然主義與空間深度——繪畫的 Renaissance 先聲</a:t>
             </a:r>
-            <a:endParaRPr lang="en-US" sz="1000" dirty="0"/>
-          </a:p>
-          <a:p>
-            <a:pPr indent="0" marL="0">
-              <a:buNone/>
-            </a:pPr>
-            <a:r>
-              <a:rPr lang="en-US" sz="1000" dirty="0">
+            <a:endParaRPr lang="en-US" sz="1400" dirty="0"/>
+          </a:p>
+          <a:p>
+            <a:pPr indent="0" marL="0">
+              <a:buNone/>
+            </a:pPr>
+            <a:r>
+              <a:rPr lang="en-US" sz="1400" dirty="0">
                 <a:solidFill>
                   <a:srgbClr val="E8D8A8"/>
                 </a:solidFill>
@@ -10509,14 +10409,14 @@
               </a:rPr>
               <a:t>• Dante《神曲》(1307) · Boccaccio《十日談》(1348–53) · Chaucer《坎特伯雷故事集》(ca. 1387–1400)</a:t>
             </a:r>
-            <a:endParaRPr lang="en-US" sz="1000" dirty="0"/>
-          </a:p>
-          <a:p>
-            <a:pPr indent="0" marL="0">
-              <a:buNone/>
-            </a:pPr>
-            <a:r>
-              <a:rPr lang="en-US" sz="1000" dirty="0">
+            <a:endParaRPr lang="en-US" sz="1400" dirty="0"/>
+          </a:p>
+          <a:p>
+            <a:pPr indent="0" marL="0">
+              <a:buNone/>
+            </a:pPr>
+            <a:r>
+              <a:rPr lang="en-US" sz="1400" dirty="0">
                 <a:solidFill>
                   <a:srgbClr val="E8D8A8"/>
                 </a:solidFill>
@@ -10526,14 +10426,14 @@
               </a:rPr>
               <a:t>• 新技術：眼鏡、磁羅盤、機械鐘——時間從教堂鐘聲轉為普世精確度量</a:t>
             </a:r>
-            <a:endParaRPr lang="en-US" sz="1000" dirty="0"/>
-          </a:p>
-          <a:p>
-            <a:pPr indent="0" marL="0">
-              <a:buNone/>
-            </a:pPr>
-            <a:r>
-              <a:rPr lang="en-US" sz="1000" dirty="0">
+            <a:endParaRPr lang="en-US" sz="1400" dirty="0"/>
+          </a:p>
+          <a:p>
+            <a:pPr indent="0" marL="0">
+              <a:buNone/>
+            </a:pPr>
+            <a:r>
+              <a:rPr lang="en-US" sz="1400" dirty="0">
                 <a:solidFill>
                   <a:srgbClr val="E8D8A8"/>
                 </a:solidFill>
@@ -10543,14 +10443,14 @@
               </a:rPr>
               <a:t>• Roman de Fauvel (ca. 1317)：諷刺教會政治的寓言詩，手稿含 169 首音樂作品</a:t>
             </a:r>
-            <a:endParaRPr lang="en-US" sz="1000" dirty="0"/>
-          </a:p>
-          <a:p>
-            <a:pPr indent="0" marL="0">
-              <a:buNone/>
-            </a:pPr>
-            <a:r>
-              <a:rPr lang="en-US" sz="1000" dirty="0">
+            <a:endParaRPr lang="en-US" sz="1400" dirty="0"/>
+          </a:p>
+          <a:p>
+            <a:pPr indent="0" marL="0">
+              <a:buNone/>
+            </a:pPr>
+            <a:r>
+              <a:rPr lang="en-US" sz="1400" dirty="0">
                 <a:solidFill>
                   <a:srgbClr val="E8D8A8"/>
                 </a:solidFill>
@@ -10560,7 +10460,7 @@
               </a:rPr>
               <a:t>  Allegorical poem satirizing church/politics; manuscript contains 169 musical pieces</a:t>
             </a:r>
-            <a:endParaRPr lang="en-US" sz="1000" dirty="0"/>
+            <a:endParaRPr lang="en-US" sz="1400" dirty="0"/>
           </a:p>
         </p:txBody>
       </p:sp>
@@ -10693,14 +10593,14 @@
           <a:ln/>
         </p:spPr>
         <p:txBody>
-          <a:bodyPr wrap="square" rtlCol="0" anchor="ctr"/>
-          <a:lstStyle/>
-          <a:p>
-            <a:pPr indent="0" marL="0">
-              <a:buNone/>
-            </a:pPr>
-            <a:r>
-              <a:rPr lang="en-US" sz="1200" dirty="0">
+          <a:bodyPr wrap="square" rtlCol="0" anchor="t"/>
+          <a:lstStyle/>
+          <a:p>
+            <a:pPr indent="0" marL="0">
+              <a:buNone/>
+            </a:pPr>
+            <a:r>
+              <a:rPr lang="en-US" sz="1400" dirty="0">
                 <a:solidFill>
                   <a:srgbClr val="5C3A28"/>
                 </a:solidFill>
@@ -10710,7 +10610,7 @@
               </a:rPr>
               <a:t>Philippe de Vitry (1291–1361) · A Revolution in Rhythm</a:t>
             </a:r>
-            <a:endParaRPr lang="en-US" sz="1200" dirty="0"/>
+            <a:endParaRPr lang="en-US" sz="1400" dirty="0"/>
           </a:p>
         </p:txBody>
       </p:sp>
@@ -10743,7 +10643,7 @@
         <p:spPr>
           <a:xfrm>
             <a:off x="274320" y="1097280"/>
-            <a:ext cx="4206240" cy="3657600"/>
+            <a:ext cx="4206240" cy="3794760"/>
           </a:xfrm>
           <a:prstGeom prst="rect">
             <a:avLst/>
@@ -10779,7 +10679,7 @@
               <a:buNone/>
             </a:pPr>
             <a:r>
-              <a:rPr lang="en-US" sz="1300" b="1" dirty="0">
+              <a:rPr lang="en-US" sz="1400" b="1" dirty="0">
                 <a:solidFill>
                   <a:srgbClr val="C8A020"/>
                 </a:solidFill>
@@ -10787,9 +10687,9 @@
                 <a:ea typeface="Georgia" pitchFamily="34" charset="-122"/>
                 <a:cs typeface="Georgia" pitchFamily="34" charset="-120"/>
               </a:rPr>
-              <a:t>👤 Philippe de Vitry</a:t>
-            </a:r>
-            <a:endParaRPr lang="en-US" sz="1300" dirty="0"/>
+              <a:t>■ Philippe de Vitry</a:t>
+            </a:r>
+            <a:endParaRPr lang="en-US" sz="1400" dirty="0"/>
           </a:p>
         </p:txBody>
       </p:sp>
@@ -10822,23 +10722,23 @@
         <p:spPr>
           <a:xfrm>
             <a:off x="457200" y="1627632"/>
-            <a:ext cx="3840480" cy="3108960"/>
-          </a:xfrm>
-          <a:prstGeom prst="rect">
-            <a:avLst/>
-          </a:prstGeom>
-          <a:noFill/>
-          <a:ln/>
-        </p:spPr>
-        <p:txBody>
-          <a:bodyPr wrap="square" rtlCol="0" anchor="ctr"/>
-          <a:lstStyle/>
-          <a:p>
-            <a:pPr indent="0" marL="0">
-              <a:buNone/>
-            </a:pPr>
-            <a:r>
-              <a:rPr lang="en-US" sz="1000" dirty="0">
+            <a:ext cx="3840480" cy="3291840"/>
+          </a:xfrm>
+          <a:prstGeom prst="rect">
+            <a:avLst/>
+          </a:prstGeom>
+          <a:noFill/>
+          <a:ln/>
+        </p:spPr>
+        <p:txBody>
+          <a:bodyPr wrap="square" rtlCol="0" anchor="t"/>
+          <a:lstStyle/>
+          <a:p>
+            <a:pPr indent="0" marL="0">
+              <a:buNone/>
+            </a:pPr>
+            <a:r>
+              <a:rPr lang="en-US" sz="1400" dirty="0">
                 <a:solidFill>
                   <a:srgbClr val="FBF5E6"/>
                 </a:solidFill>
@@ -10848,14 +10748,14 @@
               </a:rPr>
               <a:t>• 1291–1361 · 法國作曲家、詩人、教會參事</a:t>
             </a:r>
-            <a:endParaRPr lang="en-US" sz="1000" dirty="0"/>
-          </a:p>
-          <a:p>
-            <a:pPr indent="0" marL="0">
-              <a:buNone/>
-            </a:pPr>
-            <a:r>
-              <a:rPr lang="en-US" sz="1000" dirty="0">
+            <a:endParaRPr lang="en-US" sz="1400" dirty="0"/>
+          </a:p>
+          <a:p>
+            <a:pPr indent="0" marL="0">
+              <a:buNone/>
+            </a:pPr>
+            <a:r>
+              <a:rPr lang="en-US" sz="1400" dirty="0">
                 <a:solidFill>
                   <a:srgbClr val="FBF5E6"/>
                 </a:solidFill>
@@ -10865,20 +10765,20 @@
               </a:rPr>
               <a:t>  隨後成為 Meaux 主教</a:t>
             </a:r>
-            <a:endParaRPr lang="en-US" sz="1000" dirty="0"/>
-          </a:p>
-          <a:p>
-            <a:pPr indent="0" marL="0">
-              <a:buNone/>
-            </a:pPr>
-            <a:endParaRPr lang="en-US" sz="1000" dirty="0"/>
-          </a:p>
-          <a:p>
-            <a:pPr indent="0" marL="0">
-              <a:buNone/>
-            </a:pPr>
-            <a:r>
-              <a:rPr lang="en-US" sz="1000" dirty="0">
+            <a:endParaRPr lang="en-US" sz="1400" dirty="0"/>
+          </a:p>
+          <a:p>
+            <a:pPr indent="0" marL="0">
+              <a:buNone/>
+            </a:pPr>
+            <a:endParaRPr lang="en-US" sz="1400" dirty="0"/>
+          </a:p>
+          <a:p>
+            <a:pPr indent="0" marL="0">
+              <a:buNone/>
+            </a:pPr>
+            <a:r>
+              <a:rPr lang="en-US" sz="1400" dirty="0">
                 <a:solidFill>
                   <a:srgbClr val="FBF5E6"/>
                 </a:solidFill>
@@ -10888,14 +10788,14 @@
               </a:rPr>
               <a:t>• 被稱為「新藝術的發明者」</a:t>
             </a:r>
-            <a:endParaRPr lang="en-US" sz="1000" dirty="0"/>
-          </a:p>
-          <a:p>
-            <a:pPr indent="0" marL="0">
-              <a:buNone/>
-            </a:pPr>
-            <a:r>
-              <a:rPr lang="en-US" sz="1000" dirty="0">
+            <a:endParaRPr lang="en-US" sz="1400" dirty="0"/>
+          </a:p>
+          <a:p>
+            <a:pPr indent="0" marL="0">
+              <a:buNone/>
+            </a:pPr>
+            <a:r>
+              <a:rPr lang="en-US" sz="1400" dirty="0">
                 <a:solidFill>
                   <a:srgbClr val="FBF5E6"/>
                 </a:solidFill>
@@ -10903,16 +10803,22 @@
                 <a:ea typeface="Calibri" pitchFamily="34" charset="-122"/>
                 <a:cs typeface="Calibri" pitchFamily="34" charset="-120"/>
               </a:rPr>
-              <a:t>• 約 1320 年的 Ars nova 論文——</a:t>
-            </a:r>
-            <a:endParaRPr lang="en-US" sz="1000" dirty="0"/>
-          </a:p>
-          <a:p>
-            <a:pPr indent="0" marL="0">
-              <a:buNone/>
-            </a:pPr>
-            <a:r>
-              <a:rPr lang="en-US" sz="1000" dirty="0">
+              <a:t>• 約 1320 年的 Ars nova 論文</a:t>
+            </a:r>
+            <a:endParaRPr lang="en-US" sz="1400" dirty="0"/>
+          </a:p>
+          <a:p>
+            <a:pPr indent="0" marL="0">
+              <a:buNone/>
+            </a:pPr>
+            <a:endParaRPr lang="en-US" sz="1400" dirty="0"/>
+          </a:p>
+          <a:p>
+            <a:pPr indent="0" marL="0">
+              <a:buNone/>
+            </a:pPr>
+            <a:r>
+              <a:rPr lang="en-US" sz="1400" dirty="0">
                 <a:solidFill>
                   <a:srgbClr val="FBF5E6"/>
                 </a:solidFill>
@@ -10920,22 +10826,16 @@
                 <a:ea typeface="Calibri" pitchFamily="34" charset="-122"/>
                 <a:cs typeface="Calibri" pitchFamily="34" charset="-120"/>
               </a:rPr>
-              <a:t>  以其教學為基礎</a:t>
-            </a:r>
-            <a:endParaRPr lang="en-US" sz="1000" dirty="0"/>
-          </a:p>
-          <a:p>
-            <a:pPr indent="0" marL="0">
-              <a:buNone/>
-            </a:pPr>
-            <a:endParaRPr lang="en-US" sz="1000" dirty="0"/>
-          </a:p>
-          <a:p>
-            <a:pPr indent="0" marL="0">
-              <a:buNone/>
-            </a:pPr>
-            <a:r>
-              <a:rPr lang="en-US" sz="1000" dirty="0">
+              <a:t>• 代表作：</a:t>
+            </a:r>
+            <a:endParaRPr lang="en-US" sz="1400" dirty="0"/>
+          </a:p>
+          <a:p>
+            <a:pPr indent="0" marL="0">
+              <a:buNone/>
+            </a:pPr>
+            <a:r>
+              <a:rPr lang="en-US" sz="1400" dirty="0">
                 <a:solidFill>
                   <a:srgbClr val="FBF5E6"/>
                 </a:solidFill>
@@ -10943,16 +10843,16 @@
                 <a:ea typeface="Calibri" pitchFamily="34" charset="-122"/>
                 <a:cs typeface="Calibri" pitchFamily="34" charset="-120"/>
               </a:rPr>
-              <a:t>• 代表作：</a:t>
-            </a:r>
-            <a:endParaRPr lang="en-US" sz="1000" dirty="0"/>
-          </a:p>
-          <a:p>
-            <a:pPr indent="0" marL="0">
-              <a:buNone/>
-            </a:pPr>
-            <a:r>
-              <a:rPr lang="en-US" sz="1000" dirty="0">
+              <a:t>  Cum statua / Hugo, Hugo / Magister</a:t>
+            </a:r>
+            <a:endParaRPr lang="en-US" sz="1400" dirty="0"/>
+          </a:p>
+          <a:p>
+            <a:pPr indent="0" marL="0">
+              <a:buNone/>
+            </a:pPr>
+            <a:r>
+              <a:rPr lang="en-US" sz="1400" dirty="0">
                 <a:solidFill>
                   <a:srgbClr val="FBF5E6"/>
                 </a:solidFill>
@@ -10960,16 +10860,22 @@
                 <a:ea typeface="Calibri" pitchFamily="34" charset="-122"/>
                 <a:cs typeface="Calibri" pitchFamily="34" charset="-120"/>
               </a:rPr>
-              <a:t>  Cum statua / Hugo, Hugo / Magister</a:t>
-            </a:r>
-            <a:endParaRPr lang="en-US" sz="1000" dirty="0"/>
-          </a:p>
-          <a:p>
-            <a:pPr indent="0" marL="0">
-              <a:buNone/>
-            </a:pPr>
-            <a:r>
-              <a:rPr lang="en-US" sz="1000" dirty="0">
+              <a:t>  invidie（NAWM 24）· 三聲部</a:t>
+            </a:r>
+            <a:endParaRPr lang="en-US" sz="1400" dirty="0"/>
+          </a:p>
+          <a:p>
+            <a:pPr indent="0" marL="0">
+              <a:buNone/>
+            </a:pPr>
+            <a:endParaRPr lang="en-US" sz="1400" dirty="0"/>
+          </a:p>
+          <a:p>
+            <a:pPr indent="0" marL="0">
+              <a:buNone/>
+            </a:pPr>
+            <a:r>
+              <a:rPr lang="en-US" sz="1400" dirty="0">
                 <a:solidFill>
                   <a:srgbClr val="FBF5E6"/>
                 </a:solidFill>
@@ -10977,22 +10883,16 @@
                 <a:ea typeface="Calibri" pitchFamily="34" charset="-122"/>
                 <a:cs typeface="Calibri" pitchFamily="34" charset="-120"/>
               </a:rPr>
-              <a:t>  invidie（NAWM 24）· 三聲部</a:t>
-            </a:r>
-            <a:endParaRPr lang="en-US" sz="1000" dirty="0"/>
-          </a:p>
-          <a:p>
-            <a:pPr indent="0" marL="0">
-              <a:buNone/>
-            </a:pPr>
-            <a:endParaRPr lang="en-US" sz="1000" dirty="0"/>
-          </a:p>
-          <a:p>
-            <a:pPr indent="0" marL="0">
-              <a:buNone/>
-            </a:pPr>
-            <a:r>
-              <a:rPr lang="en-US" sz="1000" dirty="0">
+              <a:t>• Ars Nova = 新藝術/新方法</a:t>
+            </a:r>
+            <a:endParaRPr lang="en-US" sz="1400" dirty="0"/>
+          </a:p>
+          <a:p>
+            <a:pPr indent="0" marL="0">
+              <a:buNone/>
+            </a:pPr>
+            <a:r>
+              <a:rPr lang="en-US" sz="1400" dirty="0">
                 <a:solidFill>
                   <a:srgbClr val="FBF5E6"/>
                 </a:solidFill>
@@ -11000,16 +10900,22 @@
                 <a:ea typeface="Calibri" pitchFamily="34" charset="-122"/>
                 <a:cs typeface="Calibri" pitchFamily="34" charset="-120"/>
               </a:rPr>
-              <a:t>• Ars Nova = 新藝術/新方法</a:t>
-            </a:r>
-            <a:endParaRPr lang="en-US" sz="1000" dirty="0"/>
-          </a:p>
-          <a:p>
-            <a:pPr indent="0" marL="0">
-              <a:buNone/>
-            </a:pPr>
-            <a:r>
-              <a:rPr lang="en-US" sz="1000" dirty="0">
+              <a:t>  1310 年代始 · 持續到 1370 年代</a:t>
+            </a:r>
+            <a:endParaRPr lang="en-US" sz="1400" dirty="0"/>
+          </a:p>
+          <a:p>
+            <a:pPr indent="0" marL="0">
+              <a:buNone/>
+            </a:pPr>
+            <a:endParaRPr lang="en-US" sz="1400" dirty="0"/>
+          </a:p>
+          <a:p>
+            <a:pPr indent="0" marL="0">
+              <a:buNone/>
+            </a:pPr>
+            <a:r>
+              <a:rPr lang="en-US" sz="1400" dirty="0">
                 <a:solidFill>
                   <a:srgbClr val="FBF5E6"/>
                 </a:solidFill>
@@ -11017,22 +10923,16 @@
                 <a:ea typeface="Calibri" pitchFamily="34" charset="-122"/>
                 <a:cs typeface="Calibri" pitchFamily="34" charset="-120"/>
               </a:rPr>
-              <a:t>  1310 年代始 · 持續到 1370 年代</a:t>
-            </a:r>
-            <a:endParaRPr lang="en-US" sz="1000" dirty="0"/>
-          </a:p>
-          <a:p>
-            <a:pPr indent="0" marL="0">
-              <a:buNone/>
-            </a:pPr>
-            <a:endParaRPr lang="en-US" sz="1000" dirty="0"/>
-          </a:p>
-          <a:p>
-            <a:pPr indent="0" marL="0">
-              <a:buNone/>
-            </a:pPr>
-            <a:r>
-              <a:rPr lang="en-US" sz="1000" dirty="0">
+              <a:t>• 反對者：Jacobus de Ispania</a:t>
+            </a:r>
+            <a:endParaRPr lang="en-US" sz="1400" dirty="0"/>
+          </a:p>
+          <a:p>
+            <a:pPr indent="0" marL="0">
+              <a:buNone/>
+            </a:pPr>
+            <a:r>
+              <a:rPr lang="en-US" sz="1400" dirty="0">
                 <a:solidFill>
                   <a:srgbClr val="FBF5E6"/>
                 </a:solidFill>
@@ -11040,43 +10940,9 @@
                 <a:ea typeface="Calibri" pitchFamily="34" charset="-122"/>
                 <a:cs typeface="Calibri" pitchFamily="34" charset="-120"/>
               </a:rPr>
-              <a:t>• 反對者：Jacobus de Ispania</a:t>
-            </a:r>
-            <a:endParaRPr lang="en-US" sz="1000" dirty="0"/>
-          </a:p>
-          <a:p>
-            <a:pPr indent="0" marL="0">
-              <a:buNone/>
-            </a:pPr>
-            <a:r>
-              <a:rPr lang="en-US" sz="1000" dirty="0">
-                <a:solidFill>
-                  <a:srgbClr val="FBF5E6"/>
-                </a:solidFill>
-                <a:latin typeface="Calibri" pitchFamily="34" charset="0"/>
-                <a:ea typeface="Calibri" pitchFamily="34" charset="-122"/>
-                <a:cs typeface="Calibri" pitchFamily="34" charset="-120"/>
-              </a:rPr>
               <a:t>  Speculum musicae (ca. 1330)</a:t>
             </a:r>
-            <a:endParaRPr lang="en-US" sz="1000" dirty="0"/>
-          </a:p>
-          <a:p>
-            <a:pPr indent="0" marL="0">
-              <a:buNone/>
-            </a:pPr>
-            <a:r>
-              <a:rPr lang="en-US" sz="1000" dirty="0">
-                <a:solidFill>
-                  <a:srgbClr val="FBF5E6"/>
-                </a:solidFill>
-                <a:latin typeface="Calibri" pitchFamily="34" charset="0"/>
-                <a:ea typeface="Calibri" pitchFamily="34" charset="-122"/>
-                <a:cs typeface="Calibri" pitchFamily="34" charset="-120"/>
-              </a:rPr>
-              <a:t>  擁護舊的「ars antiqua」</a:t>
-            </a:r>
-            <a:endParaRPr lang="en-US" sz="1000" dirty="0"/>
+            <a:endParaRPr lang="en-US" sz="1400" dirty="0"/>
           </a:p>
         </p:txBody>
       </p:sp>
@@ -11089,7 +10955,7 @@
         <p:spPr>
           <a:xfrm>
             <a:off x="4663440" y="1097280"/>
-            <a:ext cx="4206240" cy="3657600"/>
+            <a:ext cx="4206240" cy="3794760"/>
           </a:xfrm>
           <a:prstGeom prst="rect">
             <a:avLst/>
@@ -11125,7 +10991,7 @@
               <a:buNone/>
             </a:pPr>
             <a:r>
-              <a:rPr lang="en-US" sz="1300" b="1" dirty="0">
+              <a:rPr lang="en-US" sz="1400" b="1" dirty="0">
                 <a:solidFill>
                   <a:srgbClr val="C8A020"/>
                 </a:solidFill>
@@ -11133,9 +10999,9 @@
                 <a:ea typeface="Georgia" pitchFamily="34" charset="-122"/>
                 <a:cs typeface="Georgia" pitchFamily="34" charset="-120"/>
               </a:rPr>
-              <a:t>📐 記譜革命 Notation Revolution</a:t>
-            </a:r>
-            <a:endParaRPr lang="en-US" sz="1300" dirty="0"/>
+              <a:t>■ 記譜革命 Notation Revolution</a:t>
+            </a:r>
+            <a:endParaRPr lang="en-US" sz="1400" dirty="0"/>
           </a:p>
         </p:txBody>
       </p:sp>
@@ -11168,23 +11034,23 @@
         <p:spPr>
           <a:xfrm>
             <a:off x="4846320" y="1627632"/>
-            <a:ext cx="3840480" cy="3108960"/>
-          </a:xfrm>
-          <a:prstGeom prst="rect">
-            <a:avLst/>
-          </a:prstGeom>
-          <a:noFill/>
-          <a:ln/>
-        </p:spPr>
-        <p:txBody>
-          <a:bodyPr wrap="square" rtlCol="0" anchor="ctr"/>
-          <a:lstStyle/>
-          <a:p>
-            <a:pPr indent="0" marL="0">
-              <a:buNone/>
-            </a:pPr>
-            <a:r>
-              <a:rPr lang="en-US" sz="900" dirty="0">
+            <a:ext cx="3840480" cy="3291840"/>
+          </a:xfrm>
+          <a:prstGeom prst="rect">
+            <a:avLst/>
+          </a:prstGeom>
+          <a:noFill/>
+          <a:ln/>
+        </p:spPr>
+        <p:txBody>
+          <a:bodyPr wrap="square" rtlCol="0" anchor="t"/>
+          <a:lstStyle/>
+          <a:p>
+            <a:pPr indent="0" marL="0">
+              <a:buNone/>
+            </a:pPr>
+            <a:r>
+              <a:rPr lang="en-US" sz="1400" dirty="0">
                 <a:solidFill>
                   <a:srgbClr val="FBF5E6"/>
                 </a:solidFill>
@@ -11192,16 +11058,16 @@
                 <a:ea typeface="Calibri" pitchFamily="34" charset="-122"/>
                 <a:cs typeface="Calibri" pitchFamily="34" charset="-120"/>
               </a:rPr>
-              <a:t>① 二等分拍子（imperfect）與三等分拍子</a:t>
-            </a:r>
-            <a:endParaRPr lang="en-US" sz="900" dirty="0"/>
-          </a:p>
-          <a:p>
-            <a:pPr indent="0" marL="0">
-              <a:buNone/>
-            </a:pPr>
-            <a:r>
-              <a:rPr lang="en-US" sz="900" dirty="0">
+              <a:t>① 二等分與三等分拍子 equally valid</a:t>
+            </a:r>
+            <a:endParaRPr lang="en-US" sz="1400" dirty="0"/>
+          </a:p>
+          <a:p>
+            <a:pPr indent="0" marL="0">
+              <a:buNone/>
+            </a:pPr>
+            <a:r>
+              <a:rPr lang="en-US" sz="1400" dirty="0">
                 <a:solidFill>
                   <a:srgbClr val="FBF5E6"/>
                 </a:solidFill>
@@ -11209,22 +11075,22 @@
                 <a:ea typeface="Calibri" pitchFamily="34" charset="-122"/>
                 <a:cs typeface="Calibri" pitchFamily="34" charset="-120"/>
               </a:rPr>
-              <a:t>   equally valid——首次可寫下 duple meter</a:t>
-            </a:r>
-            <a:endParaRPr lang="en-US" sz="900" dirty="0"/>
-          </a:p>
-          <a:p>
-            <a:pPr indent="0" marL="0">
-              <a:buNone/>
-            </a:pPr>
-            <a:endParaRPr lang="en-US" sz="900" dirty="0"/>
-          </a:p>
-          <a:p>
-            <a:pPr indent="0" marL="0">
-              <a:buNone/>
-            </a:pPr>
-            <a:r>
-              <a:rPr lang="en-US" sz="900" dirty="0">
+              <a:t>   首次可寫下 duple meter</a:t>
+            </a:r>
+            <a:endParaRPr lang="en-US" sz="1400" dirty="0"/>
+          </a:p>
+          <a:p>
+            <a:pPr indent="0" marL="0">
+              <a:buNone/>
+            </a:pPr>
+            <a:endParaRPr lang="en-US" sz="1400" dirty="0"/>
+          </a:p>
+          <a:p>
+            <a:pPr indent="0" marL="0">
+              <a:buNone/>
+            </a:pPr>
+            <a:r>
+              <a:rPr lang="en-US" sz="1400" dirty="0">
                 <a:solidFill>
                   <a:srgbClr val="FBF5E6"/>
                 </a:solidFill>
@@ -11232,16 +11098,22 @@
                 <a:ea typeface="Calibri" pitchFamily="34" charset="-122"/>
                 <a:cs typeface="Calibri" pitchFamily="34" charset="-120"/>
               </a:rPr>
-              <a:t>② 新的小音符 minim（「最小」）</a:t>
-            </a:r>
-            <a:endParaRPr lang="en-US" sz="900" dirty="0"/>
-          </a:p>
-          <a:p>
-            <a:pPr indent="0" marL="0">
-              <a:buNone/>
-            </a:pPr>
-            <a:r>
-              <a:rPr lang="en-US" sz="900" dirty="0">
+              <a:t>② 新的小音符 minim 將 semibreve 再細分</a:t>
+            </a:r>
+            <a:endParaRPr lang="en-US" sz="1400" dirty="0"/>
+          </a:p>
+          <a:p>
+            <a:pPr indent="0" marL="0">
+              <a:buNone/>
+            </a:pPr>
+            <a:endParaRPr lang="en-US" sz="1400" dirty="0"/>
+          </a:p>
+          <a:p>
+            <a:pPr indent="0" marL="0">
+              <a:buNone/>
+            </a:pPr>
+            <a:r>
+              <a:rPr lang="en-US" sz="1400" dirty="0">
                 <a:solidFill>
                   <a:srgbClr val="FBF5E6"/>
                 </a:solidFill>
@@ -11249,22 +11121,16 @@
                 <a:ea typeface="Calibri" pitchFamily="34" charset="-122"/>
                 <a:cs typeface="Calibri" pitchFamily="34" charset="-120"/>
               </a:rPr>
-              <a:t>   將 semibreve 再細分</a:t>
-            </a:r>
-            <a:endParaRPr lang="en-US" sz="900" dirty="0"/>
-          </a:p>
-          <a:p>
-            <a:pPr indent="0" marL="0">
-              <a:buNone/>
-            </a:pPr>
-            <a:endParaRPr lang="en-US" sz="900" dirty="0"/>
-          </a:p>
-          <a:p>
-            <a:pPr indent="0" marL="0">
-              <a:buNone/>
-            </a:pPr>
-            <a:r>
-              <a:rPr lang="en-US" sz="900" dirty="0">
+              <a:t>③ 時值結構三層：</a:t>
+            </a:r>
+            <a:endParaRPr lang="en-US" sz="1400" dirty="0"/>
+          </a:p>
+          <a:p>
+            <a:pPr indent="0" marL="0">
+              <a:buNone/>
+            </a:pPr>
+            <a:r>
+              <a:rPr lang="en-US" sz="1400" dirty="0">
                 <a:solidFill>
                   <a:srgbClr val="FBF5E6"/>
                 </a:solidFill>
@@ -11272,16 +11138,22 @@
                 <a:ea typeface="Calibri" pitchFamily="34" charset="-122"/>
                 <a:cs typeface="Calibri" pitchFamily="34" charset="-120"/>
               </a:rPr>
-              <a:t>③ 時值結構三層：</a:t>
-            </a:r>
-            <a:endParaRPr lang="en-US" sz="900" dirty="0"/>
-          </a:p>
-          <a:p>
-            <a:pPr indent="0" marL="0">
-              <a:buNone/>
-            </a:pPr>
-            <a:r>
-              <a:rPr lang="en-US" sz="900" dirty="0">
+              <a:t>   mode · time · prolation</a:t>
+            </a:r>
+            <a:endParaRPr lang="en-US" sz="1400" dirty="0"/>
+          </a:p>
+          <a:p>
+            <a:pPr indent="0" marL="0">
+              <a:buNone/>
+            </a:pPr>
+            <a:endParaRPr lang="en-US" sz="1400" dirty="0"/>
+          </a:p>
+          <a:p>
+            <a:pPr indent="0" marL="0">
+              <a:buNone/>
+            </a:pPr>
+            <a:r>
+              <a:rPr lang="en-US" sz="1400" dirty="0">
                 <a:solidFill>
                   <a:srgbClr val="FBF5E6"/>
                 </a:solidFill>
@@ -11289,16 +11161,16 @@
                 <a:ea typeface="Calibri" pitchFamily="34" charset="-122"/>
                 <a:cs typeface="Calibri" pitchFamily="34" charset="-120"/>
               </a:rPr>
-              <a:t>   mode（long 分拍）· time（breve 分拍）</a:t>
-            </a:r>
-            <a:endParaRPr lang="en-US" sz="900" dirty="0"/>
-          </a:p>
-          <a:p>
-            <a:pPr indent="0" marL="0">
-              <a:buNone/>
-            </a:pPr>
-            <a:r>
-              <a:rPr lang="en-US" sz="900" dirty="0">
+              <a:t>④ Mensuration signs（ca. 1340 Jehan</a:t>
+            </a:r>
+            <a:endParaRPr lang="en-US" sz="1400" dirty="0"/>
+          </a:p>
+          <a:p>
+            <a:pPr indent="0" marL="0">
+              <a:buNone/>
+            </a:pPr>
+            <a:r>
+              <a:rPr lang="en-US" sz="1400" dirty="0">
                 <a:solidFill>
                   <a:srgbClr val="FBF5E6"/>
                 </a:solidFill>
@@ -11306,22 +11178,22 @@
                 <a:ea typeface="Calibri" pitchFamily="34" charset="-122"/>
                 <a:cs typeface="Calibri" pitchFamily="34" charset="-120"/>
               </a:rPr>
-              <a:t>   · prolation（semibreve 分拍）</a:t>
-            </a:r>
-            <a:endParaRPr lang="en-US" sz="900" dirty="0"/>
-          </a:p>
-          <a:p>
-            <a:pPr indent="0" marL="0">
-              <a:buNone/>
-            </a:pPr>
-            <a:endParaRPr lang="en-US" sz="900" dirty="0"/>
-          </a:p>
-          <a:p>
-            <a:pPr indent="0" marL="0">
-              <a:buNone/>
-            </a:pPr>
-            <a:r>
-              <a:rPr lang="en-US" sz="900" dirty="0">
+              <a:t>   des Murs）——現代拍號的祖先</a:t>
+            </a:r>
+            <a:endParaRPr lang="en-US" sz="1400" dirty="0"/>
+          </a:p>
+          <a:p>
+            <a:pPr indent="0" marL="0">
+              <a:buNone/>
+            </a:pPr>
+            <a:endParaRPr lang="en-US" sz="1400" dirty="0"/>
+          </a:p>
+          <a:p>
+            <a:pPr indent="0" marL="0">
+              <a:buNone/>
+            </a:pPr>
+            <a:r>
+              <a:rPr lang="en-US" sz="1400" dirty="0">
                 <a:solidFill>
                   <a:srgbClr val="FBF5E6"/>
                 </a:solidFill>
@@ -11329,16 +11201,22 @@
                 <a:ea typeface="Calibri" pitchFamily="34" charset="-122"/>
                 <a:cs typeface="Calibri" pitchFamily="34" charset="-120"/>
               </a:rPr>
-              <a:t>④ Mensuration signs（ca. 1340 Jehan</a:t>
-            </a:r>
-            <a:endParaRPr lang="en-US" sz="900" dirty="0"/>
-          </a:p>
-          <a:p>
-            <a:pPr indent="0" marL="0">
-              <a:buNone/>
-            </a:pPr>
-            <a:r>
-              <a:rPr lang="en-US" sz="900" dirty="0">
+              <a:t>⑤ 首次可寫下 syncopation 切分音</a:t>
+            </a:r>
+            <a:endParaRPr lang="en-US" sz="1400" dirty="0"/>
+          </a:p>
+          <a:p>
+            <a:pPr indent="0" marL="0">
+              <a:buNone/>
+            </a:pPr>
+            <a:endParaRPr lang="en-US" sz="1400" dirty="0"/>
+          </a:p>
+          <a:p>
+            <a:pPr indent="0" marL="0">
+              <a:buNone/>
+            </a:pPr>
+            <a:r>
+              <a:rPr lang="en-US" sz="1400" dirty="0">
                 <a:solidFill>
                   <a:srgbClr val="FBF5E6"/>
                 </a:solidFill>
@@ -11346,22 +11224,16 @@
                 <a:ea typeface="Calibri" pitchFamily="34" charset="-122"/>
                 <a:cs typeface="Calibri" pitchFamily="34" charset="-120"/>
               </a:rPr>
-              <a:t>   des Murs）——現代拍號的祖先</a:t>
-            </a:r>
-            <a:endParaRPr lang="en-US" sz="900" dirty="0"/>
-          </a:p>
-          <a:p>
-            <a:pPr indent="0" marL="0">
-              <a:buNone/>
-            </a:pPr>
-            <a:endParaRPr lang="en-US" sz="900" dirty="0"/>
-          </a:p>
-          <a:p>
-            <a:pPr indent="0" marL="0">
-              <a:buNone/>
-            </a:pPr>
-            <a:r>
-              <a:rPr lang="en-US" sz="900" dirty="0">
+              <a:t>■ Jehan des Murs：</a:t>
+            </a:r>
+            <a:endParaRPr lang="en-US" sz="1400" dirty="0"/>
+          </a:p>
+          <a:p>
+            <a:pPr indent="0" marL="0">
+              <a:buNone/>
+            </a:pPr>
+            <a:r>
+              <a:rPr lang="en-US" sz="1400" dirty="0">
                 <a:solidFill>
                   <a:srgbClr val="FBF5E6"/>
                 </a:solidFill>
@@ -11369,89 +11241,9 @@
                 <a:ea typeface="Calibri" pitchFamily="34" charset="-122"/>
                 <a:cs typeface="Calibri" pitchFamily="34" charset="-120"/>
               </a:rPr>
-              <a:t>⑤ 首次可寫下 syncopation 切分音</a:t>
-            </a:r>
-            <a:endParaRPr lang="en-US" sz="900" dirty="0"/>
-          </a:p>
-          <a:p>
-            <a:pPr indent="0" marL="0">
-              <a:buNone/>
-            </a:pPr>
-            <a:endParaRPr lang="en-US" sz="900" dirty="0"/>
-          </a:p>
-          <a:p>
-            <a:pPr indent="0" marL="0">
-              <a:buNone/>
-            </a:pPr>
-            <a:r>
-              <a:rPr lang="en-US" sz="900" dirty="0">
-                <a:solidFill>
-                  <a:srgbClr val="FBF5E6"/>
-                </a:solidFill>
-                <a:latin typeface="Calibri" pitchFamily="34" charset="0"/>
-                <a:ea typeface="Calibri" pitchFamily="34" charset="-122"/>
-                <a:cs typeface="Calibri" pitchFamily="34" charset="-120"/>
-              </a:rPr>
-              <a:t>❖ Jehan des Murs：</a:t>
-            </a:r>
-            <a:endParaRPr lang="en-US" sz="900" dirty="0"/>
-          </a:p>
-          <a:p>
-            <a:pPr indent="0" marL="0">
-              <a:buNone/>
-            </a:pPr>
-            <a:r>
-              <a:rPr lang="en-US" sz="900" dirty="0">
-                <a:solidFill>
-                  <a:srgbClr val="FBF5E6"/>
-                </a:solidFill>
-                <a:latin typeface="Calibri" pitchFamily="34" charset="0"/>
-                <a:ea typeface="Calibri" pitchFamily="34" charset="-122"/>
-                <a:cs typeface="Calibri" pitchFamily="34" charset="-120"/>
-              </a:rPr>
               <a:t>  「whatever can be sung can be written」</a:t>
             </a:r>
-            <a:endParaRPr lang="en-US" sz="900" dirty="0"/>
-          </a:p>
-          <a:p>
-            <a:pPr indent="0" marL="0">
-              <a:buNone/>
-            </a:pPr>
-            <a:r>
-              <a:rPr lang="en-US" sz="900" dirty="0">
-                <a:solidFill>
-                  <a:srgbClr val="FBF5E6"/>
-                </a:solidFill>
-                <a:latin typeface="Calibri" pitchFamily="34" charset="0"/>
-                <a:ea typeface="Calibri" pitchFamily="34" charset="-122"/>
-                <a:cs typeface="Calibri" pitchFamily="34" charset="-120"/>
-              </a:rPr>
-              <a:t>  只要唱得出來就寫得出來</a:t>
-            </a:r>
-            <a:endParaRPr lang="en-US" sz="900" dirty="0"/>
-          </a:p>
-          <a:p>
-            <a:pPr indent="0" marL="0">
-              <a:buNone/>
-            </a:pPr>
-            <a:endParaRPr lang="en-US" sz="900" dirty="0"/>
-          </a:p>
-          <a:p>
-            <a:pPr indent="0" marL="0">
-              <a:buNone/>
-            </a:pPr>
-            <a:r>
-              <a:rPr lang="en-US" sz="900" dirty="0">
-                <a:solidFill>
-                  <a:srgbClr val="FBF5E6"/>
-                </a:solidFill>
-                <a:latin typeface="Calibri" pitchFamily="34" charset="0"/>
-                <a:ea typeface="Calibri" pitchFamily="34" charset="-122"/>
-                <a:cs typeface="Calibri" pitchFamily="34" charset="-120"/>
-              </a:rPr>
-              <a:t>❖ Ars Nova 記譜是現代記譜的直系祖先</a:t>
-            </a:r>
-            <a:endParaRPr lang="en-US" sz="900" dirty="0"/>
+            <a:endParaRPr lang="en-US" sz="1400" dirty="0"/>
           </a:p>
         </p:txBody>
       </p:sp>
@@ -11591,7 +11383,7 @@
               <a:buNone/>
             </a:pPr>
             <a:r>
-              <a:rPr lang="en-US" sz="1300" dirty="0">
+              <a:rPr lang="en-US" sz="1400" dirty="0">
                 <a:solidFill>
                   <a:srgbClr val="E8D8A8"/>
                 </a:solidFill>
@@ -11601,7 +11393,7 @@
               </a:rPr>
               <a:t>The Structural Device of the Ars Nova Motet</a:t>
             </a:r>
-            <a:endParaRPr lang="en-US" sz="1300" dirty="0"/>
+            <a:endParaRPr lang="en-US" sz="1400" dirty="0"/>
           </a:p>
         </p:txBody>
       </p:sp>
@@ -11670,7 +11462,7 @@
               <a:buNone/>
             </a:pPr>
             <a:r>
-              <a:rPr lang="en-US" sz="1300" b="1" dirty="0">
+              <a:rPr lang="en-US" sz="1400" b="1" dirty="0">
                 <a:solidFill>
                   <a:srgbClr val="C8A020"/>
                 </a:solidFill>
@@ -11678,9 +11470,9 @@
                 <a:ea typeface="Georgia" pitchFamily="34" charset="-122"/>
                 <a:cs typeface="Georgia" pitchFamily="34" charset="-120"/>
               </a:rPr>
-              <a:t>🎵 Talea（節奏單元）</a:t>
-            </a:r>
-            <a:endParaRPr lang="en-US" sz="1300" dirty="0"/>
+              <a:t>■ Talea（節奏單元）</a:t>
+            </a:r>
+            <a:endParaRPr lang="en-US" sz="1400" dirty="0"/>
           </a:p>
         </p:txBody>
       </p:sp>
@@ -11702,14 +11494,14 @@
           <a:ln/>
         </p:spPr>
         <p:txBody>
-          <a:bodyPr wrap="square" rtlCol="0" anchor="ctr"/>
-          <a:lstStyle/>
-          <a:p>
-            <a:pPr indent="0" marL="0">
-              <a:buNone/>
-            </a:pPr>
-            <a:r>
-              <a:rPr lang="en-US" sz="1000" dirty="0">
+          <a:bodyPr wrap="square" rtlCol="0" anchor="t"/>
+          <a:lstStyle/>
+          <a:p>
+            <a:pPr indent="0" marL="0">
+              <a:buNone/>
+            </a:pPr>
+            <a:r>
+              <a:rPr lang="en-US" sz="1400" dirty="0">
                 <a:solidFill>
                   <a:srgbClr val="E8D8A8"/>
                 </a:solidFill>
@@ -11719,14 +11511,14 @@
               </a:rPr>
               <a:t>「talea」= 拉丁「cutting」</a:t>
             </a:r>
-            <a:endParaRPr lang="en-US" sz="1000" dirty="0"/>
-          </a:p>
-          <a:p>
-            <a:pPr indent="0" marL="0">
-              <a:buNone/>
-            </a:pPr>
-            <a:r>
-              <a:rPr lang="en-US" sz="1000" dirty="0">
+            <a:endParaRPr lang="en-US" sz="1400" dirty="0"/>
+          </a:p>
+          <a:p>
+            <a:pPr indent="0" marL="0">
+              <a:buNone/>
+            </a:pPr>
+            <a:r>
+              <a:rPr lang="en-US" sz="1400" dirty="0">
                 <a:solidFill>
                   <a:srgbClr val="E8D8A8"/>
                 </a:solidFill>
@@ -11736,14 +11528,14 @@
               </a:rPr>
               <a:t>• tenor 聲部中反覆出現的節奏模式</a:t>
             </a:r>
-            <a:endParaRPr lang="en-US" sz="1000" dirty="0"/>
-          </a:p>
-          <a:p>
-            <a:pPr indent="0" marL="0">
-              <a:buNone/>
-            </a:pPr>
-            <a:r>
-              <a:rPr lang="en-US" sz="1000" dirty="0">
+            <a:endParaRPr lang="en-US" sz="1400" dirty="0"/>
+          </a:p>
+          <a:p>
+            <a:pPr indent="0" marL="0">
+              <a:buNone/>
+            </a:pPr>
+            <a:r>
+              <a:rPr lang="en-US" sz="1400" dirty="0">
                 <a:solidFill>
                   <a:srgbClr val="E8D8A8"/>
                 </a:solidFill>
@@ -11753,14 +11545,14 @@
               </a:rPr>
               <a:t>• 較 13 世紀 clausula 更長更複雜</a:t>
             </a:r>
-            <a:endParaRPr lang="en-US" sz="1000" dirty="0"/>
-          </a:p>
-          <a:p>
-            <a:pPr indent="0" marL="0">
-              <a:buNone/>
-            </a:pPr>
-            <a:r>
-              <a:rPr lang="en-US" sz="1000" dirty="0">
+            <a:endParaRPr lang="en-US" sz="1400" dirty="0"/>
+          </a:p>
+          <a:p>
+            <a:pPr indent="0" marL="0">
+              <a:buNone/>
+            </a:pPr>
+            <a:r>
+              <a:rPr lang="en-US" sz="1400" dirty="0">
                 <a:solidFill>
                   <a:srgbClr val="E8D8A8"/>
                 </a:solidFill>
@@ -11770,7 +11562,7 @@
               </a:rPr>
               <a:t>• 形成整首樂曲的節奏骨架</a:t>
             </a:r>
-            <a:endParaRPr lang="en-US" sz="1000" dirty="0"/>
+            <a:endParaRPr lang="en-US" sz="1400" dirty="0"/>
           </a:p>
         </p:txBody>
       </p:sp>
@@ -11819,7 +11611,7 @@
               <a:buNone/>
             </a:pPr>
             <a:r>
-              <a:rPr lang="en-US" sz="1300" b="1" dirty="0">
+              <a:rPr lang="en-US" sz="1400" b="1" dirty="0">
                 <a:solidFill>
                   <a:srgbClr val="C8A020"/>
                 </a:solidFill>
@@ -11827,9 +11619,9 @@
                 <a:ea typeface="Georgia" pitchFamily="34" charset="-122"/>
                 <a:cs typeface="Georgia" pitchFamily="34" charset="-120"/>
               </a:rPr>
-              <a:t>🎨 Color（旋律單元）</a:t>
-            </a:r>
-            <a:endParaRPr lang="en-US" sz="1300" dirty="0"/>
+              <a:t>■ Color（旋律單元）</a:t>
+            </a:r>
+            <a:endParaRPr lang="en-US" sz="1400" dirty="0"/>
           </a:p>
         </p:txBody>
       </p:sp>
@@ -11851,14 +11643,14 @@
           <a:ln/>
         </p:spPr>
         <p:txBody>
-          <a:bodyPr wrap="square" rtlCol="0" anchor="ctr"/>
-          <a:lstStyle/>
-          <a:p>
-            <a:pPr indent="0" marL="0">
-              <a:buNone/>
-            </a:pPr>
-            <a:r>
-              <a:rPr lang="en-US" sz="1000" dirty="0">
+          <a:bodyPr wrap="square" rtlCol="0" anchor="t"/>
+          <a:lstStyle/>
+          <a:p>
+            <a:pPr indent="0" marL="0">
+              <a:buNone/>
+            </a:pPr>
+            <a:r>
+              <a:rPr lang="en-US" sz="1400" dirty="0">
                 <a:solidFill>
                   <a:srgbClr val="E8D8A8"/>
                 </a:solidFill>
@@ -11868,14 +11660,14 @@
               </a:rPr>
               <a:t>「color」= 反覆出現的旋律段</a:t>
             </a:r>
-            <a:endParaRPr lang="en-US" sz="1000" dirty="0"/>
-          </a:p>
-          <a:p>
-            <a:pPr indent="0" marL="0">
-              <a:buNone/>
-            </a:pPr>
-            <a:r>
-              <a:rPr lang="en-US" sz="1000" dirty="0">
+            <a:endParaRPr lang="en-US" sz="1400" dirty="0"/>
+          </a:p>
+          <a:p>
+            <a:pPr indent="0" marL="0">
+              <a:buNone/>
+            </a:pPr>
+            <a:r>
+              <a:rPr lang="en-US" sz="1400" dirty="0">
                 <a:solidFill>
                   <a:srgbClr val="E8D8A8"/>
                 </a:solidFill>
@@ -11885,14 +11677,14 @@
               </a:rPr>
               <a:t>• tenor 的旋律循環</a:t>
             </a:r>
-            <a:endParaRPr lang="en-US" sz="1000" dirty="0"/>
-          </a:p>
-          <a:p>
-            <a:pPr indent="0" marL="0">
-              <a:buNone/>
-            </a:pPr>
-            <a:r>
-              <a:rPr lang="en-US" sz="1000" dirty="0">
+            <a:endParaRPr lang="en-US" sz="1400" dirty="0"/>
+          </a:p>
+          <a:p>
+            <a:pPr indent="0" marL="0">
+              <a:buNone/>
+            </a:pPr>
+            <a:r>
+              <a:rPr lang="en-US" sz="1400" dirty="0">
                 <a:solidFill>
                   <a:srgbClr val="E8D8A8"/>
                 </a:solidFill>
@@ -11902,14 +11694,14 @@
               </a:rPr>
               <a:t>• 與 talea 長度可以不同</a:t>
             </a:r>
-            <a:endParaRPr lang="en-US" sz="1000" dirty="0"/>
-          </a:p>
-          <a:p>
-            <a:pPr indent="0" marL="0">
-              <a:buNone/>
-            </a:pPr>
-            <a:r>
-              <a:rPr lang="en-US" sz="1000" dirty="0">
+            <a:endParaRPr lang="en-US" sz="1400" dirty="0"/>
+          </a:p>
+          <a:p>
+            <a:pPr indent="0" marL="0">
+              <a:buNone/>
+            </a:pPr>
+            <a:r>
+              <a:rPr lang="en-US" sz="1400" dirty="0">
                 <a:solidFill>
                   <a:srgbClr val="E8D8A8"/>
                 </a:solidFill>
@@ -11919,14 +11711,14 @@
               </a:rPr>
               <a:t>• 常見：color 延伸跨越 2、3 個 taleae</a:t>
             </a:r>
-            <a:endParaRPr lang="en-US" sz="1000" dirty="0"/>
-          </a:p>
-          <a:p>
-            <a:pPr indent="0" marL="0">
-              <a:buNone/>
-            </a:pPr>
-            <a:r>
-              <a:rPr lang="en-US" sz="1000" dirty="0">
+            <a:endParaRPr lang="en-US" sz="1400" dirty="0"/>
+          </a:p>
+          <a:p>
+            <a:pPr indent="0" marL="0">
+              <a:buNone/>
+            </a:pPr>
+            <a:r>
+              <a:rPr lang="en-US" sz="1400" dirty="0">
                 <a:solidFill>
                   <a:srgbClr val="E8D8A8"/>
                 </a:solidFill>
@@ -11936,7 +11728,7 @@
               </a:rPr>
               <a:t>• 使兩者的結尾錯開——層層結構</a:t>
             </a:r>
-            <a:endParaRPr lang="en-US" sz="1000" dirty="0"/>
+            <a:endParaRPr lang="en-US" sz="1400" dirty="0"/>
           </a:p>
         </p:txBody>
       </p:sp>
@@ -11985,7 +11777,7 @@
               <a:buNone/>
             </a:pPr>
             <a:r>
-              <a:rPr lang="en-US" sz="1300" b="1" dirty="0">
+              <a:rPr lang="en-US" sz="1400" b="1" dirty="0">
                 <a:solidFill>
                   <a:srgbClr val="C8A020"/>
                 </a:solidFill>
@@ -11993,9 +11785,9 @@
                 <a:ea typeface="Georgia" pitchFamily="34" charset="-122"/>
                 <a:cs typeface="Georgia" pitchFamily="34" charset="-120"/>
               </a:rPr>
-              <a:t>⚡ Hocket（打嗝效果）與 Ars Nova 特徵</a:t>
-            </a:r>
-            <a:endParaRPr lang="en-US" sz="1300" dirty="0"/>
+              <a:t>■ Hocket（打嗝效果）與 Ars Nova 特徵</a:t>
+            </a:r>
+            <a:endParaRPr lang="en-US" sz="1400" dirty="0"/>
           </a:p>
         </p:txBody>
       </p:sp>
@@ -12017,14 +11809,14 @@
           <a:ln/>
         </p:spPr>
         <p:txBody>
-          <a:bodyPr wrap="square" rtlCol="0" anchor="ctr"/>
-          <a:lstStyle/>
-          <a:p>
-            <a:pPr indent="0" marL="0">
-              <a:buNone/>
-            </a:pPr>
-            <a:r>
-              <a:rPr lang="en-US" sz="950" dirty="0">
+          <a:bodyPr wrap="square" rtlCol="0" anchor="t"/>
+          <a:lstStyle/>
+          <a:p>
+            <a:pPr indent="0" marL="0">
+              <a:buNone/>
+            </a:pPr>
+            <a:r>
+              <a:rPr lang="en-US" sz="1400" dirty="0">
                 <a:solidFill>
                   <a:srgbClr val="E8D8A8"/>
                 </a:solidFill>
@@ -12034,14 +11826,14 @@
               </a:rPr>
               <a:t>• Hocket 來自法文 hoquet「打嗝」——兩聲部快速交替，一聲部休息時另一聲部發聲</a:t>
             </a:r>
-            <a:endParaRPr lang="en-US" sz="950" dirty="0"/>
-          </a:p>
-          <a:p>
-            <a:pPr indent="0" marL="0">
-              <a:buNone/>
-            </a:pPr>
-            <a:r>
-              <a:rPr lang="en-US" sz="950" dirty="0">
+            <a:endParaRPr lang="en-US" sz="1400" dirty="0"/>
+          </a:p>
+          <a:p>
+            <a:pPr indent="0" marL="0">
+              <a:buNone/>
+            </a:pPr>
+            <a:r>
+              <a:rPr lang="en-US" sz="1400" dirty="0">
                 <a:solidFill>
                   <a:srgbClr val="E8D8A8"/>
                 </a:solidFill>
@@ -12051,14 +11843,14 @@
               </a:rPr>
               <a:t>  Two voices alternate rapidly, one resting while the other sings</a:t>
             </a:r>
-            <a:endParaRPr lang="en-US" sz="950" dirty="0"/>
-          </a:p>
-          <a:p>
-            <a:pPr indent="0" marL="0">
-              <a:buNone/>
-            </a:pPr>
-            <a:r>
-              <a:rPr lang="en-US" sz="950" dirty="0">
+            <a:endParaRPr lang="en-US" sz="1400" dirty="0"/>
+          </a:p>
+          <a:p>
+            <a:pPr indent="0" marL="0">
+              <a:buNone/>
+            </a:pPr>
+            <a:r>
+              <a:rPr lang="en-US" sz="1400" dirty="0">
                 <a:solidFill>
                   <a:srgbClr val="E8D8A8"/>
                 </a:solidFill>
@@ -12068,14 +11860,14 @@
               </a:rPr>
               <a:t>• 常見於 14 世紀 isorhythmic 作品中 · 有時整首為 hocket · 可為人聲或器樂</a:t>
             </a:r>
-            <a:endParaRPr lang="en-US" sz="950" dirty="0"/>
-          </a:p>
-          <a:p>
-            <a:pPr indent="0" marL="0">
-              <a:buNone/>
-            </a:pPr>
-            <a:r>
-              <a:rPr lang="en-US" sz="950" dirty="0">
+            <a:endParaRPr lang="en-US" sz="1400" dirty="0"/>
+          </a:p>
+          <a:p>
+            <a:pPr indent="0" marL="0">
+              <a:buNone/>
+            </a:pPr>
+            <a:r>
+              <a:rPr lang="en-US" sz="1400" dirty="0">
                 <a:solidFill>
                   <a:srgbClr val="E8D8A8"/>
                 </a:solidFill>
@@ -12085,14 +11877,14 @@
               </a:rPr>
               <a:t>• Ars Nova 的和聲：三度與六度（imperfect consonances）使用更頻繁——聽起來更甜美</a:t>
             </a:r>
-            <a:endParaRPr lang="en-US" sz="950" dirty="0"/>
-          </a:p>
-          <a:p>
-            <a:pPr indent="0" marL="0">
-              <a:buNone/>
-            </a:pPr>
-            <a:r>
-              <a:rPr lang="en-US" sz="950" dirty="0">
+            <a:endParaRPr lang="en-US" sz="1400" dirty="0"/>
+          </a:p>
+          <a:p>
+            <a:pPr indent="0" marL="0">
+              <a:buNone/>
+            </a:pPr>
+            <a:r>
+              <a:rPr lang="en-US" sz="1400" dirty="0">
                 <a:solidFill>
                   <a:srgbClr val="E8D8A8"/>
                 </a:solidFill>
@@ -12102,14 +11894,14 @@
               </a:rPr>
               <a:t>• 但仍可見平行五度八度——與 15–16 世紀對位有別</a:t>
             </a:r>
-            <a:endParaRPr lang="en-US" sz="950" dirty="0"/>
-          </a:p>
-          <a:p>
-            <a:pPr indent="0" marL="0">
-              <a:buNone/>
-            </a:pPr>
-            <a:r>
-              <a:rPr lang="en-US" sz="950" dirty="0">
+            <a:endParaRPr lang="en-US" sz="1400" dirty="0"/>
+          </a:p>
+          <a:p>
+            <a:pPr indent="0" marL="0">
+              <a:buNone/>
+            </a:pPr>
+            <a:r>
+              <a:rPr lang="en-US" sz="1400" dirty="0">
                 <a:solidFill>
                   <a:srgbClr val="E8D8A8"/>
                 </a:solidFill>
@@ -12119,7 +11911,7 @@
               </a:rPr>
               <a:t>• 這些 motets 寫給具文學與音樂素養的聽眾——詞樂結構交織的樂趣</a:t>
             </a:r>
-            <a:endParaRPr lang="en-US" sz="950" dirty="0"/>
+            <a:endParaRPr lang="en-US" sz="1400" dirty="0"/>
           </a:p>
         </p:txBody>
       </p:sp>
@@ -12252,14 +12044,14 @@
           <a:ln/>
         </p:spPr>
         <p:txBody>
-          <a:bodyPr wrap="square" rtlCol="0" anchor="ctr"/>
-          <a:lstStyle/>
-          <a:p>
-            <a:pPr indent="0" marL="0">
-              <a:buNone/>
-            </a:pPr>
-            <a:r>
-              <a:rPr lang="en-US" sz="1200" dirty="0">
+          <a:bodyPr wrap="square" rtlCol="0" anchor="t"/>
+          <a:lstStyle/>
+          <a:p>
+            <a:pPr indent="0" marL="0">
+              <a:buNone/>
+            </a:pPr>
+            <a:r>
+              <a:rPr lang="en-US" sz="1400" dirty="0">
                 <a:solidFill>
                   <a:srgbClr val="5C3A28"/>
                 </a:solidFill>
@@ -12269,7 +12061,7 @@
               </a:rPr>
               <a:t>The Most Important Composer and Poet of the Ars Nova</a:t>
             </a:r>
-            <a:endParaRPr lang="en-US" sz="1200" dirty="0"/>
+            <a:endParaRPr lang="en-US" sz="1400" dirty="0"/>
           </a:p>
         </p:txBody>
       </p:sp>
@@ -12302,7 +12094,7 @@
         <p:spPr>
           <a:xfrm>
             <a:off x="274320" y="1097280"/>
-            <a:ext cx="4206240" cy="3657600"/>
+            <a:ext cx="4206240" cy="3794760"/>
           </a:xfrm>
           <a:prstGeom prst="rect">
             <a:avLst/>
@@ -12338,7 +12130,7 @@
               <a:buNone/>
             </a:pPr>
             <a:r>
-              <a:rPr lang="en-US" sz="1300" b="1" dirty="0">
+              <a:rPr lang="en-US" sz="1400" b="1" dirty="0">
                 <a:solidFill>
                   <a:srgbClr val="C8A020"/>
                 </a:solidFill>
@@ -12346,9 +12138,9 @@
                 <a:ea typeface="Georgia" pitchFamily="34" charset="-122"/>
                 <a:cs typeface="Georgia" pitchFamily="34" charset="-120"/>
               </a:rPr>
-              <a:t>📖 生平 Biography</a:t>
-            </a:r>
-            <a:endParaRPr lang="en-US" sz="1300" dirty="0"/>
+              <a:t>■ 生平 Biography</a:t>
+            </a:r>
+            <a:endParaRPr lang="en-US" sz="1400" dirty="0"/>
           </a:p>
         </p:txBody>
       </p:sp>
@@ -12381,23 +12173,23 @@
         <p:spPr>
           <a:xfrm>
             <a:off x="457200" y="1627632"/>
-            <a:ext cx="3840480" cy="3108960"/>
-          </a:xfrm>
-          <a:prstGeom prst="rect">
-            <a:avLst/>
-          </a:prstGeom>
-          <a:noFill/>
-          <a:ln/>
-        </p:spPr>
-        <p:txBody>
-          <a:bodyPr wrap="square" rtlCol="0" anchor="ctr"/>
-          <a:lstStyle/>
-          <a:p>
-            <a:pPr indent="0" marL="0">
-              <a:buNone/>
-            </a:pPr>
-            <a:r>
-              <a:rPr lang="en-US" sz="900" dirty="0">
+            <a:ext cx="3840480" cy="3291840"/>
+          </a:xfrm>
+          <a:prstGeom prst="rect">
+            <a:avLst/>
+          </a:prstGeom>
+          <a:noFill/>
+          <a:ln/>
+        </p:spPr>
+        <p:txBody>
+          <a:bodyPr wrap="square" rtlCol="0" anchor="t"/>
+          <a:lstStyle/>
+          <a:p>
+            <a:pPr indent="0" marL="0">
+              <a:buNone/>
+            </a:pPr>
+            <a:r>
+              <a:rPr lang="en-US" sz="1400" dirty="0">
                 <a:solidFill>
                   <a:srgbClr val="FBF5E6"/>
                 </a:solidFill>
@@ -12407,14 +12199,14 @@
               </a:rPr>
               <a:t>• 出生於法國香檳省（Champagne）</a:t>
             </a:r>
-            <a:endParaRPr lang="en-US" sz="900" dirty="0"/>
-          </a:p>
-          <a:p>
-            <a:pPr indent="0" marL="0">
-              <a:buNone/>
-            </a:pPr>
-            <a:r>
-              <a:rPr lang="en-US" sz="900" dirty="0">
+            <a:endParaRPr lang="en-US" sz="1400" dirty="0"/>
+          </a:p>
+          <a:p>
+            <a:pPr indent="0" marL="0">
+              <a:buNone/>
+            </a:pPr>
+            <a:r>
+              <a:rPr lang="en-US" sz="1400" dirty="0">
                 <a:solidFill>
                   <a:srgbClr val="FBF5E6"/>
                 </a:solidFill>
@@ -12424,14 +12216,14 @@
               </a:rPr>
               <a:t>• 受教育為教士</a:t>
             </a:r>
-            <a:endParaRPr lang="en-US" sz="900" dirty="0"/>
-          </a:p>
-          <a:p>
-            <a:pPr indent="0" marL="0">
-              <a:buNone/>
-            </a:pPr>
-            <a:r>
-              <a:rPr lang="en-US" sz="900" dirty="0">
+            <a:endParaRPr lang="en-US" sz="1400" dirty="0"/>
+          </a:p>
+          <a:p>
+            <a:pPr indent="0" marL="0">
+              <a:buNone/>
+            </a:pPr>
+            <a:r>
+              <a:rPr lang="en-US" sz="1400" dirty="0">
                 <a:solidFill>
                   <a:srgbClr val="FBF5E6"/>
                 </a:solidFill>
@@ -12441,14 +12233,14 @@
               </a:rPr>
               <a:t>• ca. 1323 任波希米亞國王 John of</a:t>
             </a:r>
-            <a:endParaRPr lang="en-US" sz="900" dirty="0"/>
-          </a:p>
-          <a:p>
-            <a:pPr indent="0" marL="0">
-              <a:buNone/>
-            </a:pPr>
-            <a:r>
-              <a:rPr lang="en-US" sz="900" dirty="0">
+            <a:endParaRPr lang="en-US" sz="1400" dirty="0"/>
+          </a:p>
+          <a:p>
+            <a:pPr indent="0" marL="0">
+              <a:buNone/>
+            </a:pPr>
+            <a:r>
+              <a:rPr lang="en-US" sz="1400" dirty="0">
                 <a:solidFill>
                   <a:srgbClr val="FBF5E6"/>
                 </a:solidFill>
@@ -12458,14 +12250,14 @@
               </a:rPr>
               <a:t>  Luxembourg 的秘書 · 隨其東征西伐</a:t>
             </a:r>
-            <a:endParaRPr lang="en-US" sz="900" dirty="0"/>
-          </a:p>
-          <a:p>
-            <a:pPr indent="0" marL="0">
-              <a:buNone/>
-            </a:pPr>
-            <a:r>
-              <a:rPr lang="en-US" sz="900" dirty="0">
+            <a:endParaRPr lang="en-US" sz="1400" dirty="0"/>
+          </a:p>
+          <a:p>
+            <a:pPr indent="0" marL="0">
+              <a:buNone/>
+            </a:pPr>
+            <a:r>
+              <a:rPr lang="en-US" sz="1400" dirty="0">
                 <a:solidFill>
                   <a:srgbClr val="FBF5E6"/>
                 </a:solidFill>
@@ -12473,16 +12265,16 @@
                 <a:ea typeface="Calibri" pitchFamily="34" charset="-122"/>
                 <a:cs typeface="Calibri" pitchFamily="34" charset="-120"/>
               </a:rPr>
-              <a:t>• 1340 起為 Reims 主教座堂參事——</a:t>
-            </a:r>
-            <a:endParaRPr lang="en-US" sz="900" dirty="0"/>
-          </a:p>
-          <a:p>
-            <a:pPr indent="0" marL="0">
-              <a:buNone/>
-            </a:pPr>
-            <a:r>
-              <a:rPr lang="en-US" sz="900" dirty="0">
+              <a:t>• 1340 起為 Reims 主教座堂參事</a:t>
+            </a:r>
+            <a:endParaRPr lang="en-US" sz="1400" dirty="0"/>
+          </a:p>
+          <a:p>
+            <a:pPr indent="0" marL="0">
+              <a:buNone/>
+            </a:pPr>
+            <a:r>
+              <a:rPr lang="en-US" sz="1400" dirty="0">
                 <a:solidFill>
                   <a:srgbClr val="FBF5E6"/>
                 </a:solidFill>
@@ -12490,16 +12282,16 @@
                 <a:ea typeface="Calibri" pitchFamily="34" charset="-122"/>
                 <a:cs typeface="Calibri" pitchFamily="34" charset="-120"/>
               </a:rPr>
-              <a:t>  有充分時間創作</a:t>
-            </a:r>
-            <a:endParaRPr lang="en-US" sz="900" dirty="0"/>
-          </a:p>
-          <a:p>
-            <a:pPr indent="0" marL="0">
-              <a:buNone/>
-            </a:pPr>
-            <a:r>
-              <a:rPr lang="en-US" sz="900" dirty="0">
+              <a:t>• 贊助人：Navarre 王、法國王、</a:t>
+            </a:r>
+            <a:endParaRPr lang="en-US" sz="1400" dirty="0"/>
+          </a:p>
+          <a:p>
+            <a:pPr indent="0" marL="0">
+              <a:buNone/>
+            </a:pPr>
+            <a:r>
+              <a:rPr lang="en-US" sz="1400" dirty="0">
                 <a:solidFill>
                   <a:srgbClr val="FBF5E6"/>
                 </a:solidFill>
@@ -12507,16 +12299,22 @@
                 <a:ea typeface="Calibri" pitchFamily="34" charset="-122"/>
                 <a:cs typeface="Calibri" pitchFamily="34" charset="-120"/>
               </a:rPr>
-              <a:t>• 贊助人：Bonne、Navarre 王、法國王、</a:t>
-            </a:r>
-            <a:endParaRPr lang="en-US" sz="900" dirty="0"/>
-          </a:p>
-          <a:p>
-            <a:pPr indent="0" marL="0">
-              <a:buNone/>
-            </a:pPr>
-            <a:r>
-              <a:rPr lang="en-US" sz="900" dirty="0">
+              <a:t>  Berry 與 Burgundy 公爵</a:t>
+            </a:r>
+            <a:endParaRPr lang="en-US" sz="1400" dirty="0"/>
+          </a:p>
+          <a:p>
+            <a:pPr indent="0" marL="0">
+              <a:buNone/>
+            </a:pPr>
+            <a:endParaRPr lang="en-US" sz="1400" dirty="0"/>
+          </a:p>
+          <a:p>
+            <a:pPr indent="0" marL="0">
+              <a:buNone/>
+            </a:pPr>
+            <a:r>
+              <a:rPr lang="en-US" sz="1400" dirty="0">
                 <a:solidFill>
                   <a:srgbClr val="FBF5E6"/>
                 </a:solidFill>
@@ -12524,22 +12322,16 @@
                 <a:ea typeface="Calibri" pitchFamily="34" charset="-122"/>
                 <a:cs typeface="Calibri" pitchFamily="34" charset="-120"/>
               </a:rPr>
-              <a:t>  Berry 與 Burgundy 公爵</a:t>
-            </a:r>
-            <a:endParaRPr lang="en-US" sz="900" dirty="0"/>
-          </a:p>
-          <a:p>
-            <a:pPr indent="0" marL="0">
-              <a:buNone/>
-            </a:pPr>
-            <a:endParaRPr lang="en-US" sz="900" dirty="0"/>
-          </a:p>
-          <a:p>
-            <a:pPr indent="0" marL="0">
-              <a:buNone/>
-            </a:pPr>
-            <a:r>
-              <a:rPr lang="en-US" sz="900" dirty="0">
+              <a:t>■ 劃時代意義：</a:t>
+            </a:r>
+            <a:endParaRPr lang="en-US" sz="1400" dirty="0"/>
+          </a:p>
+          <a:p>
+            <a:pPr indent="0" marL="0">
+              <a:buNone/>
+            </a:pPr>
+            <a:r>
+              <a:rPr lang="en-US" sz="1400" dirty="0">
                 <a:solidFill>
                   <a:srgbClr val="FBF5E6"/>
                 </a:solidFill>
@@ -12547,16 +12339,16 @@
                 <a:ea typeface="Calibri" pitchFamily="34" charset="-122"/>
                 <a:cs typeface="Calibri" pitchFamily="34" charset="-120"/>
               </a:rPr>
-              <a:t>❖ 劃時代意義：</a:t>
-            </a:r>
-            <a:endParaRPr lang="en-US" sz="900" dirty="0"/>
-          </a:p>
-          <a:p>
-            <a:pPr indent="0" marL="0">
-              <a:buNone/>
-            </a:pPr>
-            <a:r>
-              <a:rPr lang="en-US" sz="900" dirty="0">
+              <a:t>• 第一位主動編纂自己全集的作曲家</a:t>
+            </a:r>
+            <a:endParaRPr lang="en-US" sz="1400" dirty="0"/>
+          </a:p>
+          <a:p>
+            <a:pPr indent="0" marL="0">
+              <a:buNone/>
+            </a:pPr>
+            <a:r>
+              <a:rPr lang="en-US" sz="1400" dirty="0">
                 <a:solidFill>
                   <a:srgbClr val="FBF5E6"/>
                 </a:solidFill>
@@ -12564,16 +12356,16 @@
                 <a:ea typeface="Calibri" pitchFamily="34" charset="-122"/>
                 <a:cs typeface="Calibri" pitchFamily="34" charset="-120"/>
               </a:rPr>
-              <a:t>• 是第一位主動編纂自己全集的作曲家</a:t>
-            </a:r>
-            <a:endParaRPr lang="en-US" sz="900" dirty="0"/>
-          </a:p>
-          <a:p>
-            <a:pPr indent="0" marL="0">
-              <a:buNone/>
-            </a:pPr>
-            <a:r>
-              <a:rPr lang="en-US" sz="900" dirty="0">
+              <a:t>• 生前監督華麗插圖手稿的製作</a:t>
+            </a:r>
+            <a:endParaRPr lang="en-US" sz="1400" dirty="0"/>
+          </a:p>
+          <a:p>
+            <a:pPr indent="0" marL="0">
+              <a:buNone/>
+            </a:pPr>
+            <a:r>
+              <a:rPr lang="en-US" sz="1400" dirty="0">
                 <a:solidFill>
                   <a:srgbClr val="FBF5E6"/>
                 </a:solidFill>
@@ -12581,16 +12373,16 @@
                 <a:ea typeface="Calibri" pitchFamily="34" charset="-122"/>
                 <a:cs typeface="Calibri" pitchFamily="34" charset="-120"/>
               </a:rPr>
-              <a:t>• 生前監督多部華麗插圖手稿的製作</a:t>
-            </a:r>
-            <a:endParaRPr lang="en-US" sz="900" dirty="0"/>
-          </a:p>
-          <a:p>
-            <a:pPr indent="0" marL="0">
-              <a:buNone/>
-            </a:pPr>
-            <a:r>
-              <a:rPr lang="en-US" sz="900" dirty="0">
+              <a:t>• Le livre du voir dit (1363–65)</a:t>
+            </a:r>
+            <a:endParaRPr lang="en-US" sz="1400" dirty="0"/>
+          </a:p>
+          <a:p>
+            <a:pPr indent="0" marL="0">
+              <a:buNone/>
+            </a:pPr>
+            <a:r>
+              <a:rPr lang="en-US" sz="1400" dirty="0">
                 <a:solidFill>
                   <a:srgbClr val="FBF5E6"/>
                 </a:solidFill>
@@ -12598,16 +12390,16 @@
                 <a:ea typeface="Calibri" pitchFamily="34" charset="-122"/>
                 <a:cs typeface="Calibri" pitchFamily="34" charset="-120"/>
               </a:rPr>
-              <a:t>• 與愛人 Peronne 通信討論創作方法</a:t>
-            </a:r>
-            <a:endParaRPr lang="en-US" sz="900" dirty="0"/>
-          </a:p>
-          <a:p>
-            <a:pPr indent="0" marL="0">
-              <a:buNone/>
-            </a:pPr>
-            <a:r>
-              <a:rPr lang="en-US" sz="900" dirty="0">
+              <a:t>  與愛人 Peronne 通信討論創作</a:t>
+            </a:r>
+            <a:endParaRPr lang="en-US" sz="1400" dirty="0"/>
+          </a:p>
+          <a:p>
+            <a:pPr indent="0" marL="0">
+              <a:buNone/>
+            </a:pPr>
+            <a:r>
+              <a:rPr lang="en-US" sz="1400" dirty="0">
                 <a:solidFill>
                   <a:srgbClr val="FBF5E6"/>
                 </a:solidFill>
@@ -12615,43 +12407,9 @@
                 <a:ea typeface="Calibri" pitchFamily="34" charset="-122"/>
                 <a:cs typeface="Calibri" pitchFamily="34" charset="-120"/>
               </a:rPr>
-              <a:t>  Le livre du voir dit (1363–65)</a:t>
-            </a:r>
-            <a:endParaRPr lang="en-US" sz="900" dirty="0"/>
-          </a:p>
-          <a:p>
-            <a:pPr indent="0" marL="0">
-              <a:buNone/>
-            </a:pPr>
-            <a:r>
-              <a:rPr lang="en-US" sz="900" dirty="0">
-                <a:solidFill>
-                  <a:srgbClr val="FBF5E6"/>
-                </a:solidFill>
-                <a:latin typeface="Calibri" pitchFamily="34" charset="0"/>
-                <a:ea typeface="Calibri" pitchFamily="34" charset="-122"/>
-                <a:cs typeface="Calibri" pitchFamily="34" charset="-120"/>
-              </a:rPr>
-              <a:t>• 展現作曲家的自我意識——</a:t>
-            </a:r>
-            <a:endParaRPr lang="en-US" sz="900" dirty="0"/>
-          </a:p>
-          <a:p>
-            <a:pPr indent="0" marL="0">
-              <a:buNone/>
-            </a:pPr>
-            <a:r>
-              <a:rPr lang="en-US" sz="900" dirty="0">
-                <a:solidFill>
-                  <a:srgbClr val="FBF5E6"/>
-                </a:solidFill>
-                <a:latin typeface="Calibri" pitchFamily="34" charset="0"/>
-                <a:ea typeface="Calibri" pitchFamily="34" charset="-122"/>
-                <a:cs typeface="Calibri" pitchFamily="34" charset="-120"/>
-              </a:rPr>
-              <a:t>  這在 19 世紀前極為罕見</a:t>
-            </a:r>
-            <a:endParaRPr lang="en-US" sz="900" dirty="0"/>
+              <a:t>• 展現作曲家的自我意識</a:t>
+            </a:r>
+            <a:endParaRPr lang="en-US" sz="1400" dirty="0"/>
           </a:p>
         </p:txBody>
       </p:sp>
@@ -12664,7 +12422,7 @@
         <p:spPr>
           <a:xfrm>
             <a:off x="4663440" y="1097280"/>
-            <a:ext cx="4206240" cy="3657600"/>
+            <a:ext cx="4206240" cy="3794760"/>
           </a:xfrm>
           <a:prstGeom prst="rect">
             <a:avLst/>
@@ -12700,7 +12458,7 @@
               <a:buNone/>
             </a:pPr>
             <a:r>
-              <a:rPr lang="en-US" sz="1300" b="1" dirty="0">
+              <a:rPr lang="en-US" sz="1400" b="1" dirty="0">
                 <a:solidFill>
                   <a:srgbClr val="C8A020"/>
                 </a:solidFill>
@@ -12708,9 +12466,9 @@
                 <a:ea typeface="Georgia" pitchFamily="34" charset="-122"/>
                 <a:cs typeface="Georgia" pitchFamily="34" charset="-120"/>
               </a:rPr>
-              <a:t>🎼 主要作品 Major Works</a:t>
-            </a:r>
-            <a:endParaRPr lang="en-US" sz="1300" dirty="0"/>
+              <a:t>■ 主要作品 Major Works</a:t>
+            </a:r>
+            <a:endParaRPr lang="en-US" sz="1400" dirty="0"/>
           </a:p>
         </p:txBody>
       </p:sp>
@@ -12743,23 +12501,23 @@
         <p:spPr>
           <a:xfrm>
             <a:off x="4846320" y="1627632"/>
-            <a:ext cx="3840480" cy="3108960"/>
-          </a:xfrm>
-          <a:prstGeom prst="rect">
-            <a:avLst/>
-          </a:prstGeom>
-          <a:noFill/>
-          <a:ln/>
-        </p:spPr>
-        <p:txBody>
-          <a:bodyPr wrap="square" rtlCol="0" anchor="ctr"/>
-          <a:lstStyle/>
-          <a:p>
-            <a:pPr indent="0" marL="0">
-              <a:buNone/>
-            </a:pPr>
-            <a:r>
-              <a:rPr lang="en-US" sz="900" dirty="0">
+            <a:ext cx="3840480" cy="3291840"/>
+          </a:xfrm>
+          <a:prstGeom prst="rect">
+            <a:avLst/>
+          </a:prstGeom>
+          <a:noFill/>
+          <a:ln/>
+        </p:spPr>
+        <p:txBody>
+          <a:bodyPr wrap="square" rtlCol="0" anchor="t"/>
+          <a:lstStyle/>
+          <a:p>
+            <a:pPr indent="0" marL="0">
+              <a:buNone/>
+            </a:pPr>
+            <a:r>
+              <a:rPr lang="en-US" sz="1400" dirty="0">
                 <a:solidFill>
                   <a:srgbClr val="FBF5E6"/>
                 </a:solidFill>
@@ -12767,16 +12525,16 @@
                 <a:ea typeface="Calibri" pitchFamily="34" charset="-122"/>
                 <a:cs typeface="Calibri" pitchFamily="34" charset="-120"/>
               </a:rPr>
-              <a:t>❖ 宗教音樂</a:t>
-            </a:r>
-            <a:endParaRPr lang="en-US" sz="900" dirty="0"/>
-          </a:p>
-          <a:p>
-            <a:pPr indent="0" marL="0">
-              <a:buNone/>
-            </a:pPr>
-            <a:r>
-              <a:rPr lang="en-US" sz="900" dirty="0">
+              <a:t>■ 宗教音樂</a:t>
+            </a:r>
+            <a:endParaRPr lang="en-US" sz="1400" dirty="0"/>
+          </a:p>
+          <a:p>
+            <a:pPr indent="0" marL="0">
+              <a:buNone/>
+            </a:pPr>
+            <a:r>
+              <a:rPr lang="en-US" sz="1400" dirty="0">
                 <a:solidFill>
                   <a:srgbClr val="FBF5E6"/>
                 </a:solidFill>
@@ -12786,14 +12544,14 @@
               </a:rPr>
               <a:t>• La Messe de Nostre Dame</a:t>
             </a:r>
-            <a:endParaRPr lang="en-US" sz="900" dirty="0"/>
-          </a:p>
-          <a:p>
-            <a:pPr indent="0" marL="0">
-              <a:buNone/>
-            </a:pPr>
-            <a:r>
-              <a:rPr lang="en-US" sz="900" dirty="0">
+            <a:endParaRPr lang="en-US" sz="1400" dirty="0"/>
+          </a:p>
+          <a:p>
+            <a:pPr indent="0" marL="0">
+              <a:buNone/>
+            </a:pPr>
+            <a:r>
+              <a:rPr lang="en-US" sz="1400" dirty="0">
                 <a:solidFill>
                   <a:srgbClr val="FBF5E6"/>
                 </a:solidFill>
@@ -12801,16 +12559,16 @@
                 <a:ea typeface="Calibri" pitchFamily="34" charset="-122"/>
                 <a:cs typeface="Calibri" pitchFamily="34" charset="-120"/>
               </a:rPr>
-              <a:t>  單一作曲家完成的首部完整</a:t>
-            </a:r>
-            <a:endParaRPr lang="en-US" sz="900" dirty="0"/>
-          </a:p>
-          <a:p>
-            <a:pPr indent="0" marL="0">
-              <a:buNone/>
-            </a:pPr>
-            <a:r>
-              <a:rPr lang="en-US" sz="900" dirty="0">
+              <a:t>  首部完整複音常規彌撒（4 聲部）</a:t>
+            </a:r>
+            <a:endParaRPr lang="en-US" sz="1400" dirty="0"/>
+          </a:p>
+          <a:p>
+            <a:pPr indent="0" marL="0">
+              <a:buNone/>
+            </a:pPr>
+            <a:r>
+              <a:rPr lang="en-US" sz="1400" dirty="0">
                 <a:solidFill>
                   <a:srgbClr val="FBF5E6"/>
                 </a:solidFill>
@@ -12818,16 +12576,16 @@
                 <a:ea typeface="Calibri" pitchFamily="34" charset="-122"/>
                 <a:cs typeface="Calibri" pitchFamily="34" charset="-120"/>
               </a:rPr>
-              <a:t>  複音常規彌撒（4 聲部）</a:t>
-            </a:r>
-            <a:endParaRPr lang="en-US" sz="900" dirty="0"/>
-          </a:p>
-          <a:p>
-            <a:pPr indent="0" marL="0">
-              <a:buNone/>
-            </a:pPr>
-            <a:r>
-              <a:rPr lang="en-US" sz="900" dirty="0">
+              <a:t>• 23 motets（20 isorhythmic）</a:t>
+            </a:r>
+            <a:endParaRPr lang="en-US" sz="1400" dirty="0"/>
+          </a:p>
+          <a:p>
+            <a:pPr indent="0" marL="0">
+              <a:buNone/>
+            </a:pPr>
+            <a:r>
+              <a:rPr lang="en-US" sz="1400" dirty="0">
                 <a:solidFill>
                   <a:srgbClr val="FBF5E6"/>
                 </a:solidFill>
@@ -12835,16 +12593,22 @@
                 <a:ea typeface="Calibri" pitchFamily="34" charset="-122"/>
                 <a:cs typeface="Calibri" pitchFamily="34" charset="-120"/>
               </a:rPr>
-              <a:t>• 23 motets（20 isorhythmic）</a:t>
-            </a:r>
-            <a:endParaRPr lang="en-US" sz="900" dirty="0"/>
-          </a:p>
-          <a:p>
-            <a:pPr indent="0" marL="0">
-              <a:buNone/>
-            </a:pPr>
-            <a:r>
-              <a:rPr lang="en-US" sz="900" dirty="0">
+              <a:t>• Hoquetus David</a:t>
+            </a:r>
+            <a:endParaRPr lang="en-US" sz="1400" dirty="0"/>
+          </a:p>
+          <a:p>
+            <a:pPr indent="0" marL="0">
+              <a:buNone/>
+            </a:pPr>
+            <a:endParaRPr lang="en-US" sz="1400" dirty="0"/>
+          </a:p>
+          <a:p>
+            <a:pPr indent="0" marL="0">
+              <a:buNone/>
+            </a:pPr>
+            <a:r>
+              <a:rPr lang="en-US" sz="1400" dirty="0">
                 <a:solidFill>
                   <a:srgbClr val="FBF5E6"/>
                 </a:solidFill>
@@ -12852,22 +12616,16 @@
                 <a:ea typeface="Calibri" pitchFamily="34" charset="-122"/>
                 <a:cs typeface="Calibri" pitchFamily="34" charset="-120"/>
               </a:rPr>
-              <a:t>• Hoquetus David</a:t>
-            </a:r>
-            <a:endParaRPr lang="en-US" sz="900" dirty="0"/>
-          </a:p>
-          <a:p>
-            <a:pPr indent="0" marL="0">
-              <a:buNone/>
-            </a:pPr>
-            <a:endParaRPr lang="en-US" sz="900" dirty="0"/>
-          </a:p>
-          <a:p>
-            <a:pPr indent="0" marL="0">
-              <a:buNone/>
-            </a:pPr>
-            <a:r>
-              <a:rPr lang="en-US" sz="900" dirty="0">
+              <a:t>■ 世俗音樂（formes fixes）</a:t>
+            </a:r>
+            <a:endParaRPr lang="en-US" sz="1400" dirty="0"/>
+          </a:p>
+          <a:p>
+            <a:pPr indent="0" marL="0">
+              <a:buNone/>
+            </a:pPr>
+            <a:r>
+              <a:rPr lang="en-US" sz="1400" dirty="0">
                 <a:solidFill>
                   <a:srgbClr val="FBF5E6"/>
                 </a:solidFill>
@@ -12875,16 +12633,16 @@
                 <a:ea typeface="Calibri" pitchFamily="34" charset="-122"/>
                 <a:cs typeface="Calibri" pitchFamily="34" charset="-120"/>
               </a:rPr>
-              <a:t>❖ 世俗音樂（formes fixes）</a:t>
-            </a:r>
-            <a:endParaRPr lang="en-US" sz="900" dirty="0"/>
-          </a:p>
-          <a:p>
-            <a:pPr indent="0" marL="0">
-              <a:buNone/>
-            </a:pPr>
-            <a:r>
-              <a:rPr lang="en-US" sz="900" dirty="0">
+              <a:t>• 42 ballades · 22 rondeaux</a:t>
+            </a:r>
+            <a:endParaRPr lang="en-US" sz="1400" dirty="0"/>
+          </a:p>
+          <a:p>
+            <a:pPr indent="0" marL="0">
+              <a:buNone/>
+            </a:pPr>
+            <a:r>
+              <a:rPr lang="en-US" sz="1400" dirty="0">
                 <a:solidFill>
                   <a:srgbClr val="FBF5E6"/>
                 </a:solidFill>
@@ -12892,16 +12650,16 @@
                 <a:ea typeface="Calibri" pitchFamily="34" charset="-122"/>
                 <a:cs typeface="Calibri" pitchFamily="34" charset="-120"/>
               </a:rPr>
-              <a:t>• 42 ballades（1 首單聲部）</a:t>
-            </a:r>
-            <a:endParaRPr lang="en-US" sz="900" dirty="0"/>
-          </a:p>
-          <a:p>
-            <a:pPr indent="0" marL="0">
-              <a:buNone/>
-            </a:pPr>
-            <a:r>
-              <a:rPr lang="en-US" sz="900" dirty="0">
+              <a:t>• 33 virelais · 19 lais</a:t>
+            </a:r>
+            <a:endParaRPr lang="en-US" sz="1400" dirty="0"/>
+          </a:p>
+          <a:p>
+            <a:pPr indent="0" marL="0">
+              <a:buNone/>
+            </a:pPr>
+            <a:r>
+              <a:rPr lang="en-US" sz="1400" dirty="0">
                 <a:solidFill>
                   <a:srgbClr val="FBF5E6"/>
                 </a:solidFill>
@@ -12909,16 +12667,22 @@
                 <a:ea typeface="Calibri" pitchFamily="34" charset="-122"/>
                 <a:cs typeface="Calibri" pitchFamily="34" charset="-120"/>
               </a:rPr>
-              <a:t>• 22 rondeaux</a:t>
-            </a:r>
-            <a:endParaRPr lang="en-US" sz="900" dirty="0"/>
-          </a:p>
-          <a:p>
-            <a:pPr indent="0" marL="0">
-              <a:buNone/>
-            </a:pPr>
-            <a:r>
-              <a:rPr lang="en-US" sz="900" dirty="0">
+              <a:t>• 1 complainte · 1 chanson royale</a:t>
+            </a:r>
+            <a:endParaRPr lang="en-US" sz="1400" dirty="0"/>
+          </a:p>
+          <a:p>
+            <a:pPr indent="0" marL="0">
+              <a:buNone/>
+            </a:pPr>
+            <a:endParaRPr lang="en-US" sz="1400" dirty="0"/>
+          </a:p>
+          <a:p>
+            <a:pPr indent="0" marL="0">
+              <a:buNone/>
+            </a:pPr>
+            <a:r>
+              <a:rPr lang="en-US" sz="1400" dirty="0">
                 <a:solidFill>
                   <a:srgbClr val="FBF5E6"/>
                 </a:solidFill>
@@ -12926,16 +12690,16 @@
                 <a:ea typeface="Calibri" pitchFamily="34" charset="-122"/>
                 <a:cs typeface="Calibri" pitchFamily="34" charset="-120"/>
               </a:rPr>
-              <a:t>• 33 virelais（25 首單聲部）</a:t>
-            </a:r>
-            <a:endParaRPr lang="en-US" sz="900" dirty="0"/>
-          </a:p>
-          <a:p>
-            <a:pPr indent="0" marL="0">
-              <a:buNone/>
-            </a:pPr>
-            <a:r>
-              <a:rPr lang="en-US" sz="900" dirty="0">
+              <a:t>■ 詩作：Remede de Fortune ·</a:t>
+            </a:r>
+            <a:endParaRPr lang="en-US" sz="1400" dirty="0"/>
+          </a:p>
+          <a:p>
+            <a:pPr indent="0" marL="0">
+              <a:buNone/>
+            </a:pPr>
+            <a:r>
+              <a:rPr lang="en-US" sz="1400" dirty="0">
                 <a:solidFill>
                   <a:srgbClr val="FBF5E6"/>
                 </a:solidFill>
@@ -12943,16 +12707,22 @@
                 <a:ea typeface="Calibri" pitchFamily="34" charset="-122"/>
                 <a:cs typeface="Calibri" pitchFamily="34" charset="-120"/>
               </a:rPr>
-              <a:t>• 19 lais（15 首單聲部）</a:t>
-            </a:r>
-            <a:endParaRPr lang="en-US" sz="900" dirty="0"/>
-          </a:p>
-          <a:p>
-            <a:pPr indent="0" marL="0">
-              <a:buNone/>
-            </a:pPr>
-            <a:r>
-              <a:rPr lang="en-US" sz="900" dirty="0">
+              <a:t>  Le livre du voir dit · 280+ 首詩</a:t>
+            </a:r>
+            <a:endParaRPr lang="en-US" sz="1400" dirty="0"/>
+          </a:p>
+          <a:p>
+            <a:pPr indent="0" marL="0">
+              <a:buNone/>
+            </a:pPr>
+            <a:endParaRPr lang="en-US" sz="1400" dirty="0"/>
+          </a:p>
+          <a:p>
+            <a:pPr indent="0" marL="0">
+              <a:buNone/>
+            </a:pPr>
+            <a:r>
+              <a:rPr lang="en-US" sz="1400" dirty="0">
                 <a:solidFill>
                   <a:srgbClr val="FBF5E6"/>
                 </a:solidFill>
@@ -12960,123 +12730,9 @@
                 <a:ea typeface="Calibri" pitchFamily="34" charset="-122"/>
                 <a:cs typeface="Calibri" pitchFamily="34" charset="-120"/>
               </a:rPr>
-              <a:t>• 1 complainte · 1 chanson royale</a:t>
-            </a:r>
-            <a:endParaRPr lang="en-US" sz="900" dirty="0"/>
-          </a:p>
-          <a:p>
-            <a:pPr indent="0" marL="0">
-              <a:buNone/>
-            </a:pPr>
-            <a:endParaRPr lang="en-US" sz="900" dirty="0"/>
-          </a:p>
-          <a:p>
-            <a:pPr indent="0" marL="0">
-              <a:buNone/>
-            </a:pPr>
-            <a:r>
-              <a:rPr lang="en-US" sz="900" dirty="0">
-                <a:solidFill>
-                  <a:srgbClr val="FBF5E6"/>
-                </a:solidFill>
-                <a:latin typeface="Calibri" pitchFamily="34" charset="0"/>
-                <a:ea typeface="Calibri" pitchFamily="34" charset="-122"/>
-                <a:cs typeface="Calibri" pitchFamily="34" charset="-120"/>
-              </a:rPr>
-              <a:t>❖ 詩作</a:t>
-            </a:r>
-            <a:endParaRPr lang="en-US" sz="900" dirty="0"/>
-          </a:p>
-          <a:p>
-            <a:pPr indent="0" marL="0">
-              <a:buNone/>
-            </a:pPr>
-            <a:r>
-              <a:rPr lang="en-US" sz="900" dirty="0">
-                <a:solidFill>
-                  <a:srgbClr val="FBF5E6"/>
-                </a:solidFill>
-                <a:latin typeface="Calibri" pitchFamily="34" charset="0"/>
-                <a:ea typeface="Calibri" pitchFamily="34" charset="-122"/>
-                <a:cs typeface="Calibri" pitchFamily="34" charset="-120"/>
-              </a:rPr>
-              <a:t>• Remede de Fortune</a:t>
-            </a:r>
-            <a:endParaRPr lang="en-US" sz="900" dirty="0"/>
-          </a:p>
-          <a:p>
-            <a:pPr indent="0" marL="0">
-              <a:buNone/>
-            </a:pPr>
-            <a:r>
-              <a:rPr lang="en-US" sz="900" dirty="0">
-                <a:solidFill>
-                  <a:srgbClr val="FBF5E6"/>
-                </a:solidFill>
-                <a:latin typeface="Calibri" pitchFamily="34" charset="0"/>
-                <a:ea typeface="Calibri" pitchFamily="34" charset="-122"/>
-                <a:cs typeface="Calibri" pitchFamily="34" charset="-120"/>
-              </a:rPr>
-              <a:t>• Le livre du voir dit</a:t>
-            </a:r>
-            <a:endParaRPr lang="en-US" sz="900" dirty="0"/>
-          </a:p>
-          <a:p>
-            <a:pPr indent="0" marL="0">
-              <a:buNone/>
-            </a:pPr>
-            <a:r>
-              <a:rPr lang="en-US" sz="900" dirty="0">
-                <a:solidFill>
-                  <a:srgbClr val="FBF5E6"/>
-                </a:solidFill>
-                <a:latin typeface="Calibri" pitchFamily="34" charset="0"/>
-                <a:ea typeface="Calibri" pitchFamily="34" charset="-122"/>
-                <a:cs typeface="Calibri" pitchFamily="34" charset="-120"/>
-              </a:rPr>
-              <a:t>• 其他 280+ 首詩</a:t>
-            </a:r>
-            <a:endParaRPr lang="en-US" sz="900" dirty="0"/>
-          </a:p>
-          <a:p>
-            <a:pPr indent="0" marL="0">
-              <a:buNone/>
-            </a:pPr>
-            <a:endParaRPr lang="en-US" sz="900" dirty="0"/>
-          </a:p>
-          <a:p>
-            <a:pPr indent="0" marL="0">
-              <a:buNone/>
-            </a:pPr>
-            <a:r>
-              <a:rPr lang="en-US" sz="900" dirty="0">
-                <a:solidFill>
-                  <a:srgbClr val="FBF5E6"/>
-                </a:solidFill>
-                <a:latin typeface="Calibri" pitchFamily="34" charset="0"/>
-                <a:ea typeface="Calibri" pitchFamily="34" charset="-122"/>
-                <a:cs typeface="Calibri" pitchFamily="34" charset="-120"/>
-              </a:rPr>
-              <a:t>❖ 影響：Chaucer 受其啟發；</a:t>
-            </a:r>
-            <a:endParaRPr lang="en-US" sz="900" dirty="0"/>
-          </a:p>
-          <a:p>
-            <a:pPr indent="0" marL="0">
-              <a:buNone/>
-            </a:pPr>
-            <a:r>
-              <a:rPr lang="en-US" sz="900" dirty="0">
-                <a:solidFill>
-                  <a:srgbClr val="FBF5E6"/>
-                </a:solidFill>
-                <a:latin typeface="Calibri" pitchFamily="34" charset="0"/>
-                <a:ea typeface="Calibri" pitchFamily="34" charset="-122"/>
-                <a:cs typeface="Calibri" pitchFamily="34" charset="-120"/>
-              </a:rPr>
-              <a:t>  美國說唱組 Panda Bear 採樣其 rondeau</a:t>
-            </a:r>
-            <a:endParaRPr lang="en-US" sz="900" dirty="0"/>
+              <a:t>■ 影響：Chaucer 受其啟發</a:t>
+            </a:r>
+            <a:endParaRPr lang="en-US" sz="1400" dirty="0"/>
           </a:p>
         </p:txBody>
       </p:sp>
@@ -13216,7 +12872,7 @@
               <a:buNone/>
             </a:pPr>
             <a:r>
-              <a:rPr lang="en-US" sz="1300" dirty="0">
+              <a:rPr lang="en-US" sz="1400" dirty="0">
                 <a:solidFill>
                   <a:srgbClr val="E8D8A8"/>
                 </a:solidFill>
@@ -13226,7 +12882,7 @@
               </a:rPr>
               <a:t>The First Polyphonic Mass Cycle · The Three Formes Fixes</a:t>
             </a:r>
-            <a:endParaRPr lang="en-US" sz="1300" dirty="0"/>
+            <a:endParaRPr lang="en-US" sz="1400" dirty="0"/>
           </a:p>
         </p:txBody>
       </p:sp>
@@ -13295,7 +12951,7 @@
               <a:buNone/>
             </a:pPr>
             <a:r>
-              <a:rPr lang="en-US" sz="1300" b="1" dirty="0">
+              <a:rPr lang="en-US" sz="1400" b="1" dirty="0">
                 <a:solidFill>
                   <a:srgbClr val="C8A020"/>
                 </a:solidFill>
@@ -13303,9 +12959,9 @@
                 <a:ea typeface="Georgia" pitchFamily="34" charset="-122"/>
                 <a:cs typeface="Georgia" pitchFamily="34" charset="-120"/>
               </a:rPr>
-              <a:t>⛪ La Messe de Nostre Dame (ca. 1360s)</a:t>
-            </a:r>
-            <a:endParaRPr lang="en-US" sz="1300" dirty="0"/>
+              <a:t>■ La Messe de Nostre Dame (ca. 1360s)</a:t>
+            </a:r>
+            <a:endParaRPr lang="en-US" sz="1400" dirty="0"/>
           </a:p>
         </p:txBody>
       </p:sp>
@@ -13327,14 +12983,14 @@
           <a:ln/>
         </p:spPr>
         <p:txBody>
-          <a:bodyPr wrap="square" rtlCol="0" anchor="ctr"/>
-          <a:lstStyle/>
-          <a:p>
-            <a:pPr indent="0" marL="0">
-              <a:buNone/>
-            </a:pPr>
-            <a:r>
-              <a:rPr lang="en-US" sz="950" dirty="0">
+          <a:bodyPr wrap="square" rtlCol="0" anchor="t"/>
+          <a:lstStyle/>
+          <a:p>
+            <a:pPr indent="0" marL="0">
+              <a:buNone/>
+            </a:pPr>
+            <a:r>
+              <a:rPr lang="en-US" sz="1400" dirty="0">
                 <a:solidFill>
                   <a:srgbClr val="E8D8A8"/>
                 </a:solidFill>
@@ -13344,14 +13000,14 @@
               </a:rPr>
               <a:t>• 首部由單一作曲家設想為整體的常規彌撒（Mass Ordinary）複音曲</a:t>
             </a:r>
-            <a:endParaRPr lang="en-US" sz="950" dirty="0"/>
-          </a:p>
-          <a:p>
-            <a:pPr indent="0" marL="0">
-              <a:buNone/>
-            </a:pPr>
-            <a:r>
-              <a:rPr lang="en-US" sz="950" dirty="0">
+            <a:endParaRPr lang="en-US" sz="1400" dirty="0"/>
+          </a:p>
+          <a:p>
+            <a:pPr indent="0" marL="0">
+              <a:buNone/>
+            </a:pPr>
+            <a:r>
+              <a:rPr lang="en-US" sz="1400" dirty="0">
                 <a:solidFill>
                   <a:srgbClr val="E8D8A8"/>
                 </a:solidFill>
@@ -13361,14 +13017,14 @@
               </a:rPr>
               <a:t>• 4 聲部 · 加入 contratenor 與 tenor 同音域（上下互換）· 為 Reims 主教座堂聖母禮拜所作</a:t>
             </a:r>
-            <a:endParaRPr lang="en-US" sz="950" dirty="0"/>
-          </a:p>
-          <a:p>
-            <a:pPr indent="0" marL="0">
-              <a:buNone/>
-            </a:pPr>
-            <a:r>
-              <a:rPr lang="en-US" sz="950" dirty="0">
+            <a:endParaRPr lang="en-US" sz="1400" dirty="0"/>
+          </a:p>
+          <a:p>
+            <a:pPr indent="0" marL="0">
+              <a:buNone/>
+            </a:pPr>
+            <a:r>
+              <a:rPr lang="en-US" sz="1400" dirty="0">
                 <a:solidFill>
                   <a:srgbClr val="E8D8A8"/>
                 </a:solidFill>
@@ -13378,14 +13034,14 @@
               </a:rPr>
               <a:t>• Kyrie / Sanctus / Agnus Dei / Ite missa est — isorhythmic · 帶 cantus firmus</a:t>
             </a:r>
-            <a:endParaRPr lang="en-US" sz="950" dirty="0"/>
-          </a:p>
-          <a:p>
-            <a:pPr indent="0" marL="0">
-              <a:buNone/>
-            </a:pPr>
-            <a:r>
-              <a:rPr lang="en-US" sz="950" dirty="0">
+            <a:endParaRPr lang="en-US" sz="1400" dirty="0"/>
+          </a:p>
+          <a:p>
+            <a:pPr indent="0" marL="0">
+              <a:buNone/>
+            </a:pPr>
+            <a:r>
+              <a:rPr lang="en-US" sz="1400" dirty="0">
                 <a:solidFill>
                   <a:srgbClr val="E8D8A8"/>
                 </a:solidFill>
@@ -13395,14 +13051,14 @@
               </a:rPr>
               <a:t>• Gloria / Credo — discant / conductus 風格（syllabic、同節奏聲部）· Gloria 的 "Jesu Christe" 以持續和弦突顯</a:t>
             </a:r>
-            <a:endParaRPr lang="en-US" sz="950" dirty="0"/>
-          </a:p>
-          <a:p>
-            <a:pPr indent="0" marL="0">
-              <a:buNone/>
-            </a:pPr>
-            <a:r>
-              <a:rPr lang="en-US" sz="950" dirty="0">
+            <a:endParaRPr lang="en-US" sz="1400" dirty="0"/>
+          </a:p>
+          <a:p>
+            <a:pPr indent="0" marL="0">
+              <a:buNone/>
+            </a:pPr>
+            <a:r>
+              <a:rPr lang="en-US" sz="1400" dirty="0">
                 <a:solidFill>
                   <a:srgbClr val="E8D8A8"/>
                 </a:solidFill>
@@ -13412,7 +13068,7 @@
               </a:rPr>
               <a:t>• 前三樂章以 D 為調心，後三樂章以 F 為調心 —— 風格統一</a:t>
             </a:r>
-            <a:endParaRPr lang="en-US" sz="950" dirty="0"/>
+            <a:endParaRPr lang="en-US" sz="1400" dirty="0"/>
           </a:p>
         </p:txBody>
       </p:sp>
@@ -13461,7 +13117,7 @@
               <a:buNone/>
             </a:pPr>
             <a:r>
-              <a:rPr lang="en-US" sz="1200" b="1" dirty="0">
+              <a:rPr lang="en-US" sz="1400" b="1" dirty="0">
                 <a:solidFill>
                   <a:srgbClr val="C8A020"/>
                 </a:solidFill>
@@ -13469,9 +13125,9 @@
                 <a:ea typeface="Georgia" pitchFamily="34" charset="-122"/>
                 <a:cs typeface="Georgia" pitchFamily="34" charset="-120"/>
               </a:rPr>
-              <a:t>🎶 Ballade</a:t>
-            </a:r>
-            <a:endParaRPr lang="en-US" sz="1200" dirty="0"/>
+              <a:t>■ Ballade</a:t>
+            </a:r>
+            <a:endParaRPr lang="en-US" sz="1400" dirty="0"/>
           </a:p>
         </p:txBody>
       </p:sp>
@@ -13493,14 +13149,14 @@
           <a:ln/>
         </p:spPr>
         <p:txBody>
-          <a:bodyPr wrap="square" lIns="0" tIns="0" rIns="0" bIns="0" rtlCol="0" anchor="ctr"/>
-          <a:lstStyle/>
-          <a:p>
-            <a:pPr indent="0" marL="0">
-              <a:buNone/>
-            </a:pPr>
-            <a:r>
-              <a:rPr lang="en-US" sz="1100" i="1" dirty="0">
+          <a:bodyPr wrap="square" lIns="0" tIns="0" rIns="0" bIns="0" rtlCol="0" anchor="t"/>
+          <a:lstStyle/>
+          <a:p>
+            <a:pPr indent="0" marL="0">
+              <a:buNone/>
+            </a:pPr>
+            <a:r>
+              <a:rPr lang="en-US" sz="1400" i="1" dirty="0">
                 <a:solidFill>
                   <a:srgbClr val="E8D8A8"/>
                 </a:solidFill>
@@ -13510,7 +13166,7 @@
               </a:rPr>
               <a:t>aabC</a:t>
             </a:r>
-            <a:endParaRPr lang="en-US" sz="1100" dirty="0"/>
+            <a:endParaRPr lang="en-US" sz="1400" dirty="0"/>
           </a:p>
         </p:txBody>
       </p:sp>
@@ -13552,14 +13208,14 @@
           <a:ln/>
         </p:spPr>
         <p:txBody>
-          <a:bodyPr wrap="square" lIns="0" tIns="0" rIns="0" bIns="0" rtlCol="0" anchor="ctr"/>
-          <a:lstStyle/>
-          <a:p>
-            <a:pPr indent="0" marL="0">
-              <a:buNone/>
-            </a:pPr>
-            <a:r>
-              <a:rPr lang="en-US" sz="950" dirty="0">
+          <a:bodyPr wrap="square" lIns="0" tIns="0" rIns="0" bIns="0" rtlCol="0" anchor="t"/>
+          <a:lstStyle/>
+          <a:p>
+            <a:pPr indent="0" marL="0">
+              <a:buNone/>
+            </a:pPr>
+            <a:r>
+              <a:rPr lang="en-US" sz="1400" dirty="0">
                 <a:solidFill>
                   <a:srgbClr val="FBF5E6"/>
                 </a:solidFill>
@@ -13569,7 +13225,7 @@
               </a:rPr>
               <a:t>最嚴肅 · 三段詩節 · 每段結以相同副歌 C</a:t>
             </a:r>
-            <a:endParaRPr lang="en-US" sz="950" dirty="0"/>
+            <a:endParaRPr lang="en-US" sz="1400" dirty="0"/>
           </a:p>
         </p:txBody>
       </p:sp>
@@ -13591,14 +13247,14 @@
           <a:ln/>
         </p:spPr>
         <p:txBody>
-          <a:bodyPr wrap="square" lIns="0" tIns="0" rIns="0" bIns="0" rtlCol="0" anchor="ctr"/>
-          <a:lstStyle/>
-          <a:p>
-            <a:pPr indent="0" marL="0">
-              <a:buNone/>
-            </a:pPr>
-            <a:r>
-              <a:rPr lang="en-US" sz="900" i="1" dirty="0">
+          <a:bodyPr wrap="square" lIns="0" tIns="0" rIns="0" bIns="0" rtlCol="0" anchor="t"/>
+          <a:lstStyle/>
+          <a:p>
+            <a:pPr indent="0" marL="0">
+              <a:buNone/>
+            </a:pPr>
+            <a:r>
+              <a:rPr lang="en-US" sz="1400" i="1" dirty="0">
                 <a:solidFill>
                   <a:srgbClr val="E8D8A8"/>
                 </a:solidFill>
@@ -13608,7 +13264,7 @@
               </a:rPr>
               <a:t>哲學、歷史、愛情主題</a:t>
             </a:r>
-            <a:endParaRPr lang="en-US" sz="900" dirty="0"/>
+            <a:endParaRPr lang="en-US" sz="1400" dirty="0"/>
           </a:p>
         </p:txBody>
       </p:sp>
@@ -13657,7 +13313,7 @@
               <a:buNone/>
             </a:pPr>
             <a:r>
-              <a:rPr lang="en-US" sz="1200" b="1" dirty="0">
+              <a:rPr lang="en-US" sz="1400" b="1" dirty="0">
                 <a:solidFill>
                   <a:srgbClr val="C8A020"/>
                 </a:solidFill>
@@ -13665,9 +13321,9 @@
                 <a:ea typeface="Georgia" pitchFamily="34" charset="-122"/>
                 <a:cs typeface="Georgia" pitchFamily="34" charset="-120"/>
               </a:rPr>
-              <a:t>🔄 Rondeau</a:t>
-            </a:r>
-            <a:endParaRPr lang="en-US" sz="1200" dirty="0"/>
+              <a:t>■ Rondeau</a:t>
+            </a:r>
+            <a:endParaRPr lang="en-US" sz="1400" dirty="0"/>
           </a:p>
         </p:txBody>
       </p:sp>
@@ -13689,14 +13345,14 @@
           <a:ln/>
         </p:spPr>
         <p:txBody>
-          <a:bodyPr wrap="square" lIns="0" tIns="0" rIns="0" bIns="0" rtlCol="0" anchor="ctr"/>
-          <a:lstStyle/>
-          <a:p>
-            <a:pPr indent="0" marL="0">
-              <a:buNone/>
-            </a:pPr>
-            <a:r>
-              <a:rPr lang="en-US" sz="1100" i="1" dirty="0">
+          <a:bodyPr wrap="square" lIns="0" tIns="0" rIns="0" bIns="0" rtlCol="0" anchor="t"/>
+          <a:lstStyle/>
+          <a:p>
+            <a:pPr indent="0" marL="0">
+              <a:buNone/>
+            </a:pPr>
+            <a:r>
+              <a:rPr lang="en-US" sz="1400" i="1" dirty="0">
                 <a:solidFill>
                   <a:srgbClr val="E8D8A8"/>
                 </a:solidFill>
@@ -13706,7 +13362,7 @@
               </a:rPr>
               <a:t>ABaAabAB</a:t>
             </a:r>
-            <a:endParaRPr lang="en-US" sz="1100" dirty="0"/>
+            <a:endParaRPr lang="en-US" sz="1400" dirty="0"/>
           </a:p>
         </p:txBody>
       </p:sp>
@@ -13748,14 +13404,14 @@
           <a:ln/>
         </p:spPr>
         <p:txBody>
-          <a:bodyPr wrap="square" lIns="0" tIns="0" rIns="0" bIns="0" rtlCol="0" anchor="ctr"/>
-          <a:lstStyle/>
-          <a:p>
-            <a:pPr indent="0" marL="0">
-              <a:buNone/>
-            </a:pPr>
-            <a:r>
-              <a:rPr lang="en-US" sz="950" dirty="0">
+          <a:bodyPr wrap="square" lIns="0" tIns="0" rIns="0" bIns="0" rtlCol="0" anchor="t"/>
+          <a:lstStyle/>
+          <a:p>
+            <a:pPr indent="0" marL="0">
+              <a:buNone/>
+            </a:pPr>
+            <a:r>
+              <a:rPr lang="en-US" sz="1400" dirty="0">
                 <a:solidFill>
                   <a:srgbClr val="FBF5E6"/>
                 </a:solidFill>
@@ -13765,7 +13421,7 @@
               </a:rPr>
               <a:t>愛情主題 · 單一詩節 · 副歌分切穿插</a:t>
             </a:r>
-            <a:endParaRPr lang="en-US" sz="950" dirty="0"/>
+            <a:endParaRPr lang="en-US" sz="1400" dirty="0"/>
           </a:p>
         </p:txBody>
       </p:sp>
@@ -13787,14 +13443,14 @@
           <a:ln/>
         </p:spPr>
         <p:txBody>
-          <a:bodyPr wrap="square" lIns="0" tIns="0" rIns="0" bIns="0" rtlCol="0" anchor="ctr"/>
-          <a:lstStyle/>
-          <a:p>
-            <a:pPr indent="0" marL="0">
-              <a:buNone/>
-            </a:pPr>
-            <a:r>
-              <a:rPr lang="en-US" sz="900" i="1" dirty="0">
+          <a:bodyPr wrap="square" lIns="0" tIns="0" rIns="0" bIns="0" rtlCol="0" anchor="t"/>
+          <a:lstStyle/>
+          <a:p>
+            <a:pPr indent="0" marL="0">
+              <a:buNone/>
+            </a:pPr>
+            <a:r>
+              <a:rPr lang="en-US" sz="1400" i="1" dirty="0">
                 <a:solidFill>
                   <a:srgbClr val="E8D8A8"/>
                 </a:solidFill>
@@ -13804,7 +13460,7 @@
               </a:rPr>
               <a:t>Machaut: Rose, liz, printemps, verdure</a:t>
             </a:r>
-            <a:endParaRPr lang="en-US" sz="900" dirty="0"/>
+            <a:endParaRPr lang="en-US" sz="1400" dirty="0"/>
           </a:p>
         </p:txBody>
       </p:sp>
@@ -13853,7 +13509,7 @@
               <a:buNone/>
             </a:pPr>
             <a:r>
-              <a:rPr lang="en-US" sz="1200" b="1" dirty="0">
+              <a:rPr lang="en-US" sz="1400" b="1" dirty="0">
                 <a:solidFill>
                   <a:srgbClr val="C8A020"/>
                 </a:solidFill>
@@ -13861,9 +13517,9 @@
                 <a:ea typeface="Georgia" pitchFamily="34" charset="-122"/>
                 <a:cs typeface="Georgia" pitchFamily="34" charset="-120"/>
               </a:rPr>
-              <a:t>💃 Virelai</a:t>
-            </a:r>
-            <a:endParaRPr lang="en-US" sz="1200" dirty="0"/>
+              <a:t>■ Virelai</a:t>
+            </a:r>
+            <a:endParaRPr lang="en-US" sz="1400" dirty="0"/>
           </a:p>
         </p:txBody>
       </p:sp>
@@ -13885,14 +13541,14 @@
           <a:ln/>
         </p:spPr>
         <p:txBody>
-          <a:bodyPr wrap="square" lIns="0" tIns="0" rIns="0" bIns="0" rtlCol="0" anchor="ctr"/>
-          <a:lstStyle/>
-          <a:p>
-            <a:pPr indent="0" marL="0">
-              <a:buNone/>
-            </a:pPr>
-            <a:r>
-              <a:rPr lang="en-US" sz="1100" i="1" dirty="0">
+          <a:bodyPr wrap="square" lIns="0" tIns="0" rIns="0" bIns="0" rtlCol="0" anchor="t"/>
+          <a:lstStyle/>
+          <a:p>
+            <a:pPr indent="0" marL="0">
+              <a:buNone/>
+            </a:pPr>
+            <a:r>
+              <a:rPr lang="en-US" sz="1400" i="1" dirty="0">
                 <a:solidFill>
                   <a:srgbClr val="E8D8A8"/>
                 </a:solidFill>
@@ -13902,7 +13558,7 @@
               </a:rPr>
               <a:t>AbbaA...</a:t>
             </a:r>
-            <a:endParaRPr lang="en-US" sz="1100" dirty="0"/>
+            <a:endParaRPr lang="en-US" sz="1400" dirty="0"/>
           </a:p>
         </p:txBody>
       </p:sp>
@@ -13944,14 +13600,14 @@
           <a:ln/>
         </p:spPr>
         <p:txBody>
-          <a:bodyPr wrap="square" lIns="0" tIns="0" rIns="0" bIns="0" rtlCol="0" anchor="ctr"/>
-          <a:lstStyle/>
-          <a:p>
-            <a:pPr indent="0" marL="0">
-              <a:buNone/>
-            </a:pPr>
-            <a:r>
-              <a:rPr lang="en-US" sz="950" dirty="0">
+          <a:bodyPr wrap="square" lIns="0" tIns="0" rIns="0" bIns="0" rtlCol="0" anchor="t"/>
+          <a:lstStyle/>
+          <a:p>
+            <a:pPr indent="0" marL="0">
+              <a:buNone/>
+            </a:pPr>
+            <a:r>
+              <a:rPr lang="en-US" sz="1400" dirty="0">
                 <a:solidFill>
                   <a:srgbClr val="FBF5E6"/>
                 </a:solidFill>
@@ -13961,7 +13617,7 @@
               </a:rPr>
               <a:t>自然景物 + 愛情 · chanson baladée 「跳舞的歌」</a:t>
             </a:r>
-            <a:endParaRPr lang="en-US" sz="950" dirty="0"/>
+            <a:endParaRPr lang="en-US" sz="1400" dirty="0"/>
           </a:p>
         </p:txBody>
       </p:sp>
@@ -13983,14 +13639,14 @@
           <a:ln/>
         </p:spPr>
         <p:txBody>
-          <a:bodyPr wrap="square" lIns="0" tIns="0" rIns="0" bIns="0" rtlCol="0" anchor="ctr"/>
-          <a:lstStyle/>
-          <a:p>
-            <a:pPr indent="0" marL="0">
-              <a:buNone/>
-            </a:pPr>
-            <a:r>
-              <a:rPr lang="en-US" sz="900" i="1" dirty="0">
+          <a:bodyPr wrap="square" lIns="0" tIns="0" rIns="0" bIns="0" rtlCol="0" anchor="t"/>
+          <a:lstStyle/>
+          <a:p>
+            <a:pPr indent="0" marL="0">
+              <a:buNone/>
+            </a:pPr>
+            <a:r>
+              <a:rPr lang="en-US" sz="1400" i="1" dirty="0">
                 <a:solidFill>
                   <a:srgbClr val="E8D8A8"/>
                 </a:solidFill>
@@ -14000,7 +13656,7 @@
               </a:rPr>
               <a:t>Machaut: Douce dame jolie</a:t>
             </a:r>
-            <a:endParaRPr lang="en-US" sz="900" dirty="0"/>
+            <a:endParaRPr lang="en-US" sz="1400" dirty="0"/>
           </a:p>
         </p:txBody>
       </p:sp>
@@ -14133,14 +13789,14 @@
           <a:ln/>
         </p:spPr>
         <p:txBody>
-          <a:bodyPr wrap="square" rtlCol="0" anchor="ctr"/>
-          <a:lstStyle/>
-          <a:p>
-            <a:pPr indent="0" marL="0">
-              <a:buNone/>
-            </a:pPr>
-            <a:r>
-              <a:rPr lang="en-US" sz="1200" dirty="0">
+          <a:bodyPr wrap="square" rtlCol="0" anchor="t"/>
+          <a:lstStyle/>
+          <a:p>
+            <a:pPr indent="0" marL="0">
+              <a:buNone/>
+            </a:pPr>
+            <a:r>
+              <a:rPr lang="en-US" sz="1400" dirty="0">
                 <a:solidFill>
                   <a:srgbClr val="5C3A28"/>
                 </a:solidFill>
@@ -14150,7 +13806,7 @@
               </a:rPr>
               <a:t>"The More Subtle Manner" · Late 14th Century · Avignon &amp; N. Italy</a:t>
             </a:r>
-            <a:endParaRPr lang="en-US" sz="1200" dirty="0"/>
+            <a:endParaRPr lang="en-US" sz="1400" dirty="0"/>
           </a:p>
         </p:txBody>
       </p:sp>
@@ -14219,7 +13875,7 @@
               <a:buNone/>
             </a:pPr>
             <a:r>
-              <a:rPr lang="en-US" sz="1300" b="1" dirty="0">
+              <a:rPr lang="en-US" sz="1400" b="1" dirty="0">
                 <a:solidFill>
                   <a:srgbClr val="C8A020"/>
                 </a:solidFill>
@@ -14227,9 +13883,9 @@
                 <a:ea typeface="Georgia" pitchFamily="34" charset="-122"/>
                 <a:cs typeface="Georgia" pitchFamily="34" charset="-120"/>
               </a:rPr>
-              <a:t>🎭 背景 Context</a:t>
-            </a:r>
-            <a:endParaRPr lang="en-US" sz="1300" dirty="0"/>
+              <a:t>■ 背景 Context</a:t>
+            </a:r>
+            <a:endParaRPr lang="en-US" sz="1400" dirty="0"/>
           </a:p>
         </p:txBody>
       </p:sp>
@@ -14251,14 +13907,14 @@
           <a:ln/>
         </p:spPr>
         <p:txBody>
-          <a:bodyPr wrap="square" rtlCol="0" anchor="ctr"/>
-          <a:lstStyle/>
-          <a:p>
-            <a:pPr indent="0" marL="0">
-              <a:buNone/>
-            </a:pPr>
-            <a:r>
-              <a:rPr lang="en-US" sz="1000" dirty="0">
+          <a:bodyPr wrap="square" rtlCol="0" anchor="t"/>
+          <a:lstStyle/>
+          <a:p>
+            <a:pPr indent="0" marL="0">
+              <a:buNone/>
+            </a:pPr>
+            <a:r>
+              <a:rPr lang="en-US" sz="1400" dirty="0">
                 <a:solidFill>
                   <a:srgbClr val="FBF5E6"/>
                 </a:solidFill>
@@ -14268,14 +13924,14 @@
               </a:rPr>
               <a:t>• 名稱由音樂學家 Ursula Günther 所創——源自 Philipoctus de Caserta 論文中的</a:t>
             </a:r>
-            <a:endParaRPr lang="en-US" sz="1000" dirty="0"/>
-          </a:p>
-          <a:p>
-            <a:pPr indent="0" marL="0">
-              <a:buNone/>
-            </a:pPr>
-            <a:r>
-              <a:rPr lang="en-US" sz="1000" dirty="0">
+            <a:endParaRPr lang="en-US" sz="1400" dirty="0"/>
+          </a:p>
+          <a:p>
+            <a:pPr indent="0" marL="0">
+              <a:buNone/>
+            </a:pPr>
+            <a:r>
+              <a:rPr lang="en-US" sz="1400" dirty="0">
                 <a:solidFill>
                   <a:srgbClr val="FBF5E6"/>
                 </a:solidFill>
@@ -14285,14 +13941,14 @@
               </a:rPr>
               <a:t>  「artem magis subtiliter」（更細緻的方式）</a:t>
             </a:r>
-            <a:endParaRPr lang="en-US" sz="1000" dirty="0"/>
-          </a:p>
-          <a:p>
-            <a:pPr indent="0" marL="0">
-              <a:buNone/>
-            </a:pPr>
-            <a:r>
-              <a:rPr lang="en-US" sz="1000" dirty="0">
+            <a:endParaRPr lang="en-US" sz="1400" dirty="0"/>
+          </a:p>
+          <a:p>
+            <a:pPr indent="0" marL="0">
+              <a:buNone/>
+            </a:pPr>
+            <a:r>
+              <a:rPr lang="en-US" sz="1400" dirty="0">
                 <a:solidFill>
                   <a:srgbClr val="FBF5E6"/>
                 </a:solidFill>
@@ -14302,14 +13958,14 @@
               </a:rPr>
               <a:t>• 矛盾地，亞維農教皇宮廷成為世俗音樂的主要贊助中心</a:t>
             </a:r>
-            <a:endParaRPr lang="en-US" sz="1000" dirty="0"/>
-          </a:p>
-          <a:p>
-            <a:pPr indent="0" marL="0">
-              <a:buNone/>
-            </a:pPr>
-            <a:r>
-              <a:rPr lang="en-US" sz="1000" dirty="0">
+            <a:endParaRPr lang="en-US" sz="1400" dirty="0"/>
+          </a:p>
+          <a:p>
+            <a:pPr indent="0" marL="0">
+              <a:buNone/>
+            </a:pPr>
+            <a:r>
+              <a:rPr lang="en-US" sz="1400" dirty="0">
                 <a:solidFill>
                   <a:srgbClr val="FBF5E6"/>
                 </a:solidFill>
@@ -14319,14 +13975,14 @@
               </a:rPr>
               <a:t>• 主要體裁：以 ballade 為主的 formes fixes chansons</a:t>
             </a:r>
-            <a:endParaRPr lang="en-US" sz="1000" dirty="0"/>
-          </a:p>
-          <a:p>
-            <a:pPr indent="0" marL="0">
-              <a:buNone/>
-            </a:pPr>
-            <a:r>
-              <a:rPr lang="en-US" sz="1000" dirty="0">
+            <a:endParaRPr lang="en-US" sz="1400" dirty="0"/>
+          </a:p>
+          <a:p>
+            <a:pPr indent="0" marL="0">
+              <a:buNone/>
+            </a:pPr>
+            <a:r>
+              <a:rPr lang="en-US" sz="1400" dirty="0">
                 <a:solidFill>
                   <a:srgbClr val="FBF5E6"/>
                 </a:solidFill>
@@ -14336,7 +13992,7 @@
               </a:rPr>
               <a:t>• 對象：貴族、教士、博學的鑑賞家——極端精緻的藝術品</a:t>
             </a:r>
-            <a:endParaRPr lang="en-US" sz="1000" dirty="0"/>
+            <a:endParaRPr lang="en-US" sz="1400" dirty="0"/>
           </a:p>
         </p:txBody>
       </p:sp>
@@ -14385,7 +14041,7 @@
               <a:buNone/>
             </a:pPr>
             <a:r>
-              <a:rPr lang="en-US" sz="1300" b="1" dirty="0">
+              <a:rPr lang="en-US" sz="1400" b="1" dirty="0">
                 <a:solidFill>
                   <a:srgbClr val="C8A020"/>
                 </a:solidFill>
@@ -14393,9 +14049,9 @@
                 <a:ea typeface="Georgia" pitchFamily="34" charset="-122"/>
                 <a:cs typeface="Georgia" pitchFamily="34" charset="-120"/>
               </a:rPr>
-              <a:t>🔬 特徵 Features</a:t>
-            </a:r>
-            <a:endParaRPr lang="en-US" sz="1300" dirty="0"/>
+              <a:t>■ 特徵 Features</a:t>
+            </a:r>
+            <a:endParaRPr lang="en-US" sz="1400" dirty="0"/>
           </a:p>
         </p:txBody>
       </p:sp>
@@ -14417,14 +14073,14 @@
           <a:ln/>
         </p:spPr>
         <p:txBody>
-          <a:bodyPr wrap="square" rtlCol="0" anchor="ctr"/>
-          <a:lstStyle/>
-          <a:p>
-            <a:pPr indent="0" marL="0">
-              <a:buNone/>
-            </a:pPr>
-            <a:r>
-              <a:rPr lang="en-US" sz="950" dirty="0">
+          <a:bodyPr wrap="square" rtlCol="0" anchor="t"/>
+          <a:lstStyle/>
+          <a:p>
+            <a:pPr indent="0" marL="0">
+              <a:buNone/>
+            </a:pPr>
+            <a:r>
+              <a:rPr lang="en-US" sz="1400" dirty="0">
                 <a:solidFill>
                   <a:srgbClr val="FBF5E6"/>
                 </a:solidFill>
@@ -14434,14 +14090,14 @@
               </a:rPr>
               <a:t>• 節奏複雜度達頂峰——直到 20 世紀才再見</a:t>
             </a:r>
-            <a:endParaRPr lang="en-US" sz="950" dirty="0"/>
-          </a:p>
-          <a:p>
-            <a:pPr indent="0" marL="0">
-              <a:buNone/>
-            </a:pPr>
-            <a:r>
-              <a:rPr lang="en-US" sz="950" dirty="0">
+            <a:endParaRPr lang="en-US" sz="1400" dirty="0"/>
+          </a:p>
+          <a:p>
+            <a:pPr indent="0" marL="0">
+              <a:buNone/>
+            </a:pPr>
+            <a:r>
+              <a:rPr lang="en-US" sz="1400" dirty="0">
                 <a:solidFill>
                   <a:srgbClr val="FBF5E6"/>
                 </a:solidFill>
@@ -14451,14 +14107,14 @@
               </a:rPr>
               <a:t>  Rhythmic complexity unseen again until the 20th century</a:t>
             </a:r>
-            <a:endParaRPr lang="en-US" sz="950" dirty="0"/>
-          </a:p>
-          <a:p>
-            <a:pPr indent="0" marL="0">
-              <a:buNone/>
-            </a:pPr>
-            <a:r>
-              <a:rPr lang="en-US" sz="950" dirty="0">
+            <a:endParaRPr lang="en-US" sz="1400" dirty="0"/>
+          </a:p>
+          <a:p>
+            <a:pPr indent="0" marL="0">
+              <a:buNone/>
+            </a:pPr>
+            <a:r>
+              <a:rPr lang="en-US" sz="1400" dirty="0">
                 <a:solidFill>
                   <a:srgbClr val="FBF5E6"/>
                 </a:solidFill>
@@ -14468,14 +14124,14 @@
               </a:rPr>
               <a:t>• 多重拍號同時進行、hemiolas、鏈式切分音、刻意模糊的和聲</a:t>
             </a:r>
-            <a:endParaRPr lang="en-US" sz="950" dirty="0"/>
-          </a:p>
-          <a:p>
-            <a:pPr indent="0" marL="0">
-              <a:buNone/>
-            </a:pPr>
-            <a:r>
-              <a:rPr lang="en-US" sz="950" dirty="0">
+            <a:endParaRPr lang="en-US" sz="1400" dirty="0"/>
+          </a:p>
+          <a:p>
+            <a:pPr indent="0" marL="0">
+              <a:buNone/>
+            </a:pPr>
+            <a:r>
+              <a:rPr lang="en-US" sz="1400" dirty="0">
                 <a:solidFill>
                   <a:srgbClr val="FBF5E6"/>
                 </a:solidFill>
@@ -14485,14 +14141,14 @@
               </a:rPr>
               <a:t>• 記譜特技：紅色與黑色音符交錯、以心形寫成情歌、以圓形寫成卡農</a:t>
             </a:r>
-            <a:endParaRPr lang="en-US" sz="950" dirty="0"/>
-          </a:p>
-          <a:p>
-            <a:pPr indent="0" marL="0">
-              <a:buNone/>
-            </a:pPr>
-            <a:r>
-              <a:rPr lang="en-US" sz="950" dirty="0">
+            <a:endParaRPr lang="en-US" sz="1400" dirty="0"/>
+          </a:p>
+          <a:p>
+            <a:pPr indent="0" marL="0">
+              <a:buNone/>
+            </a:pPr>
+            <a:r>
+              <a:rPr lang="en-US" sz="1400" dirty="0">
                 <a:solidFill>
                   <a:srgbClr val="FBF5E6"/>
                 </a:solidFill>
@@ -14502,14 +14158,14 @@
               </a:rPr>
               <a:t>• Philipoctus de Caserta — En remirant vo douce pourtraiture（NAWM 28）</a:t>
             </a:r>
-            <a:endParaRPr lang="en-US" sz="950" dirty="0"/>
-          </a:p>
-          <a:p>
-            <a:pPr indent="0" marL="0">
-              <a:buNone/>
-            </a:pPr>
-            <a:r>
-              <a:rPr lang="en-US" sz="950" dirty="0">
+            <a:endParaRPr lang="en-US" sz="1400" dirty="0"/>
+          </a:p>
+          <a:p>
+            <a:pPr indent="0" marL="0">
+              <a:buNone/>
+            </a:pPr>
+            <a:r>
+              <a:rPr lang="en-US" sz="1400" dirty="0">
                 <a:solidFill>
                   <a:srgbClr val="FBF5E6"/>
                 </a:solidFill>
@@ -14519,14 +14175,14 @@
               </a:rPr>
               <a:t>• 同時期北法樂師行會發展出較簡單的世俗複音——描繪市井、狩獵等日常場景</a:t>
             </a:r>
-            <a:endParaRPr lang="en-US" sz="950" dirty="0"/>
-          </a:p>
-          <a:p>
-            <a:pPr indent="0" marL="0">
-              <a:buNone/>
-            </a:pPr>
-            <a:r>
-              <a:rPr lang="en-US" sz="950" dirty="0">
+            <a:endParaRPr lang="en-US" sz="1400" dirty="0"/>
+          </a:p>
+          <a:p>
+            <a:pPr indent="0" marL="0">
+              <a:buNone/>
+            </a:pPr>
+            <a:r>
+              <a:rPr lang="en-US" sz="1400" dirty="0">
                 <a:solidFill>
                   <a:srgbClr val="FBF5E6"/>
                 </a:solidFill>
@@ -14536,7 +14192,7 @@
               </a:rPr>
               <a:t>• 此風格僅流行一代人——20 世紀作曲家如 Messiaen、Ligeti 受其啟發</a:t>
             </a:r>
-            <a:endParaRPr lang="en-US" sz="950" dirty="0"/>
+            <a:endParaRPr lang="en-US" sz="1400" dirty="0"/>
           </a:p>
         </p:txBody>
       </p:sp>
@@ -14676,7 +14332,7 @@
               <a:buNone/>
             </a:pPr>
             <a:r>
-              <a:rPr lang="en-US" sz="1300" dirty="0">
+              <a:rPr lang="en-US" sz="1400" dirty="0">
                 <a:solidFill>
                   <a:srgbClr val="E8D8A8"/>
                 </a:solidFill>
@@ -14686,7 +14342,7 @@
               </a:rPr>
               <a:t>Italian Music of the Fourteenth Century · The Trecento</a:t>
             </a:r>
-            <a:endParaRPr lang="en-US" sz="1300" dirty="0"/>
+            <a:endParaRPr lang="en-US" sz="1400" dirty="0"/>
           </a:p>
         </p:txBody>
       </p:sp>
@@ -14755,7 +14411,7 @@
               <a:buNone/>
             </a:pPr>
             <a:r>
-              <a:rPr lang="en-US" sz="1200" b="1" dirty="0">
+              <a:rPr lang="en-US" sz="1400" b="1" dirty="0">
                 <a:solidFill>
                   <a:srgbClr val="C8A020"/>
                 </a:solidFill>
@@ -14763,9 +14419,9 @@
                 <a:ea typeface="Georgia" pitchFamily="34" charset="-122"/>
                 <a:cs typeface="Georgia" pitchFamily="34" charset="-120"/>
               </a:rPr>
-              <a:t>🇮🇹 背景：義大利是城邦聯合體，Trecento = "mille trecento" = 1300 年代</a:t>
-            </a:r>
-            <a:endParaRPr lang="en-US" sz="1200" dirty="0"/>
+              <a:t>IT 背景：義大利是城邦聯合體，Trecento = "mille trecento" = 1300 年代</a:t>
+            </a:r>
+            <a:endParaRPr lang="en-US" sz="1400" dirty="0"/>
           </a:p>
         </p:txBody>
       </p:sp>
@@ -14787,14 +14443,14 @@
           <a:ln/>
         </p:spPr>
         <p:txBody>
-          <a:bodyPr wrap="square" rtlCol="0" anchor="ctr"/>
-          <a:lstStyle/>
-          <a:p>
-            <a:pPr indent="0" marL="0">
-              <a:buNone/>
-            </a:pPr>
-            <a:r>
-              <a:rPr lang="en-US" sz="950" dirty="0">
+          <a:bodyPr wrap="square" rtlCol="0" anchor="t"/>
+          <a:lstStyle/>
+          <a:p>
+            <a:pPr indent="0" marL="0">
+              <a:buNone/>
+            </a:pPr>
+            <a:r>
+              <a:rPr lang="en-US" sz="1400" dirty="0">
                 <a:solidFill>
                   <a:srgbClr val="E8D8A8"/>
                 </a:solidFill>
@@ -14804,14 +14460,14 @@
               </a:rPr>
               <a:t>• 主要中心：Bologna、Padua、Milan、Perugia、Naples——尤其是佛羅倫斯</a:t>
             </a:r>
-            <a:endParaRPr lang="en-US" sz="950" dirty="0"/>
-          </a:p>
-          <a:p>
-            <a:pPr indent="0" marL="0">
-              <a:buNone/>
-            </a:pPr>
-            <a:r>
-              <a:rPr lang="en-US" sz="950" dirty="0">
+            <a:endParaRPr lang="en-US" sz="1400" dirty="0"/>
+          </a:p>
+          <a:p>
+            <a:pPr indent="0" marL="0">
+              <a:buNone/>
+            </a:pPr>
+            <a:r>
+              <a:rPr lang="en-US" sz="1400" dirty="0">
                 <a:solidFill>
                   <a:srgbClr val="E8D8A8"/>
                 </a:solidFill>
@@ -14821,14 +14477,14 @@
               </a:rPr>
               <a:t>• 義大利的記譜系統與法國不同：breve 可分為 2/3/4/6/8/9/12 semibreves；以點代替小節線</a:t>
             </a:r>
-            <a:endParaRPr lang="en-US" sz="950" dirty="0"/>
-          </a:p>
-          <a:p>
-            <a:pPr indent="0" marL="0">
-              <a:buNone/>
-            </a:pPr>
-            <a:r>
-              <a:rPr lang="en-US" sz="950" dirty="0">
+            <a:endParaRPr lang="en-US" sz="1400" dirty="0"/>
+          </a:p>
+          <a:p>
+            <a:pPr indent="0" marL="0">
+              <a:buNone/>
+            </a:pPr>
+            <a:r>
+              <a:rPr lang="en-US" sz="1400" dirty="0">
                 <a:solidFill>
                   <a:srgbClr val="E8D8A8"/>
                 </a:solidFill>
@@ -14838,7 +14494,7 @@
               </a:rPr>
               <a:t>• 教會複音多為即興 · 現存主要是世俗歌曲——為菁英觀眾創作</a:t>
             </a:r>
-            <a:endParaRPr lang="en-US" sz="950" dirty="0"/>
+            <a:endParaRPr lang="en-US" sz="1400" dirty="0"/>
           </a:p>
         </p:txBody>
       </p:sp>
@@ -14887,7 +14543,7 @@
               <a:buNone/>
             </a:pPr>
             <a:r>
-              <a:rPr lang="en-US" sz="1200" b="1" dirty="0">
+              <a:rPr lang="en-US" sz="1400" b="1" dirty="0">
                 <a:solidFill>
                   <a:srgbClr val="C8A020"/>
                 </a:solidFill>
@@ -14895,9 +14551,9 @@
                 <a:ea typeface="Georgia" pitchFamily="34" charset="-122"/>
                 <a:cs typeface="Georgia" pitchFamily="34" charset="-120"/>
               </a:rPr>
-              <a:t>🎵 Madrigal</a:t>
-            </a:r>
-            <a:endParaRPr lang="en-US" sz="1200" dirty="0"/>
+              <a:t>■ Madrigal</a:t>
+            </a:r>
+            <a:endParaRPr lang="en-US" sz="1400" dirty="0"/>
           </a:p>
         </p:txBody>
       </p:sp>
@@ -14919,14 +14575,14 @@
           <a:ln/>
         </p:spPr>
         <p:txBody>
-          <a:bodyPr wrap="square" rtlCol="0" anchor="ctr"/>
-          <a:lstStyle/>
-          <a:p>
-            <a:pPr indent="0" marL="0">
-              <a:buNone/>
-            </a:pPr>
-            <a:r>
-              <a:rPr lang="en-US" sz="900" i="1" dirty="0">
+          <a:bodyPr wrap="square" rtlCol="0" anchor="t"/>
+          <a:lstStyle/>
+          <a:p>
+            <a:pPr indent="0" marL="0">
+              <a:buNone/>
+            </a:pPr>
+            <a:r>
+              <a:rPr lang="en-US" sz="1400" i="1" dirty="0">
                 <a:solidFill>
                   <a:srgbClr val="E8D8A8"/>
                 </a:solidFill>
@@ -14936,7 +14592,7 @@
               </a:rPr>
               <a:t>14 世紀的牧歌</a:t>
             </a:r>
-            <a:endParaRPr lang="en-US" sz="900" dirty="0"/>
+            <a:endParaRPr lang="en-US" sz="1400" dirty="0"/>
           </a:p>
         </p:txBody>
       </p:sp>
@@ -14978,14 +14634,14 @@
           <a:ln/>
         </p:spPr>
         <p:txBody>
-          <a:bodyPr wrap="square" rtlCol="0" anchor="ctr"/>
-          <a:lstStyle/>
-          <a:p>
-            <a:pPr indent="0" marL="0">
-              <a:buNone/>
-            </a:pPr>
-            <a:r>
-              <a:rPr lang="en-US" sz="850" dirty="0">
+          <a:bodyPr wrap="square" rtlCol="0" anchor="t"/>
+          <a:lstStyle/>
+          <a:p>
+            <a:pPr indent="0" marL="0">
+              <a:buNone/>
+            </a:pPr>
+            <a:r>
+              <a:rPr lang="en-US" sz="1400" dirty="0">
                 <a:solidFill>
                   <a:srgbClr val="FBF5E6"/>
                 </a:solidFill>
@@ -14995,14 +14651,14 @@
               </a:rPr>
               <a:t>兩到三聲部 · 全部聲部唱相同歌詞</a:t>
             </a:r>
-            <a:endParaRPr lang="en-US" sz="850" dirty="0"/>
-          </a:p>
-          <a:p>
-            <a:pPr indent="0" marL="0">
-              <a:buNone/>
-            </a:pPr>
-            <a:r>
-              <a:rPr lang="en-US" sz="850" dirty="0">
+            <a:endParaRPr lang="en-US" sz="1400" dirty="0"/>
+          </a:p>
+          <a:p>
+            <a:pPr indent="0" marL="0">
+              <a:buNone/>
+            </a:pPr>
+            <a:r>
+              <a:rPr lang="en-US" sz="1400" dirty="0">
                 <a:solidFill>
                   <a:srgbClr val="FBF5E6"/>
                 </a:solidFill>
@@ -15012,14 +14668,14 @@
               </a:rPr>
               <a:t>• 詩節結構：aa b（ritornello 尾韻）</a:t>
             </a:r>
-            <a:endParaRPr lang="en-US" sz="850" dirty="0"/>
-          </a:p>
-          <a:p>
-            <a:pPr indent="0" marL="0">
-              <a:buNone/>
-            </a:pPr>
-            <a:r>
-              <a:rPr lang="en-US" sz="850" dirty="0">
+            <a:endParaRPr lang="en-US" sz="1400" dirty="0"/>
+          </a:p>
+          <a:p>
+            <a:pPr indent="0" marL="0">
+              <a:buNone/>
+            </a:pPr>
+            <a:r>
+              <a:rPr lang="en-US" sz="1400" dirty="0">
                 <a:solidFill>
                   <a:srgbClr val="FBF5E6"/>
                 </a:solidFill>
@@ -15029,14 +14685,14 @@
               </a:rPr>
               <a:t>• 田園、諷刺、或情詩主題</a:t>
             </a:r>
-            <a:endParaRPr lang="en-US" sz="850" dirty="0"/>
-          </a:p>
-          <a:p>
-            <a:pPr indent="0" marL="0">
-              <a:buNone/>
-            </a:pPr>
-            <a:r>
-              <a:rPr lang="en-US" sz="850" dirty="0">
+            <a:endParaRPr lang="en-US" sz="1400" dirty="0"/>
+          </a:p>
+          <a:p>
+            <a:pPr indent="0" marL="0">
+              <a:buNone/>
+            </a:pPr>
+            <a:r>
+              <a:rPr lang="en-US" sz="1400" dirty="0">
                 <a:solidFill>
                   <a:srgbClr val="FBF5E6"/>
                 </a:solidFill>
@@ -15046,7 +14702,7 @@
               </a:rPr>
               <a:t>• Jacopo da Bologna: Non al suo amante（NAWM 29）</a:t>
             </a:r>
-            <a:endParaRPr lang="en-US" sz="850" dirty="0"/>
+            <a:endParaRPr lang="en-US" sz="1400" dirty="0"/>
           </a:p>
         </p:txBody>
       </p:sp>
@@ -15095,7 +14751,7 @@
               <a:buNone/>
             </a:pPr>
             <a:r>
-              <a:rPr lang="en-US" sz="1200" b="1" dirty="0">
+              <a:rPr lang="en-US" sz="1400" b="1" dirty="0">
                 <a:solidFill>
                   <a:srgbClr val="C8A020"/>
                 </a:solidFill>
@@ -15103,9 +14759,9 @@
                 <a:ea typeface="Georgia" pitchFamily="34" charset="-122"/>
                 <a:cs typeface="Georgia" pitchFamily="34" charset="-120"/>
               </a:rPr>
-              <a:t>🐎 Caccia</a:t>
-            </a:r>
-            <a:endParaRPr lang="en-US" sz="1200" dirty="0"/>
+              <a:t>■ Caccia</a:t>
+            </a:r>
+            <a:endParaRPr lang="en-US" sz="1400" dirty="0"/>
           </a:p>
         </p:txBody>
       </p:sp>
@@ -15127,14 +14783,14 @@
           <a:ln/>
         </p:spPr>
         <p:txBody>
-          <a:bodyPr wrap="square" rtlCol="0" anchor="ctr"/>
-          <a:lstStyle/>
-          <a:p>
-            <a:pPr indent="0" marL="0">
-              <a:buNone/>
-            </a:pPr>
-            <a:r>
-              <a:rPr lang="en-US" sz="900" i="1" dirty="0">
+          <a:bodyPr wrap="square" rtlCol="0" anchor="t"/>
+          <a:lstStyle/>
+          <a:p>
+            <a:pPr indent="0" marL="0">
+              <a:buNone/>
+            </a:pPr>
+            <a:r>
+              <a:rPr lang="en-US" sz="1400" i="1" dirty="0">
                 <a:solidFill>
                   <a:srgbClr val="E8D8A8"/>
                 </a:solidFill>
@@ -15144,7 +14800,7 @@
               </a:rPr>
               <a:t>狩獵歌</a:t>
             </a:r>
-            <a:endParaRPr lang="en-US" sz="900" dirty="0"/>
+            <a:endParaRPr lang="en-US" sz="1400" dirty="0"/>
           </a:p>
         </p:txBody>
       </p:sp>
@@ -15186,14 +14842,14 @@
           <a:ln/>
         </p:spPr>
         <p:txBody>
-          <a:bodyPr wrap="square" rtlCol="0" anchor="ctr"/>
-          <a:lstStyle/>
-          <a:p>
-            <a:pPr indent="0" marL="0">
-              <a:buNone/>
-            </a:pPr>
-            <a:r>
-              <a:rPr lang="en-US" sz="850" dirty="0">
+          <a:bodyPr wrap="square" rtlCol="0" anchor="t"/>
+          <a:lstStyle/>
+          <a:p>
+            <a:pPr indent="0" marL="0">
+              <a:buNone/>
+            </a:pPr>
+            <a:r>
+              <a:rPr lang="en-US" sz="1400" dirty="0">
                 <a:solidFill>
                   <a:srgbClr val="FBF5E6"/>
                 </a:solidFill>
@@ -15203,14 +14859,14 @@
               </a:rPr>
               <a:t>字面意為「狩獵」· 上兩聲部嚴格卡農</a:t>
             </a:r>
-            <a:endParaRPr lang="en-US" sz="850" dirty="0"/>
-          </a:p>
-          <a:p>
-            <a:pPr indent="0" marL="0">
-              <a:buNone/>
-            </a:pPr>
-            <a:r>
-              <a:rPr lang="en-US" sz="850" dirty="0">
+            <a:endParaRPr lang="en-US" sz="1400" dirty="0"/>
+          </a:p>
+          <a:p>
+            <a:pPr indent="0" marL="0">
+              <a:buNone/>
+            </a:pPr>
+            <a:r>
+              <a:rPr lang="en-US" sz="1400" dirty="0">
                 <a:solidFill>
                   <a:srgbClr val="FBF5E6"/>
                 </a:solidFill>
@@ -15220,14 +14876,14 @@
               </a:rPr>
               <a:t>• 下方 untexted tenor 緩慢支持</a:t>
             </a:r>
-            <a:endParaRPr lang="en-US" sz="850" dirty="0"/>
-          </a:p>
-          <a:p>
-            <a:pPr indent="0" marL="0">
-              <a:buNone/>
-            </a:pPr>
-            <a:r>
-              <a:rPr lang="en-US" sz="850" dirty="0">
+            <a:endParaRPr lang="en-US" sz="1400" dirty="0"/>
+          </a:p>
+          <a:p>
+            <a:pPr indent="0" marL="0">
+              <a:buNone/>
+            </a:pPr>
+            <a:r>
+              <a:rPr lang="en-US" sz="1400" dirty="0">
                 <a:solidFill>
                   <a:srgbClr val="FBF5E6"/>
                 </a:solidFill>
@@ -15237,14 +14893,14 @@
               </a:rPr>
               <a:t>• 主題：狩獵、市集、戰鬥——</a:t>
             </a:r>
-            <a:endParaRPr lang="en-US" sz="850" dirty="0"/>
-          </a:p>
-          <a:p>
-            <a:pPr indent="0" marL="0">
-              <a:buNone/>
-            </a:pPr>
-            <a:r>
-              <a:rPr lang="en-US" sz="850" dirty="0">
+            <a:endParaRPr lang="en-US" sz="1400" dirty="0"/>
+          </a:p>
+          <a:p>
+            <a:pPr indent="0" marL="0">
+              <a:buNone/>
+            </a:pPr>
+            <a:r>
+              <a:rPr lang="en-US" sz="1400" dirty="0">
                 <a:solidFill>
                   <a:srgbClr val="FBF5E6"/>
                 </a:solidFill>
@@ -15254,14 +14910,14 @@
               </a:rPr>
               <a:t>  生動的對話與回聲 · 常用 hocket</a:t>
             </a:r>
-            <a:endParaRPr lang="en-US" sz="850" dirty="0"/>
-          </a:p>
-          <a:p>
-            <a:pPr indent="0" marL="0">
-              <a:buNone/>
-            </a:pPr>
-            <a:r>
-              <a:rPr lang="en-US" sz="850" dirty="0">
+            <a:endParaRPr lang="en-US" sz="1400" dirty="0"/>
+          </a:p>
+          <a:p>
+            <a:pPr indent="0" marL="0">
+              <a:buNone/>
+            </a:pPr>
+            <a:r>
+              <a:rPr lang="en-US" sz="1400" dirty="0">
                 <a:solidFill>
                   <a:srgbClr val="FBF5E6"/>
                 </a:solidFill>
@@ -15271,7 +14927,7 @@
               </a:rPr>
               <a:t>• Landini: Così pensoso（NAWM 30）</a:t>
             </a:r>
-            <a:endParaRPr lang="en-US" sz="850" dirty="0"/>
+            <a:endParaRPr lang="en-US" sz="1400" dirty="0"/>
           </a:p>
         </p:txBody>
       </p:sp>
@@ -15320,7 +14976,7 @@
               <a:buNone/>
             </a:pPr>
             <a:r>
-              <a:rPr lang="en-US" sz="1200" b="1" dirty="0">
+              <a:rPr lang="en-US" sz="1400" b="1" dirty="0">
                 <a:solidFill>
                   <a:srgbClr val="C8A020"/>
                 </a:solidFill>
@@ -15328,9 +14984,9 @@
                 <a:ea typeface="Georgia" pitchFamily="34" charset="-122"/>
                 <a:cs typeface="Georgia" pitchFamily="34" charset="-120"/>
               </a:rPr>
-              <a:t>💃 Ballata</a:t>
-            </a:r>
-            <a:endParaRPr lang="en-US" sz="1200" dirty="0"/>
+              <a:t>■ Ballata</a:t>
+            </a:r>
+            <a:endParaRPr lang="en-US" sz="1400" dirty="0"/>
           </a:p>
         </p:txBody>
       </p:sp>
@@ -15352,14 +15008,14 @@
           <a:ln/>
         </p:spPr>
         <p:txBody>
-          <a:bodyPr wrap="square" rtlCol="0" anchor="ctr"/>
-          <a:lstStyle/>
-          <a:p>
-            <a:pPr indent="0" marL="0">
-              <a:buNone/>
-            </a:pPr>
-            <a:r>
-              <a:rPr lang="en-US" sz="900" i="1" dirty="0">
+          <a:bodyPr wrap="square" rtlCol="0" anchor="t"/>
+          <a:lstStyle/>
+          <a:p>
+            <a:pPr indent="0" marL="0">
+              <a:buNone/>
+            </a:pPr>
+            <a:r>
+              <a:rPr lang="en-US" sz="1400" i="1" dirty="0">
                 <a:solidFill>
                   <a:srgbClr val="E8D8A8"/>
                 </a:solidFill>
@@ -15369,7 +15025,7 @@
               </a:rPr>
               <a:t>舞曲歌</a:t>
             </a:r>
-            <a:endParaRPr lang="en-US" sz="900" dirty="0"/>
+            <a:endParaRPr lang="en-US" sz="1400" dirty="0"/>
           </a:p>
         </p:txBody>
       </p:sp>
@@ -15411,14 +15067,14 @@
           <a:ln/>
         </p:spPr>
         <p:txBody>
-          <a:bodyPr wrap="square" rtlCol="0" anchor="ctr"/>
-          <a:lstStyle/>
-          <a:p>
-            <a:pPr indent="0" marL="0">
-              <a:buNone/>
-            </a:pPr>
-            <a:r>
-              <a:rPr lang="en-US" sz="850" dirty="0">
+          <a:bodyPr wrap="square" rtlCol="0" anchor="t"/>
+          <a:lstStyle/>
+          <a:p>
+            <a:pPr indent="0" marL="0">
+              <a:buNone/>
+            </a:pPr>
+            <a:r>
+              <a:rPr lang="en-US" sz="1400" dirty="0">
                 <a:solidFill>
                   <a:srgbClr val="FBF5E6"/>
                 </a:solidFill>
@@ -15428,14 +15084,14 @@
               </a:rPr>
               <a:t>「ballare」= 跳舞 · AbbaA 形式</a:t>
             </a:r>
-            <a:endParaRPr lang="en-US" sz="850" dirty="0"/>
-          </a:p>
-          <a:p>
-            <a:pPr indent="0" marL="0">
-              <a:buNone/>
-            </a:pPr>
-            <a:r>
-              <a:rPr lang="en-US" sz="850" dirty="0">
+            <a:endParaRPr lang="en-US" sz="1400" dirty="0"/>
+          </a:p>
+          <a:p>
+            <a:pPr indent="0" marL="0">
+              <a:buNone/>
+            </a:pPr>
+            <a:r>
+              <a:rPr lang="en-US" sz="1400" dirty="0">
                 <a:solidFill>
                   <a:srgbClr val="FBF5E6"/>
                 </a:solidFill>
@@ -15445,14 +15101,14 @@
               </a:rPr>
               <a:t>• 類似法國 virelai 的單一詩節</a:t>
             </a:r>
-            <a:endParaRPr lang="en-US" sz="850" dirty="0"/>
-          </a:p>
-          <a:p>
-            <a:pPr indent="0" marL="0">
-              <a:buNone/>
-            </a:pPr>
-            <a:r>
-              <a:rPr lang="en-US" sz="850" dirty="0">
+            <a:endParaRPr lang="en-US" sz="1400" dirty="0"/>
+          </a:p>
+          <a:p>
+            <a:pPr indent="0" marL="0">
+              <a:buNone/>
+            </a:pPr>
+            <a:r>
+              <a:rPr lang="en-US" sz="1400" dirty="0">
                 <a:solidFill>
                   <a:srgbClr val="FBF5E6"/>
                 </a:solidFill>
@@ -15462,14 +15118,14 @@
               </a:rPr>
               <a:t>• 1365 年後多為 2–3 聲部複音</a:t>
             </a:r>
-            <a:endParaRPr lang="en-US" sz="850" dirty="0"/>
-          </a:p>
-          <a:p>
-            <a:pPr indent="0" marL="0">
-              <a:buNone/>
-            </a:pPr>
-            <a:r>
-              <a:rPr lang="en-US" sz="850" dirty="0">
+            <a:endParaRPr lang="en-US" sz="1400" dirty="0"/>
+          </a:p>
+          <a:p>
+            <a:pPr indent="0" marL="0">
+              <a:buNone/>
+            </a:pPr>
+            <a:r>
+              <a:rPr lang="en-US" sz="1400" dirty="0">
                 <a:solidFill>
                   <a:srgbClr val="FBF5E6"/>
                 </a:solidFill>
@@ -15479,14 +15135,14 @@
               </a:rPr>
               <a:t>• 高聲部主導（受法國 chanson 影響）</a:t>
             </a:r>
-            <a:endParaRPr lang="en-US" sz="850" dirty="0"/>
-          </a:p>
-          <a:p>
-            <a:pPr indent="0" marL="0">
-              <a:buNone/>
-            </a:pPr>
-            <a:r>
-              <a:rPr lang="en-US" sz="850" dirty="0">
+            <a:endParaRPr lang="en-US" sz="1400" dirty="0"/>
+          </a:p>
+          <a:p>
+            <a:pPr indent="0" marL="0">
+              <a:buNone/>
+            </a:pPr>
+            <a:r>
+              <a:rPr lang="en-US" sz="1400" dirty="0">
                 <a:solidFill>
                   <a:srgbClr val="FBF5E6"/>
                 </a:solidFill>
@@ -15496,7 +15152,7 @@
               </a:rPr>
               <a:t>• Landini: Non avrà ma' pietà（NAWM 31）</a:t>
             </a:r>
-            <a:endParaRPr lang="en-US" sz="850" dirty="0"/>
+            <a:endParaRPr lang="en-US" sz="1400" dirty="0"/>
           </a:p>
         </p:txBody>
       </p:sp>

--- a/Ch06_Fourteenth_Century.pptx
+++ b/Ch06_Fourteenth_Century.pptx
@@ -2675,7 +2675,7 @@
                 <a:ea typeface="Calibri" pitchFamily="34" charset="-122"/>
                 <a:cs typeface="Calibri" pitchFamily="34" charset="-120"/>
               </a:rPr>
-              <a:t>• 出生於佛羅倫斯（或鄰近 Fiesole）</a:t>
+              <a:t>• 生於佛羅倫斯（或鄰近 Fiesole）</a:t>
             </a:r>
             <a:endParaRPr lang="en-US" sz="1400" dirty="0"/>
           </a:p>
@@ -2709,7 +2709,7 @@
                 <a:ea typeface="Calibri" pitchFamily="34" charset="-122"/>
                 <a:cs typeface="Calibri" pitchFamily="34" charset="-120"/>
               </a:rPr>
-              <a:t>• 轉向音樂——成為卓越的演奏家、作曲家、詩人</a:t>
+              <a:t>• 轉向音樂 — 成為傑出演奏家、作曲家、詩人</a:t>
             </a:r>
             <a:endParaRPr lang="en-US" sz="1400" dirty="0"/>
           </a:p>
@@ -2726,7 +2726,7 @@
                 <a:ea typeface="Calibri" pitchFamily="34" charset="-122"/>
                 <a:cs typeface="Calibri" pitchFamily="34" charset="-120"/>
               </a:rPr>
-              <a:t>• 擅長多種樂器，尤以 organetto</a:t>
+              <a:t>• 以 organetto 小型管風琴聞名</a:t>
             </a:r>
             <a:endParaRPr lang="en-US" sz="1400" dirty="0"/>
           </a:p>
@@ -2743,7 +2743,7 @@
                 <a:ea typeface="Calibri" pitchFamily="34" charset="-122"/>
                 <a:cs typeface="Calibri" pitchFamily="34" charset="-120"/>
               </a:rPr>
-              <a:t>  （小型可攜式管風琴）聞名</a:t>
+              <a:t>• 1361–65 任 Santa Trinità 管風琴師</a:t>
             </a:r>
             <a:endParaRPr lang="en-US" sz="1400" dirty="0"/>
           </a:p>
@@ -2760,8 +2760,14 @@
                 <a:ea typeface="Calibri" pitchFamily="34" charset="-122"/>
                 <a:cs typeface="Calibri" pitchFamily="34" charset="-120"/>
               </a:rPr>
-              <a:t>• 1361–65 任 Santa Trinità 管風琴師</a:t>
-            </a:r>
+              <a:t>• 1365–97 任 San Lorenzo chaplain</a:t>
+            </a:r>
+            <a:endParaRPr lang="en-US" sz="1400" dirty="0"/>
+          </a:p>
+          <a:p>
+            <a:pPr indent="0" marL="0">
+              <a:buNone/>
+            </a:pPr>
             <a:endParaRPr lang="en-US" sz="1400" dirty="0"/>
           </a:p>
           <a:p>
@@ -2777,14 +2783,8 @@
                 <a:ea typeface="Calibri" pitchFamily="34" charset="-122"/>
                 <a:cs typeface="Calibri" pitchFamily="34" charset="-120"/>
               </a:rPr>
-              <a:t>• 1365–97 任 San Lorenzo 教堂 chaplain</a:t>
-            </a:r>
-            <a:endParaRPr lang="en-US" sz="1400" dirty="0"/>
-          </a:p>
-          <a:p>
-            <a:pPr indent="0" marL="0">
-              <a:buNone/>
-            </a:pPr>
+              <a:t>■ 軼事（Giovanni da Prato 記載）</a:t>
+            </a:r>
             <a:endParaRPr lang="en-US" sz="1400" dirty="0"/>
           </a:p>
           <a:p>
@@ -2800,7 +2800,7 @@
                 <a:ea typeface="Calibri" pitchFamily="34" charset="-122"/>
                 <a:cs typeface="Calibri" pitchFamily="34" charset="-120"/>
               </a:rPr>
-              <a:t>■ 軼事（Giovanni da Prato 記載）：</a:t>
+              <a:t>  Landini 彈奏時鳥群會停下傾聽，</a:t>
             </a:r>
             <a:endParaRPr lang="en-US" sz="1400" dirty="0"/>
           </a:p>
@@ -2817,58 +2817,7 @@
                 <a:ea typeface="Calibri" pitchFamily="34" charset="-122"/>
                 <a:cs typeface="Calibri" pitchFamily="34" charset="-120"/>
               </a:rPr>
-              <a:t>  據說當 Landini 彈奏 organetto 時，</a:t>
-            </a:r>
-            <a:endParaRPr lang="en-US" sz="1400" dirty="0"/>
-          </a:p>
-          <a:p>
-            <a:pPr indent="0" marL="0">
-              <a:buNone/>
-            </a:pPr>
-            <a:r>
-              <a:rPr lang="en-US" sz="1400" dirty="0">
-                <a:solidFill>
-                  <a:srgbClr val="FBF5E6"/>
-                </a:solidFill>
-                <a:latin typeface="Calibri" pitchFamily="34" charset="0"/>
-                <a:ea typeface="Calibri" pitchFamily="34" charset="-122"/>
-                <a:cs typeface="Calibri" pitchFamily="34" charset="-120"/>
-              </a:rPr>
-              <a:t>  樹上的鳥群會停止歌唱而傾聽，</a:t>
-            </a:r>
-            <a:endParaRPr lang="en-US" sz="1400" dirty="0"/>
-          </a:p>
-          <a:p>
-            <a:pPr indent="0" marL="0">
-              <a:buNone/>
-            </a:pPr>
-            <a:r>
-              <a:rPr lang="en-US" sz="1400" dirty="0">
-                <a:solidFill>
-                  <a:srgbClr val="FBF5E6"/>
-                </a:solidFill>
-                <a:latin typeface="Calibri" pitchFamily="34" charset="0"/>
-                <a:ea typeface="Calibri" pitchFamily="34" charset="-122"/>
-                <a:cs typeface="Calibri" pitchFamily="34" charset="-120"/>
-              </a:rPr>
-              <a:t>  其中一隻夜鶯棲在他頭上</a:t>
-            </a:r>
-            <a:endParaRPr lang="en-US" sz="1400" dirty="0"/>
-          </a:p>
-          <a:p>
-            <a:pPr indent="0" marL="0">
-              <a:buNone/>
-            </a:pPr>
-            <a:r>
-              <a:rPr lang="en-US" sz="1400" dirty="0">
-                <a:solidFill>
-                  <a:srgbClr val="FBF5E6"/>
-                </a:solidFill>
-                <a:latin typeface="Calibri" pitchFamily="34" charset="0"/>
-                <a:ea typeface="Calibri" pitchFamily="34" charset="-122"/>
-                <a:cs typeface="Calibri" pitchFamily="34" charset="-120"/>
-              </a:rPr>
-              <a:t>  的樹枝繼續鳴叫</a:t>
+              <a:t>  夜鶯甚至棲在其頭上樹枝鳴叫</a:t>
             </a:r>
             <a:endParaRPr lang="en-US" sz="1400" dirty="0"/>
           </a:p>
@@ -3003,7 +2952,7 @@
                 <a:ea typeface="Calibri" pitchFamily="34" charset="-122"/>
                 <a:cs typeface="Calibri" pitchFamily="34" charset="-120"/>
               </a:rPr>
-              <a:t>  · 1 caccia · 1 virelai —— 無宗教音樂</a:t>
+              <a:t>  1 caccia · 1 virelai · 無宗教音樂</a:t>
             </a:r>
             <a:endParaRPr lang="en-US" sz="1400" dirty="0"/>
           </a:p>
@@ -3026,7 +2975,7 @@
                 <a:ea typeface="Calibri" pitchFamily="34" charset="-122"/>
                 <a:cs typeface="Calibri" pitchFamily="34" charset="-120"/>
               </a:rPr>
-              <a:t>■ 旋律優雅如拱——級進為主、弧形線條</a:t>
+              <a:t>■ 旋律如拱——級進為主、弧形線條</a:t>
             </a:r>
             <a:endParaRPr lang="en-US" sz="1400" dirty="0"/>
           </a:p>
@@ -3066,7 +3015,7 @@
                 <a:ea typeface="Calibri" pitchFamily="34" charset="-122"/>
                 <a:cs typeface="Calibri" pitchFamily="34" charset="-120"/>
               </a:rPr>
-              <a:t>■ 三度與六度的和聲頻繁——甜美</a:t>
+              <a:t>■ 三度與六度和聲頻繁——甜美</a:t>
             </a:r>
             <a:endParaRPr lang="en-US" sz="1400" dirty="0"/>
           </a:p>
@@ -3089,8 +3038,14 @@
                 <a:ea typeface="Calibri" pitchFamily="34" charset="-122"/>
                 <a:cs typeface="Calibri" pitchFamily="34" charset="-120"/>
               </a:rPr>
-              <a:t>■ 每行詩首末音節加花唱，</a:t>
-            </a:r>
+              <a:t>■ 詩首末音節加花，中間音節式宣讀</a:t>
+            </a:r>
+            <a:endParaRPr lang="en-US" sz="1400" dirty="0"/>
+          </a:p>
+          <a:p>
+            <a:pPr indent="0" marL="0">
+              <a:buNone/>
+            </a:pPr>
             <a:endParaRPr lang="en-US" sz="1400" dirty="0"/>
           </a:p>
           <a:p>
@@ -3106,14 +3061,8 @@
                 <a:ea typeface="Calibri" pitchFamily="34" charset="-122"/>
                 <a:cs typeface="Calibri" pitchFamily="34" charset="-120"/>
               </a:rPr>
-              <a:t>  中間為音節式宣讀</a:t>
-            </a:r>
-            <a:endParaRPr lang="en-US" sz="1400" dirty="0"/>
-          </a:p>
-          <a:p>
-            <a:pPr indent="0" marL="0">
-              <a:buNone/>
-            </a:pPr>
+              <a:t>■ Landini 終止式（Landini cadence）：</a:t>
+            </a:r>
             <a:endParaRPr lang="en-US" sz="1400" dirty="0"/>
           </a:p>
           <a:p>
@@ -3129,7 +3078,7 @@
                 <a:ea typeface="Calibri" pitchFamily="34" charset="-122"/>
                 <a:cs typeface="Calibri" pitchFamily="34" charset="-120"/>
               </a:rPr>
-              <a:t>■ Landini 終止式（Landini cadence）：</a:t>
+              <a:t>  上聲部下行到下鄰音，</a:t>
             </a:r>
             <a:endParaRPr lang="en-US" sz="1400" dirty="0"/>
           </a:p>
@@ -3146,8 +3095,14 @@
                 <a:ea typeface="Calibri" pitchFamily="34" charset="-122"/>
                 <a:cs typeface="Calibri" pitchFamily="34" charset="-120"/>
               </a:rPr>
-              <a:t>  上聲部先下行到下鄰音，</a:t>
-            </a:r>
+              <a:t>  再上跳三度到主音 · 14–15 世紀普及</a:t>
+            </a:r>
+            <a:endParaRPr lang="en-US" sz="1400" dirty="0"/>
+          </a:p>
+          <a:p>
+            <a:pPr indent="0" marL="0">
+              <a:buNone/>
+            </a:pPr>
             <a:endParaRPr lang="en-US" sz="1400" dirty="0"/>
           </a:p>
           <a:p>
@@ -3163,64 +3118,7 @@
                 <a:ea typeface="Calibri" pitchFamily="34" charset="-122"/>
                 <a:cs typeface="Calibri" pitchFamily="34" charset="-120"/>
               </a:rPr>
-              <a:t>  再上跳三度到主音</a:t>
-            </a:r>
-            <a:endParaRPr lang="en-US" sz="1400" dirty="0"/>
-          </a:p>
-          <a:p>
-            <a:pPr indent="0" marL="0">
-              <a:buNone/>
-            </a:pPr>
-            <a:r>
-              <a:rPr lang="en-US" sz="1400" dirty="0">
-                <a:solidFill>
-                  <a:srgbClr val="FBF5E6"/>
-                </a:solidFill>
-                <a:latin typeface="Calibri" pitchFamily="34" charset="0"/>
-                <a:ea typeface="Calibri" pitchFamily="34" charset="-122"/>
-                <a:cs typeface="Calibri" pitchFamily="34" charset="-120"/>
-              </a:rPr>
-              <a:t>  14–15 世紀法義音樂普及</a:t>
-            </a:r>
-            <a:endParaRPr lang="en-US" sz="1400" dirty="0"/>
-          </a:p>
-          <a:p>
-            <a:pPr indent="0" marL="0">
-              <a:buNone/>
-            </a:pPr>
-            <a:endParaRPr lang="en-US" sz="1400" dirty="0"/>
-          </a:p>
-          <a:p>
-            <a:pPr indent="0" marL="0">
-              <a:buNone/>
-            </a:pPr>
-            <a:r>
-              <a:rPr lang="en-US" sz="1400" dirty="0">
-                <a:solidFill>
-                  <a:srgbClr val="FBF5E6"/>
-                </a:solidFill>
-                <a:latin typeface="Calibri" pitchFamily="34" charset="0"/>
-                <a:ea typeface="Calibri" pitchFamily="34" charset="-122"/>
-                <a:cs typeface="Calibri" pitchFamily="34" charset="-120"/>
-              </a:rPr>
-              <a:t>■ 埋葬於 San Lorenzo</a:t>
-            </a:r>
-            <a:endParaRPr lang="en-US" sz="1400" dirty="0"/>
-          </a:p>
-          <a:p>
-            <a:pPr indent="0" marL="0">
-              <a:buNone/>
-            </a:pPr>
-            <a:r>
-              <a:rPr lang="en-US" sz="1400" dirty="0">
-                <a:solidFill>
-                  <a:srgbClr val="FBF5E6"/>
-                </a:solidFill>
-                <a:latin typeface="Calibri" pitchFamily="34" charset="0"/>
-                <a:ea typeface="Calibri" pitchFamily="34" charset="-122"/>
-                <a:cs typeface="Calibri" pitchFamily="34" charset="-120"/>
-              </a:rPr>
-              <a:t>  墓碑刻其彈奏 organetto 形象</a:t>
+              <a:t>■ 葬於 San Lorenzo · 墓碑刻 organetto</a:t>
             </a:r>
             <a:endParaRPr lang="en-US" sz="1400" dirty="0"/>
           </a:p>
@@ -7916,7 +7814,7 @@
                 <a:ea typeface="Calibri" pitchFamily="34" charset="-122"/>
                 <a:cs typeface="Calibri" pitchFamily="34" charset="-120"/>
               </a:rPr>
-              <a:t>精確記譜使作品能獨立流通——催生作曲家的「作者意識」，Machaut 是第一個主動編全集的例子</a:t>
+              <a:t>精確記譜讓作品獨立流通，催生作曲家的「作者意識」</a:t>
             </a:r>
             <a:endParaRPr lang="en-US" sz="1400" dirty="0"/>
           </a:p>
@@ -7933,7 +7831,7 @@
                 <a:ea typeface="Calibri" pitchFamily="34" charset="-122"/>
                 <a:cs typeface="Calibri" pitchFamily="34" charset="-120"/>
               </a:rPr>
-              <a:t>Accurate notation enabled composers to take pride in authorship, first seen in Machaut</a:t>
+              <a:t>Accurate notation enabled composer authorship, first seen in Machaut</a:t>
             </a:r>
             <a:endParaRPr lang="en-US" sz="1400" dirty="0"/>
           </a:p>
@@ -8364,7 +8262,7 @@
                 <a:ea typeface="Calibri" pitchFamily="34" charset="-122"/>
                 <a:cs typeface="Calibri" pitchFamily="34" charset="-120"/>
               </a:rPr>
-              <a:t>Messiaen、Ligeti 受 Ars Subtilior 影響；Panda Bear 取樣 Machaut；Landini 進入 Judy Collins 的專輯</a:t>
+              <a:t>Messiaen、Ligeti 受 Ars Subtilior 啟發；Machaut 與 Landini 進入流行音樂取樣</a:t>
             </a:r>
             <a:endParaRPr lang="en-US" sz="1400" dirty="0"/>
           </a:p>
@@ -8381,7 +8279,7 @@
                 <a:ea typeface="Calibri" pitchFamily="34" charset="-122"/>
                 <a:cs typeface="Calibri" pitchFamily="34" charset="-120"/>
               </a:rPr>
-              <a:t>Modern echoes: Messiaen, Ligeti, Panda Bear's "I'm Not", Judy Collins's Wildflowers</a:t>
+              <a:t>Modern echoes: Messiaen, Ligeti, Panda Bear, Judy Collins</a:t>
             </a:r>
             <a:endParaRPr lang="en-US" sz="1400" dirty="0"/>
           </a:p>
@@ -12998,7 +12896,7 @@
                 <a:ea typeface="Calibri" pitchFamily="34" charset="-122"/>
                 <a:cs typeface="Calibri" pitchFamily="34" charset="-120"/>
               </a:rPr>
-              <a:t>• 首部由單一作曲家設想為整體的常規彌撒（Mass Ordinary）複音曲</a:t>
+              <a:t>• 首部由單一作曲家構思為整體的常規彌撒（Mass Ordinary）複音曲，為 Reims 主教座堂聖母禮所作</a:t>
             </a:r>
             <a:endParaRPr lang="en-US" sz="1400" dirty="0"/>
           </a:p>
@@ -13015,7 +12913,7 @@
                 <a:ea typeface="Calibri" pitchFamily="34" charset="-122"/>
                 <a:cs typeface="Calibri" pitchFamily="34" charset="-120"/>
               </a:rPr>
-              <a:t>• 4 聲部 · 加入 contratenor 與 tenor 同音域（上下互換）· 為 Reims 主教座堂聖母禮拜所作</a:t>
+              <a:t>• 4 聲部：加入 contratenor 與 tenor 同音域，上下互換</a:t>
             </a:r>
             <a:endParaRPr lang="en-US" sz="1400" dirty="0"/>
           </a:p>
@@ -13032,7 +12930,7 @@
                 <a:ea typeface="Calibri" pitchFamily="34" charset="-122"/>
                 <a:cs typeface="Calibri" pitchFamily="34" charset="-120"/>
               </a:rPr>
-              <a:t>• Kyrie / Sanctus / Agnus Dei / Ite missa est — isorhythmic · 帶 cantus firmus</a:t>
+              <a:t>• Kyrie / Sanctus / Agnus Dei / Ite missa est 採 isorhythmic + cantus firmus</a:t>
             </a:r>
             <a:endParaRPr lang="en-US" sz="1400" dirty="0"/>
           </a:p>
@@ -13049,24 +12947,7 @@
                 <a:ea typeface="Calibri" pitchFamily="34" charset="-122"/>
                 <a:cs typeface="Calibri" pitchFamily="34" charset="-120"/>
               </a:rPr>
-              <a:t>• Gloria / Credo — discant / conductus 風格（syllabic、同節奏聲部）· Gloria 的 "Jesu Christe" 以持續和弦突顯</a:t>
-            </a:r>
-            <a:endParaRPr lang="en-US" sz="1400" dirty="0"/>
-          </a:p>
-          <a:p>
-            <a:pPr indent="0" marL="0">
-              <a:buNone/>
-            </a:pPr>
-            <a:r>
-              <a:rPr lang="en-US" sz="1400" dirty="0">
-                <a:solidFill>
-                  <a:srgbClr val="E8D8A8"/>
-                </a:solidFill>
-                <a:latin typeface="Calibri" pitchFamily="34" charset="0"/>
-                <a:ea typeface="Calibri" pitchFamily="34" charset="-122"/>
-                <a:cs typeface="Calibri" pitchFamily="34" charset="-120"/>
-              </a:rPr>
-              <a:t>• 前三樂章以 D 為調心，後三樂章以 F 為調心 —— 風格統一</a:t>
+              <a:t>• Gloria / Credo 採 discant / conductus 風格（syllabic、同節奏）</a:t>
             </a:r>
             <a:endParaRPr lang="en-US" sz="1400" dirty="0"/>
           </a:p>
@@ -14590,7 +14471,7 @@
                 <a:ea typeface="Calibri" pitchFamily="34" charset="-122"/>
                 <a:cs typeface="Calibri" pitchFamily="34" charset="-120"/>
               </a:rPr>
-              <a:t>14 世紀的牧歌</a:t>
+              <a:t>14 世紀牧歌</a:t>
             </a:r>
             <a:endParaRPr lang="en-US" sz="1400" dirty="0"/>
           </a:p>
@@ -14649,7 +14530,7 @@
                 <a:ea typeface="Calibri" pitchFamily="34" charset="-122"/>
                 <a:cs typeface="Calibri" pitchFamily="34" charset="-120"/>
               </a:rPr>
-              <a:t>兩到三聲部 · 全部聲部唱相同歌詞</a:t>
+              <a:t>兩到三聲部 · 各聲部同詞</a:t>
             </a:r>
             <a:endParaRPr lang="en-US" sz="1400" dirty="0"/>
           </a:p>
@@ -14666,7 +14547,7 @@
                 <a:ea typeface="Calibri" pitchFamily="34" charset="-122"/>
                 <a:cs typeface="Calibri" pitchFamily="34" charset="-120"/>
               </a:rPr>
-              <a:t>• 詩節結構：aa b（ritornello 尾韻）</a:t>
+              <a:t>• 結構：aa b（ritornello 尾韻）</a:t>
             </a:r>
             <a:endParaRPr lang="en-US" sz="1400" dirty="0"/>
           </a:p>
@@ -14683,7 +14564,7 @@
                 <a:ea typeface="Calibri" pitchFamily="34" charset="-122"/>
                 <a:cs typeface="Calibri" pitchFamily="34" charset="-120"/>
               </a:rPr>
-              <a:t>• 田園、諷刺、或情詩主題</a:t>
+              <a:t>• 田園、諷刺、情詩主題</a:t>
             </a:r>
             <a:endParaRPr lang="en-US" sz="1400" dirty="0"/>
           </a:p>
@@ -14700,7 +14581,7 @@
                 <a:ea typeface="Calibri" pitchFamily="34" charset="-122"/>
                 <a:cs typeface="Calibri" pitchFamily="34" charset="-120"/>
               </a:rPr>
-              <a:t>• Jacopo da Bologna: Non al suo amante（NAWM 29）</a:t>
+              <a:t>• Jacopo: Non al suo amante (NAWM 29)</a:t>
             </a:r>
             <a:endParaRPr lang="en-US" sz="1400" dirty="0"/>
           </a:p>
@@ -14857,7 +14738,7 @@
                 <a:ea typeface="Calibri" pitchFamily="34" charset="-122"/>
                 <a:cs typeface="Calibri" pitchFamily="34" charset="-120"/>
               </a:rPr>
-              <a:t>字面意為「狩獵」· 上兩聲部嚴格卡農</a:t>
+              <a:t>「狩獵」· 上兩聲部嚴格卡農</a:t>
             </a:r>
             <a:endParaRPr lang="en-US" sz="1400" dirty="0"/>
           </a:p>
@@ -14874,7 +14755,7 @@
                 <a:ea typeface="Calibri" pitchFamily="34" charset="-122"/>
                 <a:cs typeface="Calibri" pitchFamily="34" charset="-120"/>
               </a:rPr>
-              <a:t>• 下方 untexted tenor 緩慢支持</a:t>
+              <a:t>• tenor 緩慢支持</a:t>
             </a:r>
             <a:endParaRPr lang="en-US" sz="1400" dirty="0"/>
           </a:p>
@@ -14891,7 +14772,7 @@
                 <a:ea typeface="Calibri" pitchFamily="34" charset="-122"/>
                 <a:cs typeface="Calibri" pitchFamily="34" charset="-120"/>
               </a:rPr>
-              <a:t>• 主題：狩獵、市集、戰鬥——</a:t>
+              <a:t>• 主題：狩獵、市集、戰鬥</a:t>
             </a:r>
             <a:endParaRPr lang="en-US" sz="1400" dirty="0"/>
           </a:p>
@@ -14908,7 +14789,7 @@
                 <a:ea typeface="Calibri" pitchFamily="34" charset="-122"/>
                 <a:cs typeface="Calibri" pitchFamily="34" charset="-120"/>
               </a:rPr>
-              <a:t>  生動的對話與回聲 · 常用 hocket</a:t>
+              <a:t>• 常用 hocket 表現回聲</a:t>
             </a:r>
             <a:endParaRPr lang="en-US" sz="1400" dirty="0"/>
           </a:p>
@@ -14925,7 +14806,7 @@
                 <a:ea typeface="Calibri" pitchFamily="34" charset="-122"/>
                 <a:cs typeface="Calibri" pitchFamily="34" charset="-120"/>
               </a:rPr>
-              <a:t>• Landini: Così pensoso（NAWM 30）</a:t>
+              <a:t>• Landini: Così pensoso (NAWM 30)</a:t>
             </a:r>
             <a:endParaRPr lang="en-US" sz="1400" dirty="0"/>
           </a:p>
@@ -15082,7 +14963,7 @@
                 <a:ea typeface="Calibri" pitchFamily="34" charset="-122"/>
                 <a:cs typeface="Calibri" pitchFamily="34" charset="-120"/>
               </a:rPr>
-              <a:t>「ballare」= 跳舞 · AbbaA 形式</a:t>
+              <a:t>「ballare」= 跳舞 · AbbaA</a:t>
             </a:r>
             <a:endParaRPr lang="en-US" sz="1400" dirty="0"/>
           </a:p>
@@ -15099,7 +14980,7 @@
                 <a:ea typeface="Calibri" pitchFamily="34" charset="-122"/>
                 <a:cs typeface="Calibri" pitchFamily="34" charset="-120"/>
               </a:rPr>
-              <a:t>• 類似法國 virelai 的單一詩節</a:t>
+              <a:t>• 類似法國 virelai 單一詩節</a:t>
             </a:r>
             <a:endParaRPr lang="en-US" sz="1400" dirty="0"/>
           </a:p>
@@ -15116,7 +14997,7 @@
                 <a:ea typeface="Calibri" pitchFamily="34" charset="-122"/>
                 <a:cs typeface="Calibri" pitchFamily="34" charset="-120"/>
               </a:rPr>
-              <a:t>• 1365 年後多為 2–3 聲部複音</a:t>
+              <a:t>• 1365 後多為 2–3 聲部</a:t>
             </a:r>
             <a:endParaRPr lang="en-US" sz="1400" dirty="0"/>
           </a:p>
@@ -15133,7 +15014,7 @@
                 <a:ea typeface="Calibri" pitchFamily="34" charset="-122"/>
                 <a:cs typeface="Calibri" pitchFamily="34" charset="-120"/>
               </a:rPr>
-              <a:t>• 高聲部主導（受法國 chanson 影響）</a:t>
+              <a:t>• 高聲部主導（chanson 影響）</a:t>
             </a:r>
             <a:endParaRPr lang="en-US" sz="1400" dirty="0"/>
           </a:p>
@@ -15150,7 +15031,7 @@
                 <a:ea typeface="Calibri" pitchFamily="34" charset="-122"/>
                 <a:cs typeface="Calibri" pitchFamily="34" charset="-120"/>
               </a:rPr>
-              <a:t>• Landini: Non avrà ma' pietà（NAWM 31）</a:t>
+              <a:t>• Landini: Non avrà (NAWM 31)</a:t>
             </a:r>
             <a:endParaRPr lang="en-US" sz="1400" dirty="0"/>
           </a:p>
